--- a/regulift-deck.pptx
+++ b/regulift-deck.pptx
@@ -6,7 +6,7 @@
   </p:sldMasterIdLst>
   <p:sldIdLst>
     <p:sldId id="256" r:id="rId6"/>
-    <p:sldId id="257" r:id="rId7"/>
+    <p:sldId id="268" r:id="rId20"/>
     <p:sldId id="258" r:id="rId8"/>
     <p:sldId id="259" r:id="rId9"/>
     <p:sldId id="263" r:id="rId15"/>
@@ -8723,7 +8723,7 @@
                 <a:ea typeface="Poppins" pitchFamily="34" charset="-122"/>
                 <a:cs typeface="Poppins" pitchFamily="34" charset="-120"/>
               </a:rPr>
-              <a:t>TEAM</a:t>
+              <a:t>NEXT STEPS</a:t>
             </a:r>
             <a:endParaRPr lang="en-US" sz="1700" dirty="0"/>
           </a:p>
@@ -8762,7 +8762,7 @@
                 <a:ea typeface="Poppins" pitchFamily="34" charset="-122"/>
                 <a:cs typeface="Poppins" pitchFamily="34" charset="-120"/>
               </a:rPr>
-              <a:t>WHY </a:t>
+              <a:t>WHERE WE </a:t>
             </a:r>
             <a:pPr indent="0" marL="0">
               <a:buNone/>
@@ -8776,7 +8776,7 @@
                 <a:ea typeface="Poppins" pitchFamily="34" charset="-122"/>
                 <a:cs typeface="Poppins" pitchFamily="34" charset="-120"/>
               </a:rPr>
-              <a:t>US.</a:t>
+              <a:t>STAND.</a:t>
             </a:r>
             <a:endParaRPr lang="en-US" sz="5300" dirty="0"/>
           </a:p>
@@ -8815,7 +8815,7 @@
                 <a:ea typeface="Poppins" pitchFamily="34" charset="-122"/>
                 <a:cs typeface="Poppins" pitchFamily="34" charset="-120"/>
               </a:rPr>
-              <a:t>We have met this problem at work. Now we build the way out of it.</a:t>
+              <a:t>Plan and validate first. Then build, launch, grow.</a:t>
             </a:r>
             <a:endParaRPr lang="en-US" sz="1950" dirty="0"/>
           </a:p>
@@ -8852,18 +8852,14 @@
         </p:nvSpPr>
         <p:spPr>
           <a:xfrm>
-            <a:off x="1069848" y="4343400"/>
-            <a:ext cx="7918704" cy="3886200"/>
-          </a:xfrm>
-          <a:prstGeom prst="roundRect">
-            <a:avLst>
-              <a:gd name="adj" fmla="val 4706"/>
-            </a:avLst>
-          </a:prstGeom>
-          <a:solidFill>
-            <a:srgbClr val="FFFFFF"/>
-          </a:solidFill>
-          <a:ln w="9525">
+            <a:off x="1353312" y="4846320"/>
+            <a:ext cx="12460986" cy="0"/>
+          </a:xfrm>
+          <a:prstGeom prst="line">
+            <a:avLst/>
+          </a:prstGeom>
+          <a:noFill/>
+          <a:ln w="38100">
             <a:solidFill>
               <a:srgbClr val="DADBD6"/>
             </a:solidFill>
@@ -8871,40 +8867,89 @@
           </a:ln>
         </p:spPr>
       </p:sp>
-      <p:pic>
-        <p:nvPicPr>
-          <p:cNvPr id="8" name="Image 0" descr="/home/andi/Dokumente/Business/Simone Business/Business/fable-andi/pitch/src/assets/andreas.png">    </p:cNvPr>
-          <p:cNvPicPr>
-            <a:picLocks noChangeAspect="1"/>
-          </p:cNvPicPr>
-          <p:nvPr/>
-        </p:nvPicPr>
-        <p:blipFill>
-          <a:blip r:embed="rId1"/>
-          <a:stretch>
-            <a:fillRect/>
-          </a:stretch>
-        </p:blipFill>
-        <p:spPr>
-          <a:xfrm>
-            <a:off x="1389888" y="4663440"/>
-            <a:ext cx="2413045" cy="3246120"/>
-          </a:xfrm>
-          <a:prstGeom prst="rect">
-            <a:avLst/>
-          </a:prstGeom>
-        </p:spPr>
-      </p:pic>
-      <p:sp>
-        <p:nvSpPr>
-          <p:cNvPr id="9" name="Text 5"/>
+      <p:sp>
+        <p:nvSpPr>
+          <p:cNvPr id="8" name="Shape 5"/>
+          <p:cNvSpPr/>
+          <p:nvPr/>
+        </p:nvSpPr>
+        <p:spPr>
+          <a:xfrm>
+            <a:off x="1353312" y="4846320"/>
+            <a:ext cx="1871091" cy="0"/>
+          </a:xfrm>
+          <a:prstGeom prst="line">
+            <a:avLst/>
+          </a:prstGeom>
+          <a:noFill/>
+          <a:ln w="38100">
+            <a:solidFill>
+              <a:srgbClr val="171717"/>
+            </a:solidFill>
+            <a:prstDash val="solid"/>
+          </a:ln>
+        </p:spPr>
+      </p:sp>
+      <p:sp>
+        <p:nvSpPr>
+          <p:cNvPr id="9" name="Shape 6"/>
+          <p:cNvSpPr/>
+          <p:nvPr/>
+        </p:nvSpPr>
+        <p:spPr>
+          <a:xfrm>
+            <a:off x="914400" y="4407408"/>
+            <a:ext cx="877824" cy="877824"/>
+          </a:xfrm>
+          <a:prstGeom prst="ellipse">
+            <a:avLst/>
+          </a:prstGeom>
+          <a:solidFill>
+            <a:srgbClr val="FBFBFB"/>
+          </a:solidFill>
+          <a:ln w="15875">
+            <a:solidFill>
+              <a:srgbClr val="B5B7B3"/>
+            </a:solidFill>
+            <a:prstDash val="solid"/>
+          </a:ln>
+        </p:spPr>
+      </p:sp>
+      <p:sp>
+        <p:nvSpPr>
+          <p:cNvPr id="10" name="Shape 7"/>
+          <p:cNvSpPr/>
+          <p:nvPr/>
+        </p:nvSpPr>
+        <p:spPr>
+          <a:xfrm>
+            <a:off x="1069848" y="4562856"/>
+            <a:ext cx="566928" cy="566928"/>
+          </a:xfrm>
+          <a:prstGeom prst="ellipse">
+            <a:avLst/>
+          </a:prstGeom>
+          <a:solidFill>
+            <a:srgbClr val="171717"/>
+          </a:solidFill>
+          <a:ln w="12700">
+            <a:solidFill>
+              <a:srgbClr val="171717"/>
+            </a:solidFill>
+            <a:prstDash val="solid"/>
+          </a:ln>
+        </p:spPr>
+      </p:sp>
+      <p:sp>
+        <p:nvSpPr>
+          <p:cNvPr id="11" name="Text 8"/>
           <p:cNvSpPr txBox="1"/>
           <p:nvPr/>
         </p:nvSpPr>
         <p:spPr>
           <a:xfrm>
-            <a:off x="4214413" y="5029200"/>
-            <a:ext cx="4408379" cy="274320"/>
+            <a:off x="1069848" y="5349240"/>
+            <a:ext cx="3742182" cy="274320"/>
           </a:xfrm>
           <a:prstGeom prst="rect">
             <a:avLst/>
@@ -8920,15 +8965,15 @@
               <a:buNone/>
             </a:pPr>
             <a:r>
-              <a:rPr lang="en-US" sz="1050" spc="150" kern="0" dirty="0">
+              <a:rPr lang="en-US" sz="1050" b="1" spc="150" kern="0" dirty="0">
                 <a:solidFill>
-                  <a:srgbClr val="687075"/>
+                  <a:srgbClr val="171717"/>
                 </a:solidFill>
                 <a:latin typeface="Poppins" pitchFamily="34" charset="0"/>
                 <a:ea typeface="Poppins" pitchFamily="34" charset="-122"/>
                 <a:cs typeface="Poppins" pitchFamily="34" charset="-120"/>
               </a:rPr>
-              <a:t>BUILDS THE PRODUCT</a:t>
+              <a:t>NOW</a:t>
             </a:r>
             <a:endParaRPr lang="en-US" sz="1050" dirty="0"/>
           </a:p>
@@ -8936,14 +8981,14 @@
       </p:sp>
       <p:sp>
         <p:nvSpPr>
-          <p:cNvPr id="10" name="Text 6"/>
+          <p:cNvPr id="12" name="Text 9"/>
           <p:cNvSpPr txBox="1"/>
           <p:nvPr/>
         </p:nvSpPr>
         <p:spPr>
           <a:xfrm>
-            <a:off x="4214413" y="5303520"/>
-            <a:ext cx="4408379" cy="457200"/>
+            <a:off x="1069848" y="5650992"/>
+            <a:ext cx="3742182" cy="502920"/>
           </a:xfrm>
           <a:prstGeom prst="rect">
             <a:avLst/>
@@ -8959,7 +9004,7 @@
               <a:buNone/>
             </a:pPr>
             <a:r>
-              <a:rPr lang="en-US" sz="2200" b="1" dirty="0">
+              <a:rPr lang="en-US" sz="2600" b="1" dirty="0">
                 <a:solidFill>
                   <a:srgbClr val="171717"/>
                 </a:solidFill>
@@ -8967,61 +9012,22 @@
                 <a:ea typeface="Poppins" pitchFamily="34" charset="-122"/>
                 <a:cs typeface="Poppins" pitchFamily="34" charset="-120"/>
               </a:rPr>
-              <a:t>ANDREAS HERZINGER</a:t>
+              <a:t>PLAN AND VALIDATE</a:t>
             </a:r>
-            <a:endParaRPr lang="en-US" sz="2200" dirty="0"/>
+            <a:endParaRPr lang="en-US" sz="2600" dirty="0"/>
           </a:p>
         </p:txBody>
       </p:sp>
       <p:sp>
         <p:nvSpPr>
-          <p:cNvPr id="11" name="Text 7"/>
+          <p:cNvPr id="13" name="Text 10"/>
           <p:cNvSpPr txBox="1"/>
           <p:nvPr/>
         </p:nvSpPr>
         <p:spPr>
           <a:xfrm>
-            <a:off x="4214413" y="5760720"/>
-            <a:ext cx="4408379" cy="320040"/>
-          </a:xfrm>
-          <a:prstGeom prst="rect">
-            <a:avLst/>
-          </a:prstGeom>
-          <a:noFill/>
-          <a:ln/>
-        </p:spPr>
-        <p:txBody>
-          <a:bodyPr wrap="square" lIns="0" tIns="0" rIns="0" bIns="0" rtlCol="0" anchor="t"/>
-          <a:lstStyle/>
-          <a:p>
-            <a:pPr indent="0" marL="0">
-              <a:buNone/>
-            </a:pPr>
-            <a:r>
-              <a:rPr lang="en-US" sz="1350" b="1" dirty="0">
-                <a:solidFill>
-                  <a:srgbClr val="315D66"/>
-                </a:solidFill>
-                <a:latin typeface="Poppins" pitchFamily="34" charset="0"/>
-                <a:ea typeface="Poppins" pitchFamily="34" charset="-122"/>
-                <a:cs typeface="Poppins" pitchFamily="34" charset="-120"/>
-              </a:rPr>
-              <a:t>Product &amp; engineering</a:t>
-            </a:r>
-            <a:endParaRPr lang="en-US" sz="1350" dirty="0"/>
-          </a:p>
-        </p:txBody>
-      </p:sp>
-      <p:sp>
-        <p:nvSpPr>
-          <p:cNvPr id="12" name="Text 8"/>
-          <p:cNvSpPr txBox="1"/>
-          <p:nvPr/>
-        </p:nvSpPr>
-        <p:spPr>
-          <a:xfrm>
-            <a:off x="4214413" y="6172200"/>
-            <a:ext cx="4408379" cy="1737360"/>
+            <a:off x="1069848" y="6217920"/>
+            <a:ext cx="3742182" cy="1371600"/>
           </a:xfrm>
           <a:prstGeom prst="rect">
             <a:avLst/>
@@ -9040,7 +9046,7 @@
               <a:buNone/>
             </a:pPr>
             <a:r>
-              <a:rPr lang="en-US" sz="1450" dirty="0">
+              <a:rPr lang="en-US" sz="1500" b="1" dirty="0">
                 <a:solidFill>
                   <a:srgbClr val="3B3E3C"/>
                 </a:solidFill>
@@ -9048,73 +9054,92 @@
                 <a:ea typeface="Poppins" pitchFamily="34" charset="-122"/>
                 <a:cs typeface="Poppins" pitchFamily="34" charset="-120"/>
               </a:rPr>
-              <a:t>Builds AI integrations for companies: secure connectors, data to LLM, RAG in production. Has seen how compliance turns every integration into a legal question. The evidence graph is his craft.</a:t>
+              <a:t>Planning the product.</a:t>
             </a:r>
-            <a:endParaRPr lang="en-US" sz="1450" dirty="0"/>
+            <a:endParaRPr lang="en-US" sz="1500" dirty="0"/>
+          </a:p>
+          <a:p>
+            <a:pPr indent="0" marL="0">
+              <a:lnSpc>
+                <a:spcPct val="108000"/>
+              </a:lnSpc>
+              <a:buNone/>
+            </a:pPr>
+            <a:r>
+              <a:rPr lang="en-US" sz="1500" dirty="0">
+                <a:solidFill>
+                  <a:srgbClr val="3B3E3C"/>
+                </a:solidFill>
+                <a:latin typeface="Poppins" pitchFamily="34" charset="0"/>
+                <a:ea typeface="Poppins" pitchFamily="34" charset="-122"/>
+                <a:cs typeface="Poppins" pitchFamily="34" charset="-120"/>
+              </a:rPr>
+              <a:t>Validating the legal model country by country.</a:t>
+            </a:r>
+            <a:endParaRPr lang="en-US" sz="1500" dirty="0"/>
           </a:p>
         </p:txBody>
       </p:sp>
       <p:sp>
         <p:nvSpPr>
-          <p:cNvPr id="13" name="Shape 9"/>
+          <p:cNvPr id="14" name="Shape 11"/>
           <p:cNvSpPr/>
           <p:nvPr/>
         </p:nvSpPr>
         <p:spPr>
           <a:xfrm>
-            <a:off x="9354312" y="4343400"/>
-            <a:ext cx="7918704" cy="3886200"/>
-          </a:xfrm>
-          <a:prstGeom prst="roundRect">
-            <a:avLst>
-              <a:gd name="adj" fmla="val 4706"/>
-            </a:avLst>
+            <a:off x="5223510" y="4562856"/>
+            <a:ext cx="566928" cy="566928"/>
+          </a:xfrm>
+          <a:prstGeom prst="ellipse">
+            <a:avLst/>
+          </a:prstGeom>
+          <a:solidFill>
+            <a:srgbClr val="497078"/>
+          </a:solidFill>
+          <a:ln w="12700">
+            <a:solidFill>
+              <a:srgbClr val="497078"/>
+            </a:solidFill>
+            <a:prstDash val="solid"/>
+          </a:ln>
+        </p:spPr>
+      </p:sp>
+      <p:sp>
+        <p:nvSpPr>
+          <p:cNvPr id="15" name="Shape 12"/>
+          <p:cNvSpPr/>
+          <p:nvPr/>
+        </p:nvSpPr>
+        <p:spPr>
+          <a:xfrm>
+            <a:off x="5424678" y="4764024"/>
+            <a:ext cx="164592" cy="164592"/>
+          </a:xfrm>
+          <a:prstGeom prst="ellipse">
+            <a:avLst/>
           </a:prstGeom>
           <a:solidFill>
             <a:srgbClr val="FFFFFF"/>
           </a:solidFill>
-          <a:ln w="9525">
-            <a:solidFill>
-              <a:srgbClr val="DADBD6"/>
+          <a:ln w="12700">
+            <a:solidFill>
+              <a:srgbClr val="FFFFFF"/>
             </a:solidFill>
             <a:prstDash val="solid"/>
           </a:ln>
         </p:spPr>
       </p:sp>
-      <p:pic>
-        <p:nvPicPr>
-          <p:cNvPr id="14" name="Image 1" descr="/home/andi/Dokumente/Business/Simone Business/Business/fable-andi/pitch/src/assets/simone.png">    </p:cNvPr>
-          <p:cNvPicPr>
-            <a:picLocks noChangeAspect="1"/>
-          </p:cNvPicPr>
-          <p:nvPr/>
-        </p:nvPicPr>
-        <p:blipFill>
-          <a:blip r:embed="rId2"/>
-          <a:stretch>
-            <a:fillRect/>
-          </a:stretch>
-        </p:blipFill>
-        <p:spPr>
-          <a:xfrm>
-            <a:off x="9674352" y="4663440"/>
-            <a:ext cx="2413045" cy="3246120"/>
-          </a:xfrm>
-          <a:prstGeom prst="rect">
-            <a:avLst/>
-          </a:prstGeom>
-        </p:spPr>
-      </p:pic>
-      <p:sp>
-        <p:nvSpPr>
-          <p:cNvPr id="15" name="Text 10"/>
+      <p:sp>
+        <p:nvSpPr>
+          <p:cNvPr id="16" name="Text 13"/>
           <p:cNvSpPr txBox="1"/>
           <p:nvPr/>
         </p:nvSpPr>
         <p:spPr>
           <a:xfrm>
-            <a:off x="12498877" y="5029200"/>
-            <a:ext cx="4408379" cy="274320"/>
+            <a:off x="5223510" y="5349240"/>
+            <a:ext cx="3742182" cy="274320"/>
           </a:xfrm>
           <a:prstGeom prst="rect">
             <a:avLst/>
@@ -9130,15 +9155,15 @@
               <a:buNone/>
             </a:pPr>
             <a:r>
-              <a:rPr lang="en-US" sz="1050" spc="150" kern="0" dirty="0">
+              <a:rPr lang="en-US" sz="1050" b="1" spc="150" kern="0" dirty="0">
                 <a:solidFill>
-                  <a:srgbClr val="687075"/>
+                  <a:srgbClr val="315D66"/>
                 </a:solidFill>
                 <a:latin typeface="Poppins" pitchFamily="34" charset="0"/>
                 <a:ea typeface="Poppins" pitchFamily="34" charset="-122"/>
                 <a:cs typeface="Poppins" pitchFamily="34" charset="-120"/>
               </a:rPr>
-              <a:t>BUILDS THE MARKET</a:t>
+              <a:t>AI ENTREPRENEURS LAB</a:t>
             </a:r>
             <a:endParaRPr lang="en-US" sz="1050" dirty="0"/>
           </a:p>
@@ -9146,14 +9171,14 @@
       </p:sp>
       <p:sp>
         <p:nvSpPr>
-          <p:cNvPr id="16" name="Text 11"/>
+          <p:cNvPr id="17" name="Text 14"/>
           <p:cNvSpPr txBox="1"/>
           <p:nvPr/>
         </p:nvSpPr>
         <p:spPr>
           <a:xfrm>
-            <a:off x="12498877" y="5303520"/>
-            <a:ext cx="4408379" cy="457200"/>
+            <a:off x="5223510" y="5650992"/>
+            <a:ext cx="3742182" cy="502920"/>
           </a:xfrm>
           <a:prstGeom prst="rect">
             <a:avLst/>
@@ -9169,7 +9194,7 @@
               <a:buNone/>
             </a:pPr>
             <a:r>
-              <a:rPr lang="en-US" sz="2200" b="1" dirty="0">
+              <a:rPr lang="en-US" sz="2600" b="1" dirty="0">
                 <a:solidFill>
                   <a:srgbClr val="171717"/>
                 </a:solidFill>
@@ -9177,61 +9202,22 @@
                 <a:ea typeface="Poppins" pitchFamily="34" charset="-122"/>
                 <a:cs typeface="Poppins" pitchFamily="34" charset="-120"/>
               </a:rPr>
-              <a:t>SIMONE MATTIOLI</a:t>
+              <a:t>BUILD</a:t>
             </a:r>
-            <a:endParaRPr lang="en-US" sz="2200" dirty="0"/>
+            <a:endParaRPr lang="en-US" sz="2600" dirty="0"/>
           </a:p>
         </p:txBody>
       </p:sp>
       <p:sp>
         <p:nvSpPr>
-          <p:cNvPr id="17" name="Text 12"/>
+          <p:cNvPr id="18" name="Text 15"/>
           <p:cNvSpPr txBox="1"/>
           <p:nvPr/>
         </p:nvSpPr>
         <p:spPr>
           <a:xfrm>
-            <a:off x="12498877" y="5760720"/>
-            <a:ext cx="4408379" cy="320040"/>
-          </a:xfrm>
-          <a:prstGeom prst="rect">
-            <a:avLst/>
-          </a:prstGeom>
-          <a:noFill/>
-          <a:ln/>
-        </p:spPr>
-        <p:txBody>
-          <a:bodyPr wrap="square" lIns="0" tIns="0" rIns="0" bIns="0" rtlCol="0" anchor="t"/>
-          <a:lstStyle/>
-          <a:p>
-            <a:pPr indent="0" marL="0">
-              <a:buNone/>
-            </a:pPr>
-            <a:r>
-              <a:rPr lang="en-US" sz="1350" b="1" dirty="0">
-                <a:solidFill>
-                  <a:srgbClr val="315D66"/>
-                </a:solidFill>
-                <a:latin typeface="Poppins" pitchFamily="34" charset="0"/>
-                <a:ea typeface="Poppins" pitchFamily="34" charset="-122"/>
-                <a:cs typeface="Poppins" pitchFamily="34" charset="-120"/>
-              </a:rPr>
-              <a:t>AI &amp; product development</a:t>
-            </a:r>
-            <a:endParaRPr lang="en-US" sz="1350" dirty="0"/>
-          </a:p>
-        </p:txBody>
-      </p:sp>
-      <p:sp>
-        <p:nvSpPr>
-          <p:cNvPr id="18" name="Text 13"/>
-          <p:cNvSpPr txBox="1"/>
-          <p:nvPr/>
-        </p:nvSpPr>
-        <p:spPr>
-          <a:xfrm>
-            <a:off x="12498877" y="6172200"/>
-            <a:ext cx="4408379" cy="1737360"/>
+            <a:off x="5223510" y="6217920"/>
+            <a:ext cx="3742182" cy="1371600"/>
           </a:xfrm>
           <a:prstGeom prst="rect">
             <a:avLst/>
@@ -9250,7 +9236,7 @@
               <a:buNone/>
             </a:pPr>
             <a:r>
-              <a:rPr lang="en-US" sz="1450" dirty="0">
+              <a:rPr lang="en-US" sz="1500" b="1" dirty="0">
                 <a:solidFill>
                   <a:srgbClr val="3B3E3C"/>
                 </a:solidFill>
@@ -9258,32 +9244,409 @@
                 <a:ea typeface="Poppins" pitchFamily="34" charset="-122"/>
                 <a:cs typeface="Poppins" pitchFamily="34" charset="-120"/>
               </a:rPr>
-              <a:t>Customers, partners and discovery. EIT Digital Master School. The first year is interviews, one Dutch firm and two design partners, which is his ground.</a:t>
+              <a:t>Build the MVP.</a:t>
             </a:r>
-            <a:endParaRPr lang="en-US" sz="1450" dirty="0"/>
+            <a:endParaRPr lang="en-US" sz="1500" dirty="0"/>
+          </a:p>
+          <a:p>
+            <a:pPr indent="0" marL="0">
+              <a:lnSpc>
+                <a:spcPct val="108000"/>
+              </a:lnSpc>
+              <a:buNone/>
+            </a:pPr>
+            <a:r>
+              <a:rPr lang="en-US" sz="1500" dirty="0">
+                <a:solidFill>
+                  <a:srgbClr val="3B3E3C"/>
+                </a:solidFill>
+                <a:latin typeface="Poppins" pitchFamily="34" charset="0"/>
+                <a:ea typeface="Poppins" pitchFamily="34" charset="-122"/>
+                <a:cs typeface="Poppins" pitchFamily="34" charset="-120"/>
+              </a:rPr>
+              <a:t>Evidence graph, adviser, legal gate.</a:t>
+            </a:r>
+            <a:endParaRPr lang="en-US" sz="1500" dirty="0"/>
           </a:p>
         </p:txBody>
       </p:sp>
       <p:sp>
         <p:nvSpPr>
-          <p:cNvPr id="19" name="Shape 14"/>
+          <p:cNvPr id="19" name="Shape 16"/>
           <p:cNvSpPr/>
           <p:nvPr/>
         </p:nvSpPr>
         <p:spPr>
           <a:xfrm>
-            <a:off x="1069848" y="8458200"/>
-            <a:ext cx="16203168" cy="868680"/>
+            <a:off x="9377172" y="4562856"/>
+            <a:ext cx="566928" cy="566928"/>
+          </a:xfrm>
+          <a:prstGeom prst="ellipse">
+            <a:avLst/>
+          </a:prstGeom>
+          <a:solidFill>
+            <a:srgbClr val="FBFBFB"/>
+          </a:solidFill>
+          <a:ln w="22225">
+            <a:solidFill>
+              <a:srgbClr val="B9BBB7"/>
+            </a:solidFill>
+            <a:prstDash val="solid"/>
+          </a:ln>
+        </p:spPr>
+      </p:sp>
+      <p:sp>
+        <p:nvSpPr>
+          <p:cNvPr id="20" name="Text 17"/>
+          <p:cNvSpPr txBox="1"/>
+          <p:nvPr/>
+        </p:nvSpPr>
+        <p:spPr>
+          <a:xfrm>
+            <a:off x="9377172" y="5349240"/>
+            <a:ext cx="3742182" cy="274320"/>
+          </a:xfrm>
+          <a:prstGeom prst="rect">
+            <a:avLst/>
+          </a:prstGeom>
+          <a:noFill/>
+          <a:ln/>
+        </p:spPr>
+        <p:txBody>
+          <a:bodyPr wrap="square" lIns="0" tIns="0" rIns="0" bIns="0" rtlCol="0" anchor="t"/>
+          <a:lstStyle/>
+          <a:p>
+            <a:pPr indent="0" marL="0">
+              <a:buNone/>
+            </a:pPr>
+            <a:r>
+              <a:rPr lang="en-US" sz="1050" b="1" spc="150" kern="0" dirty="0">
+                <a:solidFill>
+                  <a:srgbClr val="687075"/>
+                </a:solidFill>
+                <a:latin typeface="Poppins" pitchFamily="34" charset="0"/>
+                <a:ea typeface="Poppins" pitchFamily="34" charset="-122"/>
+                <a:cs typeface="Poppins" pitchFamily="34" charset="-120"/>
+              </a:rPr>
+              <a:t>THEN</a:t>
+            </a:r>
+            <a:endParaRPr lang="en-US" sz="1050" dirty="0"/>
+          </a:p>
+        </p:txBody>
+      </p:sp>
+      <p:sp>
+        <p:nvSpPr>
+          <p:cNvPr id="21" name="Text 18"/>
+          <p:cNvSpPr txBox="1"/>
+          <p:nvPr/>
+        </p:nvSpPr>
+        <p:spPr>
+          <a:xfrm>
+            <a:off x="9377172" y="5650992"/>
+            <a:ext cx="3742182" cy="502920"/>
+          </a:xfrm>
+          <a:prstGeom prst="rect">
+            <a:avLst/>
+          </a:prstGeom>
+          <a:noFill/>
+          <a:ln/>
+        </p:spPr>
+        <p:txBody>
+          <a:bodyPr wrap="square" lIns="0" tIns="0" rIns="0" bIns="0" rtlCol="0" anchor="t"/>
+          <a:lstStyle/>
+          <a:p>
+            <a:pPr indent="0" marL="0">
+              <a:buNone/>
+            </a:pPr>
+            <a:r>
+              <a:rPr lang="en-US" sz="2600" b="1" dirty="0">
+                <a:solidFill>
+                  <a:srgbClr val="4A4D4A"/>
+                </a:solidFill>
+                <a:latin typeface="Poppins" pitchFamily="34" charset="0"/>
+                <a:ea typeface="Poppins" pitchFamily="34" charset="-122"/>
+                <a:cs typeface="Poppins" pitchFamily="34" charset="-120"/>
+              </a:rPr>
+              <a:t>LAUNCH</a:t>
+            </a:r>
+            <a:endParaRPr lang="en-US" sz="2600" dirty="0"/>
+          </a:p>
+        </p:txBody>
+      </p:sp>
+      <p:sp>
+        <p:nvSpPr>
+          <p:cNvPr id="22" name="Text 19"/>
+          <p:cNvSpPr txBox="1"/>
+          <p:nvPr/>
+        </p:nvSpPr>
+        <p:spPr>
+          <a:xfrm>
+            <a:off x="9377172" y="6217920"/>
+            <a:ext cx="3742182" cy="1371600"/>
+          </a:xfrm>
+          <a:prstGeom prst="rect">
+            <a:avLst/>
+          </a:prstGeom>
+          <a:noFill/>
+          <a:ln/>
+        </p:spPr>
+        <p:txBody>
+          <a:bodyPr wrap="square" lIns="0" tIns="0" rIns="0" bIns="0" rtlCol="0" anchor="t"/>
+          <a:lstStyle/>
+          <a:p>
+            <a:pPr indent="0" marL="0">
+              <a:lnSpc>
+                <a:spcPct val="108000"/>
+              </a:lnSpc>
+              <a:buNone/>
+            </a:pPr>
+            <a:r>
+              <a:rPr lang="en-US" sz="1500" b="1" dirty="0">
+                <a:solidFill>
+                  <a:srgbClr val="687075"/>
+                </a:solidFill>
+                <a:latin typeface="Poppins" pitchFamily="34" charset="0"/>
+                <a:ea typeface="Poppins" pitchFamily="34" charset="-122"/>
+                <a:cs typeface="Poppins" pitchFamily="34" charset="-120"/>
+              </a:rPr>
+              <a:t>NIS2 readiness in the Netherlands.</a:t>
+            </a:r>
+            <a:endParaRPr lang="en-US" sz="1500" dirty="0"/>
+          </a:p>
+          <a:p>
+            <a:pPr indent="0" marL="0">
+              <a:lnSpc>
+                <a:spcPct val="108000"/>
+              </a:lnSpc>
+              <a:buNone/>
+            </a:pPr>
+            <a:r>
+              <a:rPr lang="en-US" sz="1500" dirty="0">
+                <a:solidFill>
+                  <a:srgbClr val="687075"/>
+                </a:solidFill>
+                <a:latin typeface="Poppins" pitchFamily="34" charset="0"/>
+                <a:ea typeface="Poppins" pitchFamily="34" charset="-122"/>
+                <a:cs typeface="Poppins" pitchFamily="34" charset="-120"/>
+              </a:rPr>
+              <a:t>Win customers. Sign law firm partners.</a:t>
+            </a:r>
+            <a:endParaRPr lang="en-US" sz="1500" dirty="0"/>
+          </a:p>
+        </p:txBody>
+      </p:sp>
+      <p:sp>
+        <p:nvSpPr>
+          <p:cNvPr id="23" name="Shape 20"/>
+          <p:cNvSpPr/>
+          <p:nvPr/>
+        </p:nvSpPr>
+        <p:spPr>
+          <a:xfrm>
+            <a:off x="13530834" y="4562856"/>
+            <a:ext cx="566928" cy="566928"/>
+          </a:xfrm>
+          <a:prstGeom prst="ellipse">
+            <a:avLst/>
+          </a:prstGeom>
+          <a:solidFill>
+            <a:srgbClr val="FBFBFB"/>
+          </a:solidFill>
+          <a:ln w="22225">
+            <a:solidFill>
+              <a:srgbClr val="B9BBB7"/>
+            </a:solidFill>
+            <a:prstDash val="solid"/>
+          </a:ln>
+        </p:spPr>
+      </p:sp>
+      <p:sp>
+        <p:nvSpPr>
+          <p:cNvPr id="24" name="Text 21"/>
+          <p:cNvSpPr txBox="1"/>
+          <p:nvPr/>
+        </p:nvSpPr>
+        <p:spPr>
+          <a:xfrm>
+            <a:off x="13530834" y="5349240"/>
+            <a:ext cx="3742182" cy="274320"/>
+          </a:xfrm>
+          <a:prstGeom prst="rect">
+            <a:avLst/>
+          </a:prstGeom>
+          <a:noFill/>
+          <a:ln/>
+        </p:spPr>
+        <p:txBody>
+          <a:bodyPr wrap="square" lIns="0" tIns="0" rIns="0" bIns="0" rtlCol="0" anchor="t"/>
+          <a:lstStyle/>
+          <a:p>
+            <a:pPr indent="0" marL="0">
+              <a:buNone/>
+            </a:pPr>
+            <a:r>
+              <a:rPr lang="en-US" sz="1050" b="1" spc="150" kern="0" dirty="0">
+                <a:solidFill>
+                  <a:srgbClr val="687075"/>
+                </a:solidFill>
+                <a:latin typeface="Poppins" pitchFamily="34" charset="0"/>
+                <a:ea typeface="Poppins" pitchFamily="34" charset="-122"/>
+                <a:cs typeface="Poppins" pitchFamily="34" charset="-120"/>
+              </a:rPr>
+              <a:t>THEN</a:t>
+            </a:r>
+            <a:endParaRPr lang="en-US" sz="1050" dirty="0"/>
+          </a:p>
+        </p:txBody>
+      </p:sp>
+      <p:sp>
+        <p:nvSpPr>
+          <p:cNvPr id="25" name="Text 22"/>
+          <p:cNvSpPr txBox="1"/>
+          <p:nvPr/>
+        </p:nvSpPr>
+        <p:spPr>
+          <a:xfrm>
+            <a:off x="13530834" y="5650992"/>
+            <a:ext cx="3742182" cy="502920"/>
+          </a:xfrm>
+          <a:prstGeom prst="rect">
+            <a:avLst/>
+          </a:prstGeom>
+          <a:noFill/>
+          <a:ln/>
+        </p:spPr>
+        <p:txBody>
+          <a:bodyPr wrap="square" lIns="0" tIns="0" rIns="0" bIns="0" rtlCol="0" anchor="t"/>
+          <a:lstStyle/>
+          <a:p>
+            <a:pPr indent="0" marL="0">
+              <a:buNone/>
+            </a:pPr>
+            <a:r>
+              <a:rPr lang="en-US" sz="2600" b="1" dirty="0">
+                <a:solidFill>
+                  <a:srgbClr val="4A4D4A"/>
+                </a:solidFill>
+                <a:latin typeface="Poppins" pitchFamily="34" charset="0"/>
+                <a:ea typeface="Poppins" pitchFamily="34" charset="-122"/>
+                <a:cs typeface="Poppins" pitchFamily="34" charset="-120"/>
+              </a:rPr>
+              <a:t>GROW</a:t>
+            </a:r>
+            <a:endParaRPr lang="en-US" sz="2600" dirty="0"/>
+          </a:p>
+        </p:txBody>
+      </p:sp>
+      <p:sp>
+        <p:nvSpPr>
+          <p:cNvPr id="26" name="Text 23"/>
+          <p:cNvSpPr txBox="1"/>
+          <p:nvPr/>
+        </p:nvSpPr>
+        <p:spPr>
+          <a:xfrm>
+            <a:off x="13530834" y="6217920"/>
+            <a:ext cx="3742182" cy="1371600"/>
+          </a:xfrm>
+          <a:prstGeom prst="rect">
+            <a:avLst/>
+          </a:prstGeom>
+          <a:noFill/>
+          <a:ln/>
+        </p:spPr>
+        <p:txBody>
+          <a:bodyPr wrap="square" lIns="0" tIns="0" rIns="0" bIns="0" rtlCol="0" anchor="t"/>
+          <a:lstStyle/>
+          <a:p>
+            <a:pPr indent="0" marL="0">
+              <a:lnSpc>
+                <a:spcPct val="108000"/>
+              </a:lnSpc>
+              <a:buNone/>
+            </a:pPr>
+            <a:r>
+              <a:rPr lang="en-US" sz="1500" b="1" dirty="0">
+                <a:solidFill>
+                  <a:srgbClr val="687075"/>
+                </a:solidFill>
+                <a:latin typeface="Poppins" pitchFamily="34" charset="0"/>
+                <a:ea typeface="Poppins" pitchFamily="34" charset="-122"/>
+                <a:cs typeface="Poppins" pitchFamily="34" charset="-120"/>
+              </a:rPr>
+              <a:t>Sweden next.</a:t>
+            </a:r>
+            <a:endParaRPr lang="en-US" sz="1500" dirty="0"/>
+          </a:p>
+          <a:p>
+            <a:pPr indent="0" marL="0">
+              <a:lnSpc>
+                <a:spcPct val="108000"/>
+              </a:lnSpc>
+              <a:buNone/>
+            </a:pPr>
+            <a:r>
+              <a:rPr lang="en-US" sz="1500" dirty="0">
+                <a:solidFill>
+                  <a:srgbClr val="687075"/>
+                </a:solidFill>
+                <a:latin typeface="Poppins" pitchFamily="34" charset="0"/>
+                <a:ea typeface="Poppins" pitchFamily="34" charset="-122"/>
+                <a:cs typeface="Poppins" pitchFamily="34" charset="-120"/>
+              </a:rPr>
+              <a:t>Germany as a country pack. Every further regulation.</a:t>
+            </a:r>
+            <a:endParaRPr lang="en-US" sz="1500" dirty="0"/>
+          </a:p>
+        </p:txBody>
+      </p:sp>
+      <p:sp>
+        <p:nvSpPr>
+          <p:cNvPr id="27" name="Shape 24"/>
+          <p:cNvSpPr/>
+          <p:nvPr/>
+        </p:nvSpPr>
+        <p:spPr>
+          <a:xfrm>
+            <a:off x="1069848" y="7955280"/>
+            <a:ext cx="16203168" cy="960120"/>
           </a:xfrm>
           <a:prstGeom prst="roundRect">
             <a:avLst>
-              <a:gd name="adj" fmla="val 16842"/>
+              <a:gd name="adj" fmla="val 15238"/>
+            </a:avLst>
+          </a:prstGeom>
+          <a:solidFill>
+            <a:srgbClr val="E8F2F2"/>
+          </a:solidFill>
+          <a:ln w="9525">
+            <a:solidFill>
+              <a:srgbClr val="E8F2F2"/>
+            </a:solidFill>
+            <a:prstDash val="solid"/>
+          </a:ln>
+        </p:spPr>
+      </p:sp>
+      <p:sp>
+        <p:nvSpPr>
+          <p:cNvPr id="28" name="Shape 25"/>
+          <p:cNvSpPr/>
+          <p:nvPr/>
+        </p:nvSpPr>
+        <p:spPr>
+          <a:xfrm rot="16200000">
+            <a:off x="1732788" y="7292340"/>
+            <a:ext cx="960120" cy="2286000"/>
+          </a:xfrm>
+          <a:prstGeom prst="round2SameRect">
+            <a:avLst>
+              <a:gd name="adj" fmla="val 15238"/>
             </a:avLst>
           </a:prstGeom>
           <a:solidFill>
             <a:srgbClr val="171717"/>
           </a:solidFill>
-          <a:ln w="9525">
+          <a:ln w="12700">
             <a:solidFill>
               <a:srgbClr val="171717"/>
             </a:solidFill>
@@ -9293,14 +9656,53 @@
       </p:sp>
       <p:sp>
         <p:nvSpPr>
-          <p:cNvPr id="20" name="Text 15"/>
+          <p:cNvPr id="29" name="Text 26"/>
           <p:cNvSpPr txBox="1"/>
           <p:nvPr/>
         </p:nvSpPr>
         <p:spPr>
           <a:xfrm>
-            <a:off x="1389888" y="8458200"/>
-            <a:ext cx="2011680" cy="868680"/>
+            <a:off x="1069848" y="7955280"/>
+            <a:ext cx="2286000" cy="960120"/>
+          </a:xfrm>
+          <a:prstGeom prst="rect">
+            <a:avLst/>
+          </a:prstGeom>
+          <a:noFill/>
+          <a:ln/>
+        </p:spPr>
+        <p:txBody>
+          <a:bodyPr wrap="square" lIns="0" tIns="0" rIns="0" bIns="0" rtlCol="0" anchor="ctr"/>
+          <a:lstStyle/>
+          <a:p>
+            <a:pPr algn="ctr" indent="0" marL="0">
+              <a:buNone/>
+            </a:pPr>
+            <a:r>
+              <a:rPr lang="en-US" sz="1100" b="1" spc="200" kern="0" dirty="0">
+                <a:solidFill>
+                  <a:srgbClr val="FFFFFF"/>
+                </a:solidFill>
+                <a:latin typeface="Poppins" pitchFamily="34" charset="0"/>
+                <a:ea typeface="Poppins" pitchFamily="34" charset="-122"/>
+                <a:cs typeface="Poppins" pitchFamily="34" charset="-120"/>
+              </a:rPr>
+              <a:t>OUR MISSION</a:t>
+            </a:r>
+            <a:endParaRPr lang="en-US" sz="1100" dirty="0"/>
+          </a:p>
+        </p:txBody>
+      </p:sp>
+      <p:sp>
+        <p:nvSpPr>
+          <p:cNvPr id="30" name="Text 27"/>
+          <p:cNvSpPr txBox="1"/>
+          <p:nvPr/>
+        </p:nvSpPr>
+        <p:spPr>
+          <a:xfrm>
+            <a:off x="3767328" y="7955280"/>
+            <a:ext cx="13185648" cy="960120"/>
           </a:xfrm>
           <a:prstGeom prst="rect">
             <a:avLst/>
@@ -9316,62 +9718,37 @@
               <a:buNone/>
             </a:pPr>
             <a:r>
-              <a:rPr lang="en-US" sz="1050" b="1" spc="150" kern="0" dirty="0">
+              <a:rPr lang="en-US" sz="2200" b="1" spc="-50" kern="0" dirty="0">
                 <a:solidFill>
-                  <a:srgbClr val="B9C4C2"/>
+                  <a:srgbClr val="171717"/>
                 </a:solidFill>
                 <a:latin typeface="Poppins" pitchFamily="34" charset="0"/>
                 <a:ea typeface="Poppins" pitchFamily="34" charset="-122"/>
                 <a:cs typeface="Poppins" pitchFamily="34" charset="-120"/>
               </a:rPr>
-              <a:t>WHY WE DO IT</a:t>
+              <a:t>Companies spend less on regulation and more on what makes them </a:t>
             </a:r>
-            <a:endParaRPr lang="en-US" sz="1050" dirty="0"/>
-          </a:p>
-        </p:txBody>
-      </p:sp>
-      <p:sp>
-        <p:nvSpPr>
-          <p:cNvPr id="21" name="Text 16"/>
-          <p:cNvSpPr txBox="1"/>
-          <p:nvPr/>
-        </p:nvSpPr>
-        <p:spPr>
-          <a:xfrm>
-            <a:off x="3447288" y="8458200"/>
-            <a:ext cx="13551408" cy="868680"/>
-          </a:xfrm>
-          <a:prstGeom prst="rect">
-            <a:avLst/>
-          </a:prstGeom>
-          <a:noFill/>
-          <a:ln/>
-        </p:spPr>
-        <p:txBody>
-          <a:bodyPr wrap="square" lIns="0" tIns="0" rIns="0" bIns="0" rtlCol="0" anchor="ctr"/>
-          <a:lstStyle/>
-          <a:p>
             <a:pPr indent="0" marL="0">
               <a:buNone/>
             </a:pPr>
             <a:r>
-              <a:rPr lang="en-US" sz="1450" dirty="0">
+              <a:rPr lang="en-US" sz="2200" b="1" spc="-50" kern="0" dirty="0">
                 <a:solidFill>
-                  <a:srgbClr val="FFFFFF"/>
+                  <a:srgbClr val="315D66"/>
                 </a:solidFill>
                 <a:latin typeface="Poppins" pitchFamily="34" charset="0"/>
                 <a:ea typeface="Poppins" pitchFamily="34" charset="-122"/>
                 <a:cs typeface="Poppins" pitchFamily="34" charset="-120"/>
               </a:rPr>
-              <a:t>We are a European generation that wants to bring something forward. Cheaper compliance makes Europe's companies more competitive, and we bring the professional experience to make it happen.</a:t>
+              <a:t>competitive.</a:t>
             </a:r>
-            <a:endParaRPr lang="en-US" sz="1450" dirty="0"/>
+            <a:endParaRPr lang="en-US" sz="2200" dirty="0"/>
           </a:p>
         </p:txBody>
       </p:sp>
       <p:sp>
         <p:nvSpPr>
-          <p:cNvPr name="Freeform 2" id="22"/>
+          <p:cNvPr name="Freeform 2" id="31"/>
           <p:cNvSpPr/>
           <p:nvPr/>
         </p:nvSpPr>
@@ -9408,10 +9785,10 @@
             </a:pathLst>
           </a:custGeom>
           <a:blipFill>
-            <a:blip r:embed="rId4">
+            <a:blip r:embed="rId2">
               <a:extLst>
                 <a:ext uri="{96DAC541-7B7A-43D3-8B79-37D633B846F1}">
-                  <asvg:svgBlip xmlns:asvg="http://schemas.microsoft.com/office/drawing/2016/SVG/main" r:embed="rId5"/>
+                  <asvg:svgBlip xmlns:asvg="http://schemas.microsoft.com/office/drawing/2016/SVG/main" r:embed="rId3"/>
                 </a:ext>
               </a:extLst>
             </a:blip>
@@ -9423,7 +9800,7 @@
       </p:sp>
       <p:sp>
         <p:nvSpPr>
-          <p:cNvPr name="Freeform 3" id="23"/>
+          <p:cNvPr name="Freeform 3" id="32"/>
           <p:cNvSpPr/>
           <p:nvPr/>
         </p:nvSpPr>
@@ -9460,10 +9837,10 @@
             </a:pathLst>
           </a:custGeom>
           <a:blipFill>
-            <a:blip r:embed="rId6">
+            <a:blip r:embed="rId4">
               <a:extLst>
                 <a:ext uri="{96DAC541-7B7A-43D3-8B79-37D633B846F1}">
-                  <asvg:svgBlip xmlns:asvg="http://schemas.microsoft.com/office/drawing/2016/SVG/main" r:embed="rId7"/>
+                  <asvg:svgBlip xmlns:asvg="http://schemas.microsoft.com/office/drawing/2016/SVG/main" r:embed="rId5"/>
                 </a:ext>
               </a:extLst>
             </a:blip>
@@ -9475,7 +9852,7 @@
       </p:sp>
       <p:sp>
         <p:nvSpPr>
-          <p:cNvPr name="TextBox 4" id="24"/>
+          <p:cNvPr name="TextBox 4" id="33"/>
           <p:cNvSpPr txBox="true"/>
           <p:nvPr/>
         </p:nvSpPr>
@@ -9516,7 +9893,7 @@
       </p:sp>
       <p:grpSp>
         <p:nvGrpSpPr>
-          <p:cNvPr name="Group 5" id="25"/>
+          <p:cNvPr name="Group 5" id="34"/>
           <p:cNvGrpSpPr/>
           <p:nvPr/>
         </p:nvGrpSpPr>
@@ -9530,8 +9907,8 @@
         </p:grpSpPr>
         <p:sp>
           <p:nvSpPr>
-            <p:cNvPr name="Freeform 6" id="26">
-              <a:hlinkClick r:id="rId8" action="ppaction://hlinksldjump"/>
+            <p:cNvPr name="Freeform 6" id="35">
+              <a:hlinkClick r:id="rId6" action="ppaction://hlinksldjump"/>
             </p:cNvPr>
             <p:cNvSpPr/>
             <p:nvPr/>
@@ -9589,7 +9966,7 @@
         </p:sp>
         <p:sp>
           <p:nvSpPr>
-            <p:cNvPr name="TextBox 7" id="27"/>
+            <p:cNvPr name="TextBox 7" id="36"/>
             <p:cNvSpPr txBox="true"/>
             <p:nvPr/>
           </p:nvSpPr>
@@ -9629,7 +10006,7 @@
       </p:grpSp>
       <p:grpSp>
         <p:nvGrpSpPr>
-          <p:cNvPr name="Group 8" id="28"/>
+          <p:cNvPr name="Group 8" id="37"/>
           <p:cNvGrpSpPr/>
           <p:nvPr/>
         </p:nvGrpSpPr>
@@ -9643,8 +10020,8 @@
         </p:grpSpPr>
         <p:sp>
           <p:nvSpPr>
-            <p:cNvPr name="Freeform 9" id="29">
-              <a:hlinkClick r:id="rId9" action="ppaction://hlinksldjump"/>
+            <p:cNvPr name="Freeform 9" id="38">
+              <a:hlinkClick r:id="rId7" action="ppaction://hlinksldjump"/>
             </p:cNvPr>
             <p:cNvSpPr/>
             <p:nvPr/>
@@ -9702,7 +10079,7 @@
         </p:sp>
         <p:sp>
           <p:nvSpPr>
-            <p:cNvPr name="TextBox 10" id="30"/>
+            <p:cNvPr name="TextBox 10" id="39"/>
             <p:cNvSpPr txBox="true"/>
             <p:nvPr/>
           </p:nvSpPr>
@@ -9742,7 +10119,7 @@
       </p:grpSp>
       <p:grpSp>
         <p:nvGrpSpPr>
-          <p:cNvPr name="Group 11" id="31"/>
+          <p:cNvPr name="Group 11" id="40"/>
           <p:cNvGrpSpPr/>
           <p:nvPr/>
         </p:nvGrpSpPr>
@@ -9756,8 +10133,8 @@
         </p:grpSpPr>
         <p:sp>
           <p:nvSpPr>
-            <p:cNvPr name="Freeform 12" id="32">
-              <a:hlinkClick r:id="rId10" action="ppaction://hlinksldjump"/>
+            <p:cNvPr name="Freeform 12" id="41">
+              <a:hlinkClick r:id="rId8" action="ppaction://hlinksldjump"/>
             </p:cNvPr>
             <p:cNvSpPr/>
             <p:nvPr/>
@@ -9809,13 +10186,126 @@
               </a:pathLst>
             </a:custGeom>
             <a:solidFill>
-              <a:srgbClr val="171717"/>
+              <a:srgbClr val="CCCCCC"/>
             </a:solidFill>
           </p:spPr>
         </p:sp>
         <p:sp>
           <p:nvSpPr>
-            <p:cNvPr name="TextBox 13" id="33"/>
+            <p:cNvPr name="TextBox 13" id="42"/>
+            <p:cNvSpPr txBox="true"/>
+            <p:nvPr/>
+          </p:nvSpPr>
+          <p:spPr>
+            <a:xfrm>
+              <a:off x="0" y="-9525"/>
+              <a:ext cx="2017776" cy="522808"/>
+            </a:xfrm>
+            <a:prstGeom prst="rect">
+              <a:avLst/>
+            </a:prstGeom>
+          </p:spPr>
+          <p:txBody>
+            <a:bodyPr anchor="ctr" rtlCol="false" tIns="50800" lIns="50800" bIns="50800" rIns="50800"/>
+            <a:lstStyle/>
+            <a:p>
+              <a:pPr algn="ctr">
+                <a:lnSpc>
+                  <a:spcPts val="1559"/>
+                </a:lnSpc>
+              </a:pPr>
+              <a:r>
+                <a:rPr lang="en-US" sz="1299">
+                  <a:solidFill>
+                    <a:srgbClr val="171717"/>
+                  </a:solidFill>
+                  <a:latin typeface="Poppins"/>
+                  <a:ea typeface="Poppins"/>
+                  <a:cs typeface="Poppins"/>
+                  <a:sym typeface="Poppins"/>
+                </a:rPr>
+                <a:t>Team</a:t>
+              </a:r>
+            </a:p>
+          </p:txBody>
+        </p:sp>
+      </p:grpSp>
+      <p:grpSp>
+        <p:nvGrpSpPr>
+          <p:cNvPr name="Group 14" id="43"/>
+          <p:cNvGrpSpPr/>
+          <p:nvPr/>
+        </p:nvGrpSpPr>
+        <p:grpSpPr>
+          <a:xfrm rot="0">
+            <a:off x="12458700" y="1190730"/>
+            <a:ext cx="1513332" cy="384962"/>
+            <a:chOff x="0" y="0"/>
+            <a:chExt cx="2017776" cy="513283"/>
+          </a:xfrm>
+        </p:grpSpPr>
+        <p:sp>
+          <p:nvSpPr>
+            <p:cNvPr name="Freeform 15" id="44">
+              <a:hlinkClick r:id="rId9" action="ppaction://hlinksldjump"/>
+            </p:cNvPr>
+            <p:cNvSpPr/>
+            <p:nvPr/>
+          </p:nvSpPr>
+          <p:spPr>
+            <a:xfrm flipH="false" flipV="false" rot="0">
+              <a:off x="0" y="0"/>
+              <a:ext cx="2017776" cy="513334"/>
+            </a:xfrm>
+            <a:custGeom>
+              <a:avLst/>
+              <a:gdLst/>
+              <a:ahLst/>
+              <a:cxnLst/>
+              <a:rect r="r" b="b" t="t" l="l"/>
+              <a:pathLst>
+                <a:path h="513334" w="2017776">
+                  <a:moveTo>
+                    <a:pt x="0" y="256667"/>
+                  </a:moveTo>
+                  <a:cubicBezTo>
+                    <a:pt x="0" y="114935"/>
+                    <a:pt x="114935" y="0"/>
+                    <a:pt x="256667" y="0"/>
+                  </a:cubicBezTo>
+                  <a:lnTo>
+                    <a:pt x="1761109" y="0"/>
+                  </a:lnTo>
+                  <a:cubicBezTo>
+                    <a:pt x="1902841" y="0"/>
+                    <a:pt x="2017776" y="114935"/>
+                    <a:pt x="2017776" y="256667"/>
+                  </a:cubicBezTo>
+                  <a:cubicBezTo>
+                    <a:pt x="2017776" y="398399"/>
+                    <a:pt x="1902841" y="513334"/>
+                    <a:pt x="1761109" y="513334"/>
+                  </a:cubicBezTo>
+                  <a:lnTo>
+                    <a:pt x="256667" y="513334"/>
+                  </a:lnTo>
+                  <a:cubicBezTo>
+                    <a:pt x="114935" y="513334"/>
+                    <a:pt x="0" y="398399"/>
+                    <a:pt x="0" y="256667"/>
+                  </a:cubicBezTo>
+                  <a:close/>
+                </a:path>
+              </a:pathLst>
+            </a:custGeom>
+            <a:solidFill>
+              <a:srgbClr val="171717"/>
+            </a:solidFill>
+          </p:spPr>
+        </p:sp>
+        <p:sp>
+          <p:nvSpPr>
+            <p:cNvPr name="TextBox 16" id="45"/>
             <p:cNvSpPr txBox="true"/>
             <p:nvPr/>
           </p:nvSpPr>
@@ -9847,119 +10337,6 @@
                   <a:cs typeface="Poppins"/>
                   <a:sym typeface="Poppins"/>
                 </a:rPr>
-                <a:t>Team</a:t>
-              </a:r>
-            </a:p>
-          </p:txBody>
-        </p:sp>
-      </p:grpSp>
-      <p:grpSp>
-        <p:nvGrpSpPr>
-          <p:cNvPr name="Group 14" id="34"/>
-          <p:cNvGrpSpPr/>
-          <p:nvPr/>
-        </p:nvGrpSpPr>
-        <p:grpSpPr>
-          <a:xfrm rot="0">
-            <a:off x="12458700" y="1190730"/>
-            <a:ext cx="1513332" cy="384962"/>
-            <a:chOff x="0" y="0"/>
-            <a:chExt cx="2017776" cy="513283"/>
-          </a:xfrm>
-        </p:grpSpPr>
-        <p:sp>
-          <p:nvSpPr>
-            <p:cNvPr name="Freeform 15" id="35">
-              <a:hlinkClick r:id="rId11" action="ppaction://hlinksldjump"/>
-            </p:cNvPr>
-            <p:cNvSpPr/>
-            <p:nvPr/>
-          </p:nvSpPr>
-          <p:spPr>
-            <a:xfrm flipH="false" flipV="false" rot="0">
-              <a:off x="0" y="0"/>
-              <a:ext cx="2017776" cy="513334"/>
-            </a:xfrm>
-            <a:custGeom>
-              <a:avLst/>
-              <a:gdLst/>
-              <a:ahLst/>
-              <a:cxnLst/>
-              <a:rect r="r" b="b" t="t" l="l"/>
-              <a:pathLst>
-                <a:path h="513334" w="2017776">
-                  <a:moveTo>
-                    <a:pt x="0" y="256667"/>
-                  </a:moveTo>
-                  <a:cubicBezTo>
-                    <a:pt x="0" y="114935"/>
-                    <a:pt x="114935" y="0"/>
-                    <a:pt x="256667" y="0"/>
-                  </a:cubicBezTo>
-                  <a:lnTo>
-                    <a:pt x="1761109" y="0"/>
-                  </a:lnTo>
-                  <a:cubicBezTo>
-                    <a:pt x="1902841" y="0"/>
-                    <a:pt x="2017776" y="114935"/>
-                    <a:pt x="2017776" y="256667"/>
-                  </a:cubicBezTo>
-                  <a:cubicBezTo>
-                    <a:pt x="2017776" y="398399"/>
-                    <a:pt x="1902841" y="513334"/>
-                    <a:pt x="1761109" y="513334"/>
-                  </a:cubicBezTo>
-                  <a:lnTo>
-                    <a:pt x="256667" y="513334"/>
-                  </a:lnTo>
-                  <a:cubicBezTo>
-                    <a:pt x="114935" y="513334"/>
-                    <a:pt x="0" y="398399"/>
-                    <a:pt x="0" y="256667"/>
-                  </a:cubicBezTo>
-                  <a:close/>
-                </a:path>
-              </a:pathLst>
-            </a:custGeom>
-            <a:solidFill>
-              <a:srgbClr val="CCCCCC"/>
-            </a:solidFill>
-          </p:spPr>
-        </p:sp>
-        <p:sp>
-          <p:nvSpPr>
-            <p:cNvPr name="TextBox 16" id="36"/>
-            <p:cNvSpPr txBox="true"/>
-            <p:nvPr/>
-          </p:nvSpPr>
-          <p:spPr>
-            <a:xfrm>
-              <a:off x="0" y="-9525"/>
-              <a:ext cx="2017776" cy="522808"/>
-            </a:xfrm>
-            <a:prstGeom prst="rect">
-              <a:avLst/>
-            </a:prstGeom>
-          </p:spPr>
-          <p:txBody>
-            <a:bodyPr anchor="ctr" rtlCol="false" tIns="50800" lIns="50800" bIns="50800" rIns="50800"/>
-            <a:lstStyle/>
-            <a:p>
-              <a:pPr algn="ctr">
-                <a:lnSpc>
-                  <a:spcPts val="1559"/>
-                </a:lnSpc>
-              </a:pPr>
-              <a:r>
-                <a:rPr lang="en-US" sz="1299">
-                  <a:solidFill>
-                    <a:srgbClr val="171717"/>
-                  </a:solidFill>
-                  <a:latin typeface="Poppins"/>
-                  <a:ea typeface="Poppins"/>
-                  <a:cs typeface="Poppins"/>
-                  <a:sym typeface="Poppins"/>
-                </a:rPr>
                 <a:t>Conclusion</a:t>
               </a:r>
             </a:p>
@@ -9968,7 +10345,7 @@
       </p:grpSp>
       <p:grpSp>
         <p:nvGrpSpPr>
-          <p:cNvPr name="Group 52" id="37"/>
+          <p:cNvPr name="Group 52" id="46"/>
           <p:cNvGrpSpPr/>
           <p:nvPr/>
         </p:nvGrpSpPr>
@@ -9982,7 +10359,7 @@
         </p:grpSpPr>
         <p:sp>
           <p:nvSpPr>
-            <p:cNvPr name="Freeform 53" id="38" descr="image.png"/>
+            <p:cNvPr name="Freeform 53" id="47" descr="image.png"/>
             <p:cNvSpPr/>
             <p:nvPr/>
           </p:nvSpPr>
@@ -10019,7 +10396,7 @@
               </a:pathLst>
             </a:custGeom>
             <a:blipFill>
-              <a:blip r:embed="rId12"/>
+              <a:blip r:embed="rId10"/>
               <a:stretch>
                 <a:fillRect l="0" t="0" r="-14" b="0"/>
               </a:stretch>
@@ -10029,7 +10406,7 @@
       </p:grpSp>
       <p:grpSp>
         <p:nvGrpSpPr>
-          <p:cNvPr name="Group 17" id="39"/>
+          <p:cNvPr name="Group 17" id="48"/>
           <p:cNvGrpSpPr/>
           <p:nvPr/>
         </p:nvGrpSpPr>
@@ -10043,7 +10420,7 @@
         </p:grpSpPr>
         <p:sp>
           <p:nvSpPr>
-            <p:cNvPr name="Freeform 18" id="40"/>
+            <p:cNvPr name="Freeform 18" id="49"/>
             <p:cNvSpPr/>
             <p:nvPr/>
           </p:nvSpPr>
@@ -10103,7 +10480,7 @@
         </p:sp>
         <p:sp>
           <p:nvSpPr>
-            <p:cNvPr name="TextBox 19" id="41"/>
+            <p:cNvPr name="TextBox 19" id="50"/>
             <p:cNvSpPr txBox="true"/>
             <p:nvPr/>
           </p:nvSpPr>
@@ -10149,19 +10526,12 @@
 </p:sld>
 </file>
 
-<file path=ppt/slides/slide2.xml><?xml version="1.0" encoding="utf-8"?>
-<p:sld xmlns:p="http://schemas.openxmlformats.org/presentationml/2006/main" xmlns:a="http://schemas.openxmlformats.org/drawingml/2006/main" xmlns:r="http://schemas.openxmlformats.org/officeDocument/2006/relationships">
-  <p:cSld>
-    <p:bg>
-      <p:bgPr>
-        <a:solidFill>
-          <a:srgbClr val="F8F8F8"/>
-        </a:solidFill>
-      </p:bgPr>
-    </p:bg>
+<file path=ppt/slides/slide13.xml><?xml version="1.0" encoding="utf-8"?>
+<p:sld xmlns:a="http://schemas.openxmlformats.org/drawingml/2006/main" xmlns:r="http://schemas.openxmlformats.org/officeDocument/2006/relationships" xmlns:p="http://schemas.openxmlformats.org/presentationml/2006/main">
+  <p:cSld name="Slide 6">
     <p:spTree>
       <p:nvGrpSpPr>
-        <p:cNvPr id="1" name=""/>
+        <p:cNvPr id="2" name=""/>
         <p:cNvGrpSpPr/>
         <p:nvPr/>
       </p:nvGrpSpPr>
@@ -10175,7 +10545,939 @@
       </p:grpSpPr>
       <p:sp>
         <p:nvSpPr>
-          <p:cNvPr name="Freeform 2" id="2"/>
+          <p:cNvPr id="3" name="Text 0"/>
+          <p:cNvSpPr txBox="1"/>
+          <p:nvPr/>
+        </p:nvSpPr>
+        <p:spPr>
+          <a:xfrm>
+            <a:off x="1069848" y="1993392"/>
+            <a:ext cx="9144000" cy="347472"/>
+          </a:xfrm>
+          <a:prstGeom prst="rect">
+            <a:avLst/>
+          </a:prstGeom>
+          <a:noFill/>
+          <a:ln/>
+        </p:spPr>
+        <p:txBody>
+          <a:bodyPr wrap="square" lIns="0" tIns="0" rIns="0" bIns="0" rtlCol="0" anchor="t"/>
+          <a:lstStyle/>
+          <a:p>
+            <a:pPr indent="0" marL="0">
+              <a:buNone/>
+            </a:pPr>
+            <a:r>
+              <a:rPr lang="en-US" sz="1700" b="1" spc="100" kern="0" dirty="0">
+                <a:solidFill>
+                  <a:srgbClr val="497078"/>
+                </a:solidFill>
+                <a:latin typeface="Poppins" pitchFamily="34" charset="0"/>
+                <a:ea typeface="Poppins" pitchFamily="34" charset="-122"/>
+                <a:cs typeface="Poppins" pitchFamily="34" charset="-120"/>
+              </a:rPr>
+              <a:t>MARKET PAIN POINTS</a:t>
+            </a:r>
+            <a:endParaRPr lang="en-US" sz="1700" dirty="0"/>
+          </a:p>
+        </p:txBody>
+      </p:sp>
+      <p:sp>
+        <p:nvSpPr>
+          <p:cNvPr id="4" name="Text 1"/>
+          <p:cNvSpPr txBox="1"/>
+          <p:nvPr/>
+        </p:nvSpPr>
+        <p:spPr>
+          <a:xfrm>
+            <a:off x="1042416" y="2496312"/>
+            <a:ext cx="16203168" cy="868680"/>
+          </a:xfrm>
+          <a:prstGeom prst="rect">
+            <a:avLst/>
+          </a:prstGeom>
+          <a:noFill/>
+          <a:ln/>
+        </p:spPr>
+        <p:txBody>
+          <a:bodyPr wrap="square" lIns="0" tIns="0" rIns="0" bIns="0" rtlCol="0" anchor="t"/>
+          <a:lstStyle/>
+          <a:p>
+            <a:pPr indent="0" marL="0">
+              <a:buNone/>
+            </a:pPr>
+            <a:r>
+              <a:rPr lang="en-US" sz="5300" b="1" spc="-100" kern="0" dirty="0">
+                <a:solidFill>
+                  <a:srgbClr val="171717"/>
+                </a:solidFill>
+                <a:latin typeface="Poppins" pitchFamily="34" charset="0"/>
+                <a:ea typeface="Poppins" pitchFamily="34" charset="-122"/>
+                <a:cs typeface="Poppins" pitchFamily="34" charset="-120"/>
+              </a:rPr>
+              <a:t>COMPLIANCE IS STILL </a:t>
+            </a:r>
+            <a:pPr indent="0" marL="0">
+              <a:buNone/>
+            </a:pPr>
+            <a:r>
+              <a:rPr lang="en-US" sz="5300" b="1" spc="-100" kern="0" dirty="0">
+                <a:solidFill>
+                  <a:srgbClr val="A95E53"/>
+                </a:solidFill>
+                <a:latin typeface="Poppins" pitchFamily="34" charset="0"/>
+                <a:ea typeface="Poppins" pitchFamily="34" charset="-122"/>
+                <a:cs typeface="Poppins" pitchFamily="34" charset="-120"/>
+              </a:rPr>
+              <a:t>GUESSWORK.</a:t>
+            </a:r>
+            <a:endParaRPr lang="en-US" sz="5300" dirty="0"/>
+          </a:p>
+        </p:txBody>
+      </p:sp>
+      <p:sp>
+        <p:nvSpPr>
+          <p:cNvPr id="5" name="Text 2"/>
+          <p:cNvSpPr txBox="1"/>
+          <p:nvPr/>
+        </p:nvSpPr>
+        <p:spPr>
+          <a:xfrm>
+            <a:off x="1069848" y="3557016"/>
+            <a:ext cx="16203168" cy="420624"/>
+          </a:xfrm>
+          <a:prstGeom prst="rect">
+            <a:avLst/>
+          </a:prstGeom>
+          <a:noFill/>
+          <a:ln/>
+        </p:spPr>
+        <p:txBody>
+          <a:bodyPr wrap="square" lIns="0" tIns="0" rIns="0" bIns="0" rtlCol="0" anchor="t"/>
+          <a:lstStyle/>
+          <a:p>
+            <a:pPr indent="0" marL="0">
+              <a:buNone/>
+            </a:pPr>
+            <a:r>
+              <a:rPr lang="en-US" sz="1950" dirty="0">
+                <a:solidFill>
+                  <a:srgbClr val="687075"/>
+                </a:solidFill>
+                <a:latin typeface="Poppins" pitchFamily="34" charset="0"/>
+                <a:ea typeface="Poppins" pitchFamily="34" charset="-122"/>
+                <a:cs typeface="Poppins" pitchFamily="34" charset="-120"/>
+              </a:rPr>
+              <a:t>Companies pay to reconstruct facts that already exist in their systems.</a:t>
+            </a:r>
+            <a:endParaRPr lang="en-US" sz="1950" dirty="0"/>
+          </a:p>
+        </p:txBody>
+      </p:sp>
+      <p:sp>
+        <p:nvSpPr>
+          <p:cNvPr id="6" name="Shape 3"/>
+          <p:cNvSpPr/>
+          <p:nvPr/>
+        </p:nvSpPr>
+        <p:spPr>
+          <a:xfrm>
+            <a:off x="1069848" y="4050792"/>
+            <a:ext cx="16203168" cy="0"/>
+          </a:xfrm>
+          <a:prstGeom prst="line">
+            <a:avLst/>
+          </a:prstGeom>
+          <a:noFill/>
+          <a:ln w="9525">
+            <a:solidFill>
+              <a:srgbClr val="DADBD6"/>
+            </a:solidFill>
+            <a:prstDash val="solid"/>
+          </a:ln>
+        </p:spPr>
+      </p:sp>
+      <p:sp>
+        <p:nvSpPr>
+          <p:cNvPr id="7" name="Text 4"/>
+          <p:cNvSpPr txBox="1"/>
+          <p:nvPr/>
+        </p:nvSpPr>
+        <p:spPr>
+          <a:xfrm>
+            <a:off x="1069848" y="4572000"/>
+            <a:ext cx="3657600" cy="411480"/>
+          </a:xfrm>
+          <a:prstGeom prst="rect">
+            <a:avLst/>
+          </a:prstGeom>
+          <a:noFill/>
+          <a:ln/>
+        </p:spPr>
+        <p:txBody>
+          <a:bodyPr wrap="square" lIns="0" tIns="0" rIns="0" bIns="0" rtlCol="0" anchor="t"/>
+          <a:lstStyle/>
+          <a:p>
+            <a:pPr indent="0" marL="0">
+              <a:buNone/>
+            </a:pPr>
+            <a:r>
+              <a:rPr lang="en-US" sz="1900" b="1" dirty="0">
+                <a:solidFill>
+                  <a:srgbClr val="171717"/>
+                </a:solidFill>
+                <a:latin typeface="Poppins" pitchFamily="34" charset="0"/>
+                <a:ea typeface="Poppins" pitchFamily="34" charset="-122"/>
+                <a:cs typeface="Poppins" pitchFamily="34" charset="-120"/>
+              </a:rPr>
+              <a:t>TODAY</a:t>
+            </a:r>
+            <a:endParaRPr lang="en-US" sz="1900" dirty="0"/>
+          </a:p>
+        </p:txBody>
+      </p:sp>
+      <p:sp>
+        <p:nvSpPr>
+          <p:cNvPr id="8" name="Text 5"/>
+          <p:cNvSpPr txBox="1"/>
+          <p:nvPr/>
+        </p:nvSpPr>
+        <p:spPr>
+          <a:xfrm>
+            <a:off x="5824728" y="4645152"/>
+            <a:ext cx="3657600" cy="320040"/>
+          </a:xfrm>
+          <a:prstGeom prst="rect">
+            <a:avLst/>
+          </a:prstGeom>
+          <a:noFill/>
+          <a:ln/>
+        </p:spPr>
+        <p:txBody>
+          <a:bodyPr wrap="square" lIns="0" tIns="0" rIns="0" bIns="0" rtlCol="0" anchor="t"/>
+          <a:lstStyle/>
+          <a:p>
+            <a:pPr algn="r" indent="0" marL="0">
+              <a:buNone/>
+            </a:pPr>
+            <a:r>
+              <a:rPr lang="en-US" sz="1050" b="1" spc="150" kern="0" dirty="0">
+                <a:solidFill>
+                  <a:srgbClr val="A95E53"/>
+                </a:solidFill>
+                <a:latin typeface="Poppins" pitchFamily="34" charset="0"/>
+                <a:ea typeface="Poppins" pitchFamily="34" charset="-122"/>
+                <a:cs typeface="Poppins" pitchFamily="34" charset="-120"/>
+              </a:rPr>
+              <a:t>OUTSIDE-IN</a:t>
+            </a:r>
+            <a:endParaRPr lang="en-US" sz="1050" dirty="0"/>
+          </a:p>
+        </p:txBody>
+      </p:sp>
+      <p:sp>
+        <p:nvSpPr>
+          <p:cNvPr id="9" name="Shape 6"/>
+          <p:cNvSpPr/>
+          <p:nvPr/>
+        </p:nvSpPr>
+        <p:spPr>
+          <a:xfrm>
+            <a:off x="1069848" y="5074920"/>
+            <a:ext cx="8412480" cy="0"/>
+          </a:xfrm>
+          <a:prstGeom prst="line">
+            <a:avLst/>
+          </a:prstGeom>
+          <a:noFill/>
+          <a:ln w="19050">
+            <a:solidFill>
+              <a:srgbClr val="171717"/>
+            </a:solidFill>
+            <a:prstDash val="solid"/>
+          </a:ln>
+        </p:spPr>
+      </p:sp>
+      <p:sp>
+        <p:nvSpPr>
+          <p:cNvPr id="10" name="Shape 7"/>
+          <p:cNvSpPr/>
+          <p:nvPr/>
+        </p:nvSpPr>
+        <p:spPr>
+          <a:xfrm>
+            <a:off x="1069848" y="5522976"/>
+            <a:ext cx="603504" cy="603504"/>
+          </a:xfrm>
+          <a:prstGeom prst="ellipse">
+            <a:avLst/>
+          </a:prstGeom>
+          <a:solidFill>
+            <a:srgbClr val="F2E5E2"/>
+          </a:solidFill>
+          <a:ln w="12700">
+            <a:solidFill>
+              <a:srgbClr val="F2E5E2"/>
+            </a:solidFill>
+            <a:prstDash val="solid"/>
+          </a:ln>
+        </p:spPr>
+      </p:sp>
+      <p:pic>
+        <p:nvPicPr>
+          <p:cNvPr id="11" name="Image 0" descr="/home/andi/Dokumente/Business/Simone Business/Business/fable-andi/pitch/src/assets/pain-q.png">    </p:cNvPr>
+          <p:cNvPicPr>
+            <a:picLocks noChangeAspect="1"/>
+          </p:cNvPicPr>
+          <p:nvPr/>
+        </p:nvPicPr>
+        <p:blipFill>
+          <a:blip r:embed="rId1"/>
+          <a:stretch>
+            <a:fillRect/>
+          </a:stretch>
+        </p:blipFill>
+        <p:spPr>
+          <a:xfrm>
+            <a:off x="1097280" y="5550408"/>
+            <a:ext cx="548640" cy="548640"/>
+          </a:xfrm>
+          <a:prstGeom prst="rect">
+            <a:avLst/>
+          </a:prstGeom>
+        </p:spPr>
+      </p:pic>
+      <p:sp>
+        <p:nvSpPr>
+          <p:cNvPr id="12" name="Text 8"/>
+          <p:cNvSpPr txBox="1"/>
+          <p:nvPr/>
+        </p:nvSpPr>
+        <p:spPr>
+          <a:xfrm>
+            <a:off x="1938528" y="5440680"/>
+            <a:ext cx="7498080" cy="384048"/>
+          </a:xfrm>
+          <a:prstGeom prst="rect">
+            <a:avLst/>
+          </a:prstGeom>
+          <a:noFill/>
+          <a:ln/>
+        </p:spPr>
+        <p:txBody>
+          <a:bodyPr wrap="square" lIns="0" tIns="0" rIns="0" bIns="0" rtlCol="0" anchor="t"/>
+          <a:lstStyle/>
+          <a:p>
+            <a:pPr indent="0" marL="0">
+              <a:buNone/>
+            </a:pPr>
+            <a:r>
+              <a:rPr lang="en-US" sz="1800" b="1" dirty="0">
+                <a:solidFill>
+                  <a:srgbClr val="171717"/>
+                </a:solidFill>
+                <a:latin typeface="Poppins" pitchFamily="34" charset="0"/>
+                <a:ea typeface="Poppins" pitchFamily="34" charset="-122"/>
+                <a:cs typeface="Poppins" pitchFamily="34" charset="-120"/>
+              </a:rPr>
+              <a:t>QUESTIONNAIRES</a:t>
+            </a:r>
+            <a:endParaRPr lang="en-US" sz="1800" dirty="0"/>
+          </a:p>
+        </p:txBody>
+      </p:sp>
+      <p:sp>
+        <p:nvSpPr>
+          <p:cNvPr id="13" name="Text 9"/>
+          <p:cNvSpPr txBox="1"/>
+          <p:nvPr/>
+        </p:nvSpPr>
+        <p:spPr>
+          <a:xfrm>
+            <a:off x="1938528" y="5824728"/>
+            <a:ext cx="7498080" cy="365760"/>
+          </a:xfrm>
+          <a:prstGeom prst="rect">
+            <a:avLst/>
+          </a:prstGeom>
+          <a:noFill/>
+          <a:ln/>
+        </p:spPr>
+        <p:txBody>
+          <a:bodyPr wrap="square" lIns="0" tIns="0" rIns="0" bIns="0" rtlCol="0" anchor="t"/>
+          <a:lstStyle/>
+          <a:p>
+            <a:pPr indent="0" marL="0">
+              <a:buNone/>
+            </a:pPr>
+            <a:r>
+              <a:rPr lang="en-US" sz="1400" dirty="0">
+                <a:solidFill>
+                  <a:srgbClr val="3B3E3C"/>
+                </a:solidFill>
+                <a:latin typeface="Poppins" pitchFamily="34" charset="0"/>
+                <a:ea typeface="Poppins" pitchFamily="34" charset="-122"/>
+                <a:cs typeface="Poppins" pitchFamily="34" charset="-120"/>
+              </a:rPr>
+              <a:t>Answers from memory</a:t>
+            </a:r>
+            <a:endParaRPr lang="en-US" sz="1400" dirty="0"/>
+          </a:p>
+        </p:txBody>
+      </p:sp>
+      <p:sp>
+        <p:nvSpPr>
+          <p:cNvPr id="14" name="Shape 10"/>
+          <p:cNvSpPr/>
+          <p:nvPr/>
+        </p:nvSpPr>
+        <p:spPr>
+          <a:xfrm>
+            <a:off x="1069848" y="6419088"/>
+            <a:ext cx="8412480" cy="0"/>
+          </a:xfrm>
+          <a:prstGeom prst="line">
+            <a:avLst/>
+          </a:prstGeom>
+          <a:noFill/>
+          <a:ln w="9525">
+            <a:solidFill>
+              <a:srgbClr val="DADBD6"/>
+            </a:solidFill>
+            <a:prstDash val="solid"/>
+          </a:ln>
+        </p:spPr>
+      </p:sp>
+      <p:sp>
+        <p:nvSpPr>
+          <p:cNvPr id="15" name="Shape 11"/>
+          <p:cNvSpPr/>
+          <p:nvPr/>
+        </p:nvSpPr>
+        <p:spPr>
+          <a:xfrm>
+            <a:off x="1069848" y="6711696"/>
+            <a:ext cx="603504" cy="603504"/>
+          </a:xfrm>
+          <a:prstGeom prst="ellipse">
+            <a:avLst/>
+          </a:prstGeom>
+          <a:solidFill>
+            <a:srgbClr val="F2E5E2"/>
+          </a:solidFill>
+          <a:ln w="12700">
+            <a:solidFill>
+              <a:srgbClr val="F2E5E2"/>
+            </a:solidFill>
+            <a:prstDash val="solid"/>
+          </a:ln>
+        </p:spPr>
+      </p:sp>
+      <p:pic>
+        <p:nvPicPr>
+          <p:cNvPr id="16" name="Image 1" descr="/home/andi/Dokumente/Business/Simone Business/Business/fable-andi/pitch/src/assets/pain-c.png">    </p:cNvPr>
+          <p:cNvPicPr>
+            <a:picLocks noChangeAspect="1"/>
+          </p:cNvPicPr>
+          <p:nvPr/>
+        </p:nvPicPr>
+        <p:blipFill>
+          <a:blip r:embed="rId2"/>
+          <a:stretch>
+            <a:fillRect/>
+          </a:stretch>
+        </p:blipFill>
+        <p:spPr>
+          <a:xfrm>
+            <a:off x="1097280" y="6739128"/>
+            <a:ext cx="548640" cy="548640"/>
+          </a:xfrm>
+          <a:prstGeom prst="rect">
+            <a:avLst/>
+          </a:prstGeom>
+        </p:spPr>
+      </p:pic>
+      <p:sp>
+        <p:nvSpPr>
+          <p:cNvPr id="17" name="Text 12"/>
+          <p:cNvSpPr txBox="1"/>
+          <p:nvPr/>
+        </p:nvSpPr>
+        <p:spPr>
+          <a:xfrm>
+            <a:off x="1938528" y="6629400"/>
+            <a:ext cx="7498080" cy="384048"/>
+          </a:xfrm>
+          <a:prstGeom prst="rect">
+            <a:avLst/>
+          </a:prstGeom>
+          <a:noFill/>
+          <a:ln/>
+        </p:spPr>
+        <p:txBody>
+          <a:bodyPr wrap="square" lIns="0" tIns="0" rIns="0" bIns="0" rtlCol="0" anchor="t"/>
+          <a:lstStyle/>
+          <a:p>
+            <a:pPr indent="0" marL="0">
+              <a:buNone/>
+            </a:pPr>
+            <a:r>
+              <a:rPr lang="en-US" sz="1800" b="1" dirty="0">
+                <a:solidFill>
+                  <a:srgbClr val="171717"/>
+                </a:solidFill>
+                <a:latin typeface="Poppins" pitchFamily="34" charset="0"/>
+                <a:ea typeface="Poppins" pitchFamily="34" charset="-122"/>
+                <a:cs typeface="Poppins" pitchFamily="34" charset="-120"/>
+              </a:rPr>
+              <a:t>STALE EVIDENCE</a:t>
+            </a:r>
+            <a:endParaRPr lang="en-US" sz="1800" dirty="0"/>
+          </a:p>
+        </p:txBody>
+      </p:sp>
+      <p:sp>
+        <p:nvSpPr>
+          <p:cNvPr id="18" name="Text 13"/>
+          <p:cNvSpPr txBox="1"/>
+          <p:nvPr/>
+        </p:nvSpPr>
+        <p:spPr>
+          <a:xfrm>
+            <a:off x="1938528" y="7013448"/>
+            <a:ext cx="7498080" cy="365760"/>
+          </a:xfrm>
+          <a:prstGeom prst="rect">
+            <a:avLst/>
+          </a:prstGeom>
+          <a:noFill/>
+          <a:ln/>
+        </p:spPr>
+        <p:txBody>
+          <a:bodyPr wrap="square" lIns="0" tIns="0" rIns="0" bIns="0" rtlCol="0" anchor="t"/>
+          <a:lstStyle/>
+          <a:p>
+            <a:pPr indent="0" marL="0">
+              <a:buNone/>
+            </a:pPr>
+            <a:r>
+              <a:rPr lang="en-US" sz="1400" dirty="0">
+                <a:solidFill>
+                  <a:srgbClr val="3B3E3C"/>
+                </a:solidFill>
+                <a:latin typeface="Poppins" pitchFamily="34" charset="0"/>
+                <a:ea typeface="Poppins" pitchFamily="34" charset="-122"/>
+                <a:cs typeface="Poppins" pitchFamily="34" charset="-120"/>
+              </a:rPr>
+              <a:t>Gaps go unseen</a:t>
+            </a:r>
+            <a:endParaRPr lang="en-US" sz="1400" dirty="0"/>
+          </a:p>
+        </p:txBody>
+      </p:sp>
+      <p:sp>
+        <p:nvSpPr>
+          <p:cNvPr id="19" name="Shape 14"/>
+          <p:cNvSpPr/>
+          <p:nvPr/>
+        </p:nvSpPr>
+        <p:spPr>
+          <a:xfrm>
+            <a:off x="1069848" y="7607808"/>
+            <a:ext cx="8412480" cy="0"/>
+          </a:xfrm>
+          <a:prstGeom prst="line">
+            <a:avLst/>
+          </a:prstGeom>
+          <a:noFill/>
+          <a:ln w="9525">
+            <a:solidFill>
+              <a:srgbClr val="DADBD6"/>
+            </a:solidFill>
+            <a:prstDash val="solid"/>
+          </a:ln>
+        </p:spPr>
+      </p:sp>
+      <p:sp>
+        <p:nvSpPr>
+          <p:cNvPr id="20" name="Shape 15"/>
+          <p:cNvSpPr/>
+          <p:nvPr/>
+        </p:nvSpPr>
+        <p:spPr>
+          <a:xfrm>
+            <a:off x="1069848" y="7900416"/>
+            <a:ext cx="603504" cy="603504"/>
+          </a:xfrm>
+          <a:prstGeom prst="ellipse">
+            <a:avLst/>
+          </a:prstGeom>
+          <a:solidFill>
+            <a:srgbClr val="F2E5E2"/>
+          </a:solidFill>
+          <a:ln w="12700">
+            <a:solidFill>
+              <a:srgbClr val="F2E5E2"/>
+            </a:solidFill>
+            <a:prstDash val="solid"/>
+          </a:ln>
+        </p:spPr>
+      </p:sp>
+      <p:pic>
+        <p:nvPicPr>
+          <p:cNvPr id="21" name="Image 2" descr="/home/andi/Dokumente/Business/Simone Business/Business/fable-andi/pitch/src/assets/pain-d.png">    </p:cNvPr>
+          <p:cNvPicPr>
+            <a:picLocks noChangeAspect="1"/>
+          </p:cNvPicPr>
+          <p:nvPr/>
+        </p:nvPicPr>
+        <p:blipFill>
+          <a:blip r:embed="rId3"/>
+          <a:stretch>
+            <a:fillRect/>
+          </a:stretch>
+        </p:blipFill>
+        <p:spPr>
+          <a:xfrm>
+            <a:off x="1097280" y="7927848"/>
+            <a:ext cx="548640" cy="548640"/>
+          </a:xfrm>
+          <a:prstGeom prst="rect">
+            <a:avLst/>
+          </a:prstGeom>
+        </p:spPr>
+      </p:pic>
+      <p:sp>
+        <p:nvSpPr>
+          <p:cNvPr id="22" name="Text 16"/>
+          <p:cNvSpPr txBox="1"/>
+          <p:nvPr/>
+        </p:nvSpPr>
+        <p:spPr>
+          <a:xfrm>
+            <a:off x="1938528" y="7818120"/>
+            <a:ext cx="7498080" cy="384048"/>
+          </a:xfrm>
+          <a:prstGeom prst="rect">
+            <a:avLst/>
+          </a:prstGeom>
+          <a:noFill/>
+          <a:ln/>
+        </p:spPr>
+        <p:txBody>
+          <a:bodyPr wrap="square" lIns="0" tIns="0" rIns="0" bIns="0" rtlCol="0" anchor="t"/>
+          <a:lstStyle/>
+          <a:p>
+            <a:pPr indent="0" marL="0">
+              <a:buNone/>
+            </a:pPr>
+            <a:r>
+              <a:rPr lang="en-US" sz="1800" b="1" dirty="0">
+                <a:solidFill>
+                  <a:srgbClr val="171717"/>
+                </a:solidFill>
+                <a:latin typeface="Poppins" pitchFamily="34" charset="0"/>
+                <a:ea typeface="Poppins" pitchFamily="34" charset="-122"/>
+                <a:cs typeface="Poppins" pitchFamily="34" charset="-120"/>
+              </a:rPr>
+              <a:t>LEGAL OVERHEAD</a:t>
+            </a:r>
+            <a:endParaRPr lang="en-US" sz="1800" dirty="0"/>
+          </a:p>
+        </p:txBody>
+      </p:sp>
+      <p:sp>
+        <p:nvSpPr>
+          <p:cNvPr id="23" name="Text 17"/>
+          <p:cNvSpPr txBox="1"/>
+          <p:nvPr/>
+        </p:nvSpPr>
+        <p:spPr>
+          <a:xfrm>
+            <a:off x="1938528" y="8202168"/>
+            <a:ext cx="7498080" cy="365760"/>
+          </a:xfrm>
+          <a:prstGeom prst="rect">
+            <a:avLst/>
+          </a:prstGeom>
+          <a:noFill/>
+          <a:ln/>
+        </p:spPr>
+        <p:txBody>
+          <a:bodyPr wrap="square" lIns="0" tIns="0" rIns="0" bIns="0" rtlCol="0" anchor="t"/>
+          <a:lstStyle/>
+          <a:p>
+            <a:pPr indent="0" marL="0">
+              <a:buNone/>
+            </a:pPr>
+            <a:r>
+              <a:rPr lang="en-US" sz="1400" dirty="0">
+                <a:solidFill>
+                  <a:srgbClr val="3B3E3C"/>
+                </a:solidFill>
+                <a:latin typeface="Poppins" pitchFamily="34" charset="0"/>
+                <a:ea typeface="Poppins" pitchFamily="34" charset="-122"/>
+                <a:cs typeface="Poppins" pitchFamily="34" charset="-120"/>
+              </a:rPr>
+              <a:t>Fact-finding repeats</a:t>
+            </a:r>
+            <a:endParaRPr lang="en-US" sz="1400" dirty="0"/>
+          </a:p>
+        </p:txBody>
+      </p:sp>
+      <p:sp>
+        <p:nvSpPr>
+          <p:cNvPr id="24" name="Shape 18"/>
+          <p:cNvSpPr/>
+          <p:nvPr/>
+        </p:nvSpPr>
+        <p:spPr>
+          <a:xfrm>
+            <a:off x="9848088" y="7013448"/>
+            <a:ext cx="731520" cy="0"/>
+          </a:xfrm>
+          <a:prstGeom prst="line">
+            <a:avLst/>
+          </a:prstGeom>
+          <a:noFill/>
+          <a:ln w="38100">
+            <a:solidFill>
+              <a:srgbClr val="497078"/>
+            </a:solidFill>
+            <a:prstDash val="solid"/>
+            <a:tailEnd type="triangle"/>
+          </a:ln>
+        </p:spPr>
+      </p:sp>
+      <p:sp>
+        <p:nvSpPr>
+          <p:cNvPr id="25" name="Shape 19"/>
+          <p:cNvSpPr/>
+          <p:nvPr/>
+        </p:nvSpPr>
+        <p:spPr>
+          <a:xfrm>
+            <a:off x="10945368" y="4572000"/>
+            <a:ext cx="6327648" cy="4224528"/>
+          </a:xfrm>
+          <a:prstGeom prst="roundRect">
+            <a:avLst>
+              <a:gd name="adj" fmla="val 4762"/>
+            </a:avLst>
+          </a:prstGeom>
+          <a:solidFill>
+            <a:srgbClr val="E8F2F2"/>
+          </a:solidFill>
+          <a:ln w="9525">
+            <a:solidFill>
+              <a:srgbClr val="E8F2F2"/>
+            </a:solidFill>
+            <a:prstDash val="solid"/>
+          </a:ln>
+        </p:spPr>
+      </p:sp>
+      <p:sp>
+        <p:nvSpPr>
+          <p:cNvPr id="26" name="Shape 20"/>
+          <p:cNvSpPr/>
+          <p:nvPr/>
+        </p:nvSpPr>
+        <p:spPr>
+          <a:xfrm>
+            <a:off x="11356848" y="5001768"/>
+            <a:ext cx="201168" cy="201168"/>
+          </a:xfrm>
+          <a:prstGeom prst="ellipse">
+            <a:avLst/>
+          </a:prstGeom>
+          <a:solidFill>
+            <a:srgbClr val="497078"/>
+          </a:solidFill>
+          <a:ln w="19050">
+            <a:solidFill>
+              <a:srgbClr val="B9D4D8"/>
+            </a:solidFill>
+            <a:prstDash val="solid"/>
+          </a:ln>
+        </p:spPr>
+      </p:sp>
+      <p:sp>
+        <p:nvSpPr>
+          <p:cNvPr id="27" name="Text 21"/>
+          <p:cNvSpPr txBox="1"/>
+          <p:nvPr/>
+        </p:nvSpPr>
+        <p:spPr>
+          <a:xfrm>
+            <a:off x="11676888" y="4937760"/>
+            <a:ext cx="2743200" cy="329184"/>
+          </a:xfrm>
+          <a:prstGeom prst="rect">
+            <a:avLst/>
+          </a:prstGeom>
+          <a:noFill/>
+          <a:ln/>
+        </p:spPr>
+        <p:txBody>
+          <a:bodyPr wrap="square" lIns="0" tIns="0" rIns="0" bIns="0" rtlCol="0" anchor="t"/>
+          <a:lstStyle/>
+          <a:p>
+            <a:pPr indent="0" marL="0">
+              <a:buNone/>
+            </a:pPr>
+            <a:r>
+              <a:rPr lang="en-US" sz="1050" b="1" spc="150" kern="0" dirty="0">
+                <a:solidFill>
+                  <a:srgbClr val="315D66"/>
+                </a:solidFill>
+                <a:latin typeface="Poppins" pitchFamily="34" charset="0"/>
+                <a:ea typeface="Poppins" pitchFamily="34" charset="-122"/>
+                <a:cs typeface="Poppins" pitchFamily="34" charset="-120"/>
+              </a:rPr>
+              <a:t>REGULIFT</a:t>
+            </a:r>
+            <a:endParaRPr lang="en-US" sz="1050" dirty="0"/>
+          </a:p>
+        </p:txBody>
+      </p:sp>
+      <p:sp>
+        <p:nvSpPr>
+          <p:cNvPr id="28" name="Text 22"/>
+          <p:cNvSpPr txBox="1"/>
+          <p:nvPr/>
+        </p:nvSpPr>
+        <p:spPr>
+          <a:xfrm>
+            <a:off x="11356848" y="5440680"/>
+            <a:ext cx="5504688" cy="2103120"/>
+          </a:xfrm>
+          <a:prstGeom prst="rect">
+            <a:avLst/>
+          </a:prstGeom>
+          <a:noFill/>
+          <a:ln/>
+        </p:spPr>
+        <p:txBody>
+          <a:bodyPr wrap="square" lIns="0" tIns="0" rIns="0" bIns="0" rtlCol="0" anchor="t"/>
+          <a:lstStyle/>
+          <a:p>
+            <a:pPr indent="0" marL="0">
+              <a:lnSpc>
+                <a:spcPct val="105000"/>
+              </a:lnSpc>
+              <a:buNone/>
+            </a:pPr>
+            <a:r>
+              <a:rPr lang="en-US" sz="2600" b="1" spc="-50" kern="0" dirty="0">
+                <a:solidFill>
+                  <a:srgbClr val="497078"/>
+                </a:solidFill>
+                <a:latin typeface="Poppins" pitchFamily="34" charset="0"/>
+                <a:ea typeface="Poppins" pitchFamily="34" charset="-122"/>
+                <a:cs typeface="Poppins" pitchFamily="34" charset="-120"/>
+              </a:rPr>
+              <a:t>AI-first compliance: </a:t>
+            </a:r>
+            <a:pPr indent="0" marL="0">
+              <a:lnSpc>
+                <a:spcPct val="105000"/>
+              </a:lnSpc>
+              <a:buNone/>
+            </a:pPr>
+            <a:r>
+              <a:rPr lang="en-US" sz="2600" b="1" spc="-50" kern="0" dirty="0">
+                <a:solidFill>
+                  <a:srgbClr val="171717"/>
+                </a:solidFill>
+                <a:latin typeface="Poppins" pitchFamily="34" charset="0"/>
+                <a:ea typeface="Poppins" pitchFamily="34" charset="-122"/>
+                <a:cs typeface="Poppins" pitchFamily="34" charset="-120"/>
+              </a:rPr>
+              <a:t>the facts come from your systems, not from questionnaires.</a:t>
+            </a:r>
+            <a:endParaRPr lang="en-US" sz="2600" dirty="0"/>
+          </a:p>
+        </p:txBody>
+      </p:sp>
+      <p:sp>
+        <p:nvSpPr>
+          <p:cNvPr id="29" name="Shape 23"/>
+          <p:cNvSpPr/>
+          <p:nvPr/>
+        </p:nvSpPr>
+        <p:spPr>
+          <a:xfrm>
+            <a:off x="11356848" y="7882128"/>
+            <a:ext cx="5504688" cy="0"/>
+          </a:xfrm>
+          <a:prstGeom prst="line">
+            <a:avLst/>
+          </a:prstGeom>
+          <a:noFill/>
+          <a:ln w="9525">
+            <a:solidFill>
+              <a:srgbClr val="C9DCDE"/>
+            </a:solidFill>
+            <a:prstDash val="solid"/>
+          </a:ln>
+        </p:spPr>
+      </p:sp>
+      <p:sp>
+        <p:nvSpPr>
+          <p:cNvPr id="30" name="Text 24"/>
+          <p:cNvSpPr txBox="1"/>
+          <p:nvPr/>
+        </p:nvSpPr>
+        <p:spPr>
+          <a:xfrm>
+            <a:off x="11356848" y="8019288"/>
+            <a:ext cx="5504688" cy="411480"/>
+          </a:xfrm>
+          <a:prstGeom prst="rect">
+            <a:avLst/>
+          </a:prstGeom>
+          <a:noFill/>
+          <a:ln/>
+        </p:spPr>
+        <p:txBody>
+          <a:bodyPr wrap="square" lIns="0" tIns="0" rIns="0" bIns="0" rtlCol="0" anchor="t"/>
+          <a:lstStyle/>
+          <a:p>
+            <a:pPr indent="0" marL="0">
+              <a:buNone/>
+            </a:pPr>
+            <a:r>
+              <a:rPr lang="en-US" sz="1300" b="1" dirty="0">
+                <a:solidFill>
+                  <a:srgbClr val="315D66"/>
+                </a:solidFill>
+                <a:latin typeface="Poppins" pitchFamily="34" charset="0"/>
+                <a:ea typeface="Poppins" pitchFamily="34" charset="-122"/>
+                <a:cs typeface="Poppins" pitchFamily="34" charset="-120"/>
+              </a:rPr>
+              <a:t>Next: </a:t>
+            </a:r>
+            <a:pPr indent="0" marL="0">
+              <a:buNone/>
+            </a:pPr>
+            <a:r>
+              <a:rPr lang="en-US" sz="1300" dirty="0">
+                <a:solidFill>
+                  <a:srgbClr val="4A5E62"/>
+                </a:solidFill>
+                <a:latin typeface="Poppins" pitchFamily="34" charset="0"/>
+                <a:ea typeface="Poppins" pitchFamily="34" charset="-122"/>
+                <a:cs typeface="Poppins" pitchFamily="34" charset="-120"/>
+              </a:rPr>
+              <a:t>the inside out framework.</a:t>
+            </a:r>
+            <a:endParaRPr lang="en-US" sz="1300" dirty="0"/>
+          </a:p>
+        </p:txBody>
+      </p:sp>
+      <p:sp>
+        <p:nvSpPr>
+          <p:cNvPr name="Freeform 2" id="31"/>
           <p:cNvSpPr/>
           <p:nvPr/>
         </p:nvSpPr>
@@ -10212,10 +11514,10 @@
             </a:pathLst>
           </a:custGeom>
           <a:blipFill>
-            <a:blip r:embed="rId2">
+            <a:blip r:embed="rId5">
               <a:extLst>
                 <a:ext uri="{96DAC541-7B7A-43D3-8B79-37D633B846F1}">
-                  <asvg:svgBlip xmlns:asvg="http://schemas.microsoft.com/office/drawing/2016/SVG/main" r:embed="rId3"/>
+                  <asvg:svgBlip xmlns:asvg="http://schemas.microsoft.com/office/drawing/2016/SVG/main" r:embed="rId6"/>
                 </a:ext>
               </a:extLst>
             </a:blip>
@@ -10227,7 +11529,7 @@
       </p:sp>
       <p:sp>
         <p:nvSpPr>
-          <p:cNvPr name="Freeform 3" id="3"/>
+          <p:cNvPr name="Freeform 3" id="32"/>
           <p:cNvSpPr/>
           <p:nvPr/>
         </p:nvSpPr>
@@ -10264,10 +11566,10 @@
             </a:pathLst>
           </a:custGeom>
           <a:blipFill>
-            <a:blip r:embed="rId4">
+            <a:blip r:embed="rId7">
               <a:extLst>
                 <a:ext uri="{96DAC541-7B7A-43D3-8B79-37D633B846F1}">
-                  <asvg:svgBlip xmlns:asvg="http://schemas.microsoft.com/office/drawing/2016/SVG/main" r:embed="rId5"/>
+                  <asvg:svgBlip xmlns:asvg="http://schemas.microsoft.com/office/drawing/2016/SVG/main" r:embed="rId8"/>
                 </a:ext>
               </a:extLst>
             </a:blip>
@@ -10279,7 +11581,7 @@
       </p:sp>
       <p:sp>
         <p:nvSpPr>
-          <p:cNvPr name="TextBox 4" id="4"/>
+          <p:cNvPr name="TextBox 4" id="33"/>
           <p:cNvSpPr txBox="true"/>
           <p:nvPr/>
         </p:nvSpPr>
@@ -10320,7 +11622,7 @@
       </p:sp>
       <p:grpSp>
         <p:nvGrpSpPr>
-          <p:cNvPr name="Group 5" id="5"/>
+          <p:cNvPr name="Group 5" id="34"/>
           <p:cNvGrpSpPr/>
           <p:nvPr/>
         </p:nvGrpSpPr>
@@ -10334,8 +11636,8 @@
         </p:grpSpPr>
         <p:sp>
           <p:nvSpPr>
-            <p:cNvPr name="Freeform 6" id="6">
-              <a:hlinkClick r:id="rId6" action="ppaction://hlinksldjump"/>
+            <p:cNvPr name="Freeform 6" id="35">
+              <a:hlinkClick r:id="rId9" action="ppaction://hlinksldjump"/>
             </p:cNvPr>
             <p:cNvSpPr/>
             <p:nvPr/>
@@ -10393,7 +11695,7 @@
         </p:sp>
         <p:sp>
           <p:nvSpPr>
-            <p:cNvPr name="TextBox 7" id="7"/>
+            <p:cNvPr name="TextBox 7" id="36"/>
             <p:cNvSpPr txBox="true"/>
             <p:nvPr/>
           </p:nvSpPr>
@@ -10433,7 +11735,7 @@
       </p:grpSp>
       <p:grpSp>
         <p:nvGrpSpPr>
-          <p:cNvPr name="Group 8" id="8"/>
+          <p:cNvPr name="Group 8" id="37"/>
           <p:cNvGrpSpPr/>
           <p:nvPr/>
         </p:nvGrpSpPr>
@@ -10447,8 +11749,8 @@
         </p:grpSpPr>
         <p:sp>
           <p:nvSpPr>
-            <p:cNvPr name="Freeform 9" id="9">
-              <a:hlinkClick r:id="rId7" action="ppaction://hlinksldjump"/>
+            <p:cNvPr name="Freeform 9" id="38">
+              <a:hlinkClick r:id="rId10" action="ppaction://hlinksldjump"/>
             </p:cNvPr>
             <p:cNvSpPr/>
             <p:nvPr/>
@@ -10506,7 +11808,7 @@
         </p:sp>
         <p:sp>
           <p:nvSpPr>
-            <p:cNvPr name="TextBox 10" id="10"/>
+            <p:cNvPr name="TextBox 10" id="39"/>
             <p:cNvSpPr txBox="true"/>
             <p:nvPr/>
           </p:nvSpPr>
@@ -10546,7 +11848,7 @@
       </p:grpSp>
       <p:grpSp>
         <p:nvGrpSpPr>
-          <p:cNvPr name="Group 11" id="11"/>
+          <p:cNvPr name="Group 11" id="40"/>
           <p:cNvGrpSpPr/>
           <p:nvPr/>
         </p:nvGrpSpPr>
@@ -10560,8 +11862,8 @@
         </p:grpSpPr>
         <p:sp>
           <p:nvSpPr>
-            <p:cNvPr name="Freeform 12" id="12">
-              <a:hlinkClick r:id="rId8" action="ppaction://hlinksldjump"/>
+            <p:cNvPr name="Freeform 12" id="41">
+              <a:hlinkClick r:id="rId11" action="ppaction://hlinksldjump"/>
             </p:cNvPr>
             <p:cNvSpPr/>
             <p:nvPr/>
@@ -10619,7 +11921,7 @@
         </p:sp>
         <p:sp>
           <p:nvSpPr>
-            <p:cNvPr name="TextBox 13" id="13"/>
+            <p:cNvPr name="TextBox 13" id="42"/>
             <p:cNvSpPr txBox="true"/>
             <p:nvPr/>
           </p:nvSpPr>
@@ -10659,7 +11961,7 @@
       </p:grpSp>
       <p:grpSp>
         <p:nvGrpSpPr>
-          <p:cNvPr name="Group 14" id="14"/>
+          <p:cNvPr name="Group 14" id="43"/>
           <p:cNvGrpSpPr/>
           <p:nvPr/>
         </p:nvGrpSpPr>
@@ -10673,8 +11975,8 @@
         </p:grpSpPr>
         <p:sp>
           <p:nvSpPr>
-            <p:cNvPr name="Freeform 15" id="15">
-              <a:hlinkClick r:id="rId9" action="ppaction://hlinksldjump"/>
+            <p:cNvPr name="Freeform 15" id="44">
+              <a:hlinkClick r:id="rId12" action="ppaction://hlinksldjump"/>
             </p:cNvPr>
             <p:cNvSpPr/>
             <p:nvPr/>
@@ -10732,7 +12034,7 @@
         </p:sp>
         <p:sp>
           <p:nvSpPr>
-            <p:cNvPr name="TextBox 16" id="16"/>
+            <p:cNvPr name="TextBox 16" id="45"/>
             <p:cNvSpPr txBox="true"/>
             <p:nvPr/>
           </p:nvSpPr>
@@ -10772,7 +12074,68 @@
       </p:grpSp>
       <p:grpSp>
         <p:nvGrpSpPr>
-          <p:cNvPr name="Group 17" id="17"/>
+          <p:cNvPr name="Group 52" id="46"/>
+          <p:cNvGrpSpPr/>
+          <p:nvPr/>
+        </p:nvGrpSpPr>
+        <p:grpSpPr>
+          <a:xfrm rot="0">
+            <a:off x="4158586" y="1272016"/>
+            <a:ext cx="269215" cy="222028"/>
+            <a:chOff x="0" y="0"/>
+            <a:chExt cx="358953" cy="296037"/>
+          </a:xfrm>
+        </p:grpSpPr>
+        <p:sp>
+          <p:nvSpPr>
+            <p:cNvPr name="Freeform 53" id="47" descr="image.png"/>
+            <p:cNvSpPr/>
+            <p:nvPr/>
+          </p:nvSpPr>
+          <p:spPr>
+            <a:xfrm flipH="false" flipV="false" rot="0">
+              <a:off x="0" y="0"/>
+              <a:ext cx="358902" cy="296037"/>
+            </a:xfrm>
+            <a:custGeom>
+              <a:avLst/>
+              <a:gdLst/>
+              <a:ahLst/>
+              <a:cxnLst/>
+              <a:rect r="r" b="b" t="t" l="l"/>
+              <a:pathLst>
+                <a:path h="296037" w="358902">
+                  <a:moveTo>
+                    <a:pt x="0" y="0"/>
+                  </a:moveTo>
+                  <a:lnTo>
+                    <a:pt x="358902" y="0"/>
+                  </a:lnTo>
+                  <a:lnTo>
+                    <a:pt x="358902" y="296037"/>
+                  </a:lnTo>
+                  <a:lnTo>
+                    <a:pt x="0" y="296037"/>
+                  </a:lnTo>
+                  <a:lnTo>
+                    <a:pt x="0" y="0"/>
+                  </a:lnTo>
+                  <a:close/>
+                </a:path>
+              </a:pathLst>
+            </a:custGeom>
+            <a:blipFill>
+              <a:blip r:embed="rId13"/>
+              <a:stretch>
+                <a:fillRect l="0" t="0" r="-14" b="0"/>
+              </a:stretch>
+            </a:blipFill>
+          </p:spPr>
+        </p:sp>
+      </p:grpSp>
+      <p:grpSp>
+        <p:nvGrpSpPr>
+          <p:cNvPr name="Group 17" id="48"/>
           <p:cNvGrpSpPr/>
           <p:nvPr/>
         </p:nvGrpSpPr>
@@ -10786,7 +12149,7 @@
         </p:grpSpPr>
         <p:sp>
           <p:nvSpPr>
-            <p:cNvPr name="Freeform 18" id="18"/>
+            <p:cNvPr name="Freeform 18" id="49"/>
             <p:cNvSpPr/>
             <p:nvPr/>
           </p:nvSpPr>
@@ -10846,7 +12209,7 @@
         </p:sp>
         <p:sp>
           <p:nvSpPr>
-            <p:cNvPr name="TextBox 19" id="19"/>
+            <p:cNvPr name="TextBox 19" id="50"/>
             <p:cNvSpPr txBox="true"/>
             <p:nvPr/>
           </p:nvSpPr>
@@ -10884,3263 +12247,11 @@
           </p:txBody>
         </p:sp>
       </p:grpSp>
-      <p:grpSp>
-        <p:nvGrpSpPr>
-          <p:cNvPr name="Group 20" id="20"/>
-          <p:cNvGrpSpPr/>
-          <p:nvPr/>
-        </p:nvGrpSpPr>
-        <p:grpSpPr>
-          <a:xfrm rot="0">
-            <a:off x="1069848" y="1993392"/>
-            <a:ext cx="7132320" cy="347472"/>
-            <a:chOff x="0" y="0"/>
-            <a:chExt cx="9509760" cy="463296"/>
-          </a:xfrm>
-        </p:grpSpPr>
-        <p:sp>
-          <p:nvSpPr>
-            <p:cNvPr name="Freeform 21" id="21"/>
-            <p:cNvSpPr/>
-            <p:nvPr/>
-          </p:nvSpPr>
-          <p:spPr>
-            <a:xfrm flipH="false" flipV="false" rot="0">
-              <a:off x="0" y="0"/>
-              <a:ext cx="9509760" cy="463296"/>
-            </a:xfrm>
-            <a:custGeom>
-              <a:avLst/>
-              <a:gdLst/>
-              <a:ahLst/>
-              <a:cxnLst/>
-              <a:rect r="r" b="b" t="t" l="l"/>
-              <a:pathLst>
-                <a:path h="463296" w="9509760">
-                  <a:moveTo>
-                    <a:pt x="0" y="0"/>
-                  </a:moveTo>
-                  <a:lnTo>
-                    <a:pt x="9509760" y="0"/>
-                  </a:lnTo>
-                  <a:lnTo>
-                    <a:pt x="9509760" y="463296"/>
-                  </a:lnTo>
-                  <a:lnTo>
-                    <a:pt x="0" y="463296"/>
-                  </a:lnTo>
-                  <a:close/>
-                </a:path>
-              </a:pathLst>
-            </a:custGeom>
-            <a:blipFill>
-              <a:blip r:embed="rId10">
-                <a:alphaModFix amt="0"/>
-              </a:blip>
-              <a:stretch>
-                <a:fillRect l="0" t="-349956" r="0" b="-349956"/>
-              </a:stretch>
-            </a:blipFill>
-          </p:spPr>
-        </p:sp>
-        <p:sp>
-          <p:nvSpPr>
-            <p:cNvPr name="TextBox 22" id="22"/>
-            <p:cNvSpPr txBox="true"/>
-            <p:nvPr/>
-          </p:nvSpPr>
-          <p:spPr>
-            <a:xfrm>
-              <a:off x="0" y="-9525"/>
-              <a:ext cx="9509760" cy="472821"/>
-            </a:xfrm>
-            <a:prstGeom prst="rect">
-              <a:avLst/>
-            </a:prstGeom>
-          </p:spPr>
-          <p:txBody>
-            <a:bodyPr anchor="ctr" rtlCol="false" tIns="0" lIns="0" bIns="0" rIns="0"/>
-            <a:lstStyle/>
-            <a:p>
-              <a:pPr algn="l">
-                <a:lnSpc>
-                  <a:spcPts val="2076"/>
-                </a:lnSpc>
-              </a:pPr>
-              <a:r>
-                <a:rPr lang="en-US" sz="1730" b="true">
-                  <a:solidFill>
-                    <a:srgbClr val="497078"/>
-                  </a:solidFill>
-                  <a:latin typeface="Poppins Bold"/>
-                  <a:ea typeface="Poppins Bold"/>
-                  <a:cs typeface="Poppins Bold"/>
-                  <a:sym typeface="Poppins Bold"/>
-                </a:rPr>
-                <a:t>MARKET PAIN POINTS</a:t>
-              </a:r>
-            </a:p>
-          </p:txBody>
-        </p:sp>
-      </p:grpSp>
-      <p:grpSp>
-        <p:nvGrpSpPr>
-          <p:cNvPr name="Group 23" id="23"/>
-          <p:cNvGrpSpPr/>
-          <p:nvPr/>
-        </p:nvGrpSpPr>
-        <p:grpSpPr>
-          <a:xfrm rot="0">
-            <a:off x="1042416" y="2496312"/>
-            <a:ext cx="10067544" cy="868680"/>
-            <a:chOff x="0" y="0"/>
-            <a:chExt cx="13423392" cy="1158240"/>
-          </a:xfrm>
-        </p:grpSpPr>
-        <p:sp>
-          <p:nvSpPr>
-            <p:cNvPr name="Freeform 24" id="24"/>
-            <p:cNvSpPr/>
-            <p:nvPr/>
-          </p:nvSpPr>
-          <p:spPr>
-            <a:xfrm flipH="false" flipV="false" rot="0">
-              <a:off x="0" y="0"/>
-              <a:ext cx="13423392" cy="1158240"/>
-            </a:xfrm>
-            <a:custGeom>
-              <a:avLst/>
-              <a:gdLst/>
-              <a:ahLst/>
-              <a:cxnLst/>
-              <a:rect r="r" b="b" t="t" l="l"/>
-              <a:pathLst>
-                <a:path h="1158240" w="13423392">
-                  <a:moveTo>
-                    <a:pt x="0" y="0"/>
-                  </a:moveTo>
-                  <a:lnTo>
-                    <a:pt x="13423392" y="0"/>
-                  </a:lnTo>
-                  <a:lnTo>
-                    <a:pt x="13423392" y="1158240"/>
-                  </a:lnTo>
-                  <a:lnTo>
-                    <a:pt x="0" y="1158240"/>
-                  </a:lnTo>
-                  <a:close/>
-                </a:path>
-              </a:pathLst>
-            </a:custGeom>
-            <a:blipFill>
-              <a:blip r:embed="rId10">
-                <a:alphaModFix amt="0"/>
-              </a:blip>
-              <a:stretch>
-                <a:fillRect l="0" t="-175821" r="0" b="-175821"/>
-              </a:stretch>
-            </a:blipFill>
-          </p:spPr>
-        </p:sp>
-        <p:sp>
-          <p:nvSpPr>
-            <p:cNvPr name="TextBox 25" id="25"/>
-            <p:cNvSpPr txBox="true"/>
-            <p:nvPr/>
-          </p:nvSpPr>
-          <p:spPr>
-            <a:xfrm>
-              <a:off x="0" y="-47625"/>
-              <a:ext cx="13423392" cy="1205865"/>
-            </a:xfrm>
-            <a:prstGeom prst="rect">
-              <a:avLst/>
-            </a:prstGeom>
-          </p:spPr>
-          <p:txBody>
-            <a:bodyPr anchor="ctr" rtlCol="false" tIns="0" lIns="0" bIns="0" rIns="0"/>
-            <a:lstStyle/>
-            <a:p>
-              <a:pPr algn="l">
-                <a:lnSpc>
-                  <a:spcPts val="6360"/>
-                </a:lnSpc>
-              </a:pPr>
-              <a:r>
-                <a:rPr lang="en-US" sz="5300" b="true">
-                  <a:solidFill>
-                    <a:srgbClr val="171717"/>
-                  </a:solidFill>
-                  <a:latin typeface="Poppins Bold"/>
-                  <a:ea typeface="Poppins Bold"/>
-                  <a:cs typeface="Poppins Bold"/>
-                  <a:sym typeface="Poppins Bold"/>
-                </a:rPr>
-                <a:t>COMPLIANCE IS STILL</a:t>
-              </a:r>
-            </a:p>
-          </p:txBody>
-        </p:sp>
-      </p:grpSp>
-      <p:grpSp>
-        <p:nvGrpSpPr>
-          <p:cNvPr name="Group 26" id="26"/>
-          <p:cNvGrpSpPr/>
-          <p:nvPr/>
-        </p:nvGrpSpPr>
-        <p:grpSpPr>
-          <a:xfrm rot="0">
-            <a:off x="10149840" y="2496312"/>
-            <a:ext cx="6949440" cy="868680"/>
-            <a:chOff x="0" y="0"/>
-            <a:chExt cx="9265920" cy="1158240"/>
-          </a:xfrm>
-        </p:grpSpPr>
-        <p:sp>
-          <p:nvSpPr>
-            <p:cNvPr name="Freeform 27" id="27"/>
-            <p:cNvSpPr/>
-            <p:nvPr/>
-          </p:nvSpPr>
-          <p:spPr>
-            <a:xfrm flipH="false" flipV="false" rot="0">
-              <a:off x="0" y="0"/>
-              <a:ext cx="9265920" cy="1158240"/>
-            </a:xfrm>
-            <a:custGeom>
-              <a:avLst/>
-              <a:gdLst/>
-              <a:ahLst/>
-              <a:cxnLst/>
-              <a:rect r="r" b="b" t="t" l="l"/>
-              <a:pathLst>
-                <a:path h="1158240" w="9265920">
-                  <a:moveTo>
-                    <a:pt x="0" y="0"/>
-                  </a:moveTo>
-                  <a:lnTo>
-                    <a:pt x="9265920" y="0"/>
-                  </a:lnTo>
-                  <a:lnTo>
-                    <a:pt x="9265920" y="1158240"/>
-                  </a:lnTo>
-                  <a:lnTo>
-                    <a:pt x="0" y="1158240"/>
-                  </a:lnTo>
-                  <a:close/>
-                </a:path>
-              </a:pathLst>
-            </a:custGeom>
-            <a:blipFill>
-              <a:blip r:embed="rId10">
-                <a:alphaModFix amt="0"/>
-              </a:blip>
-              <a:stretch>
-                <a:fillRect l="0" t="-105880" r="0" b="-105880"/>
-              </a:stretch>
-            </a:blipFill>
-          </p:spPr>
-        </p:sp>
-        <p:sp>
-          <p:nvSpPr>
-            <p:cNvPr name="TextBox 28" id="28"/>
-            <p:cNvSpPr txBox="true"/>
-            <p:nvPr/>
-          </p:nvSpPr>
-          <p:spPr>
-            <a:xfrm>
-              <a:off x="0" y="-47625"/>
-              <a:ext cx="9265920" cy="1205865"/>
-            </a:xfrm>
-            <a:prstGeom prst="rect">
-              <a:avLst/>
-            </a:prstGeom>
-          </p:spPr>
-          <p:txBody>
-            <a:bodyPr anchor="ctr" rtlCol="false" tIns="0" lIns="0" bIns="0" rIns="0"/>
-            <a:lstStyle/>
-            <a:p>
-              <a:pPr algn="l">
-                <a:lnSpc>
-                  <a:spcPts val="6360"/>
-                </a:lnSpc>
-              </a:pPr>
-              <a:r>
-                <a:rPr lang="en-US" sz="5300" b="true">
-                  <a:solidFill>
-                    <a:srgbClr val="A95E53"/>
-                  </a:solidFill>
-                  <a:latin typeface="Poppins Bold"/>
-                  <a:ea typeface="Poppins Bold"/>
-                  <a:cs typeface="Poppins Bold"/>
-                  <a:sym typeface="Poppins Bold"/>
-                </a:rPr>
-                <a:t>GUESSWORK.</a:t>
-              </a:r>
-            </a:p>
-          </p:txBody>
-        </p:sp>
-      </p:grpSp>
-      <p:grpSp>
-        <p:nvGrpSpPr>
-          <p:cNvPr name="Group 29" id="29"/>
-          <p:cNvGrpSpPr/>
-          <p:nvPr/>
-        </p:nvGrpSpPr>
-        <p:grpSpPr>
-          <a:xfrm rot="0">
-            <a:off x="1069848" y="3557016"/>
-            <a:ext cx="16184880" cy="420624"/>
-            <a:chOff x="0" y="0"/>
-            <a:chExt cx="21579840" cy="560832"/>
-          </a:xfrm>
-        </p:grpSpPr>
-        <p:sp>
-          <p:nvSpPr>
-            <p:cNvPr name="Freeform 30" id="30"/>
-            <p:cNvSpPr/>
-            <p:nvPr/>
-          </p:nvSpPr>
-          <p:spPr>
-            <a:xfrm flipH="false" flipV="false" rot="0">
-              <a:off x="0" y="0"/>
-              <a:ext cx="21579839" cy="560832"/>
-            </a:xfrm>
-            <a:custGeom>
-              <a:avLst/>
-              <a:gdLst/>
-              <a:ahLst/>
-              <a:cxnLst/>
-              <a:rect r="r" b="b" t="t" l="l"/>
-              <a:pathLst>
-                <a:path h="560832" w="21579839">
-                  <a:moveTo>
-                    <a:pt x="0" y="0"/>
-                  </a:moveTo>
-                  <a:lnTo>
-                    <a:pt x="21579839" y="0"/>
-                  </a:lnTo>
-                  <a:lnTo>
-                    <a:pt x="21579839" y="560832"/>
-                  </a:lnTo>
-                  <a:lnTo>
-                    <a:pt x="0" y="560832"/>
-                  </a:lnTo>
-                  <a:close/>
-                </a:path>
-              </a:pathLst>
-            </a:custGeom>
-            <a:blipFill>
-              <a:blip r:embed="rId10">
-                <a:alphaModFix amt="0"/>
-              </a:blip>
-              <a:stretch>
-                <a:fillRect l="0" t="-699750" r="0" b="-699750"/>
-              </a:stretch>
-            </a:blipFill>
-          </p:spPr>
-        </p:sp>
-        <p:sp>
-          <p:nvSpPr>
-            <p:cNvPr name="TextBox 31" id="31"/>
-            <p:cNvSpPr txBox="true"/>
-            <p:nvPr/>
-          </p:nvSpPr>
-          <p:spPr>
-            <a:xfrm>
-              <a:off x="0" y="-19050"/>
-              <a:ext cx="21579840" cy="579882"/>
-            </a:xfrm>
-            <a:prstGeom prst="rect">
-              <a:avLst/>
-            </a:prstGeom>
-          </p:spPr>
-          <p:txBody>
-            <a:bodyPr anchor="ctr" rtlCol="false" tIns="0" lIns="0" bIns="0" rIns="0"/>
-            <a:lstStyle/>
-            <a:p>
-              <a:pPr algn="l">
-                <a:lnSpc>
-                  <a:spcPts val="2340"/>
-                </a:lnSpc>
-              </a:pPr>
-              <a:r>
-                <a:rPr lang="en-US" sz="1950">
-                  <a:solidFill>
-                    <a:srgbClr val="687075"/>
-                  </a:solidFill>
-                  <a:latin typeface="Poppins"/>
-                  <a:ea typeface="Poppins"/>
-                  <a:cs typeface="Poppins"/>
-                  <a:sym typeface="Poppins"/>
-                </a:rPr>
-                <a:t>Companies pay to reconstruct facts that already exist in their systems.</a:t>
-              </a:r>
-            </a:p>
-          </p:txBody>
-        </p:sp>
-      </p:grpSp>
-      <p:sp>
-        <p:nvSpPr>
-          <p:cNvPr name="AutoShape 32" id="32"/>
-          <p:cNvSpPr/>
-          <p:nvPr/>
-        </p:nvSpPr>
-        <p:spPr>
-          <a:xfrm rot="3240">
-            <a:off x="1071372" y="4055174"/>
-            <a:ext cx="16200130" cy="0"/>
-          </a:xfrm>
-          <a:prstGeom prst="line">
-            <a:avLst/>
-          </a:prstGeom>
-          <a:ln cap="rnd" w="9525">
-            <a:solidFill>
-              <a:srgbClr val="DFE6E7"/>
-            </a:solidFill>
-            <a:prstDash val="solid"/>
-            <a:headEnd type="none" len="sm" w="sm"/>
-            <a:tailEnd type="none" len="sm" w="sm"/>
-          </a:ln>
-        </p:spPr>
-      </p:sp>
-      <p:grpSp>
-        <p:nvGrpSpPr>
-          <p:cNvPr name="Group 33" id="33"/>
-          <p:cNvGrpSpPr/>
-          <p:nvPr/>
-        </p:nvGrpSpPr>
-        <p:grpSpPr>
-          <a:xfrm rot="0">
-            <a:off x="1063180" y="5049964"/>
-            <a:ext cx="5207127" cy="3579495"/>
-            <a:chOff x="0" y="0"/>
-            <a:chExt cx="6942836" cy="4772660"/>
-          </a:xfrm>
-        </p:grpSpPr>
-        <p:sp>
-          <p:nvSpPr>
-            <p:cNvPr name="Freeform 34" id="34"/>
-            <p:cNvSpPr/>
-            <p:nvPr/>
-          </p:nvSpPr>
-          <p:spPr>
-            <a:xfrm flipH="false" flipV="false" rot="0">
-              <a:off x="0" y="0"/>
-              <a:ext cx="6942836" cy="4772660"/>
-            </a:xfrm>
-            <a:custGeom>
-              <a:avLst/>
-              <a:gdLst/>
-              <a:ahLst/>
-              <a:cxnLst/>
-              <a:rect r="r" b="b" t="t" l="l"/>
-              <a:pathLst>
-                <a:path h="4772660" w="6942836">
-                  <a:moveTo>
-                    <a:pt x="0" y="715899"/>
-                  </a:moveTo>
-                  <a:cubicBezTo>
-                    <a:pt x="0" y="320548"/>
-                    <a:pt x="320548" y="0"/>
-                    <a:pt x="715899" y="0"/>
-                  </a:cubicBezTo>
-                  <a:lnTo>
-                    <a:pt x="6226937" y="0"/>
-                  </a:lnTo>
-                  <a:cubicBezTo>
-                    <a:pt x="6622288" y="0"/>
-                    <a:pt x="6942836" y="320548"/>
-                    <a:pt x="6942836" y="715899"/>
-                  </a:cubicBezTo>
-                  <a:lnTo>
-                    <a:pt x="6942836" y="4056761"/>
-                  </a:lnTo>
-                  <a:cubicBezTo>
-                    <a:pt x="6942836" y="4452112"/>
-                    <a:pt x="6622288" y="4772660"/>
-                    <a:pt x="6226937" y="4772660"/>
-                  </a:cubicBezTo>
-                  <a:lnTo>
-                    <a:pt x="715899" y="4772660"/>
-                  </a:lnTo>
-                  <a:cubicBezTo>
-                    <a:pt x="320548" y="4772660"/>
-                    <a:pt x="0" y="4452112"/>
-                    <a:pt x="0" y="4056761"/>
-                  </a:cubicBezTo>
-                  <a:close/>
-                </a:path>
-              </a:pathLst>
-            </a:custGeom>
-            <a:solidFill>
-              <a:srgbClr val="FFFFFF"/>
-            </a:solidFill>
-            <a:ln w="13335" cap="sq">
-              <a:solidFill>
-                <a:srgbClr val="DDE6E7"/>
-              </a:solidFill>
-              <a:prstDash val="solid"/>
-              <a:miter/>
-            </a:ln>
-          </p:spPr>
-        </p:sp>
-      </p:grpSp>
-      <p:grpSp>
-        <p:nvGrpSpPr>
-          <p:cNvPr name="Group 35" id="35"/>
-          <p:cNvGrpSpPr/>
-          <p:nvPr/>
-        </p:nvGrpSpPr>
-        <p:grpSpPr>
-          <a:xfrm rot="0">
-            <a:off x="1081735" y="5068519"/>
-            <a:ext cx="5170018" cy="1490472"/>
-            <a:chOff x="0" y="0"/>
-            <a:chExt cx="6893357" cy="1987296"/>
-          </a:xfrm>
-        </p:grpSpPr>
-        <p:sp>
-          <p:nvSpPr>
-            <p:cNvPr name="Freeform 36" id="36"/>
-            <p:cNvSpPr/>
-            <p:nvPr/>
-          </p:nvSpPr>
-          <p:spPr>
-            <a:xfrm flipH="false" flipV="false" rot="0">
-              <a:off x="0" y="0"/>
-              <a:ext cx="6893306" cy="1987169"/>
-            </a:xfrm>
-            <a:custGeom>
-              <a:avLst/>
-              <a:gdLst/>
-              <a:ahLst/>
-              <a:cxnLst/>
-              <a:rect r="r" b="b" t="t" l="l"/>
-              <a:pathLst>
-                <a:path h="1987169" w="6893306">
-                  <a:moveTo>
-                    <a:pt x="0" y="715391"/>
-                  </a:moveTo>
-                  <a:cubicBezTo>
-                    <a:pt x="0" y="320294"/>
-                    <a:pt x="320294" y="0"/>
-                    <a:pt x="715391" y="0"/>
-                  </a:cubicBezTo>
-                  <a:lnTo>
-                    <a:pt x="6177915" y="0"/>
-                  </a:lnTo>
-                  <a:cubicBezTo>
-                    <a:pt x="6573012" y="0"/>
-                    <a:pt x="6893306" y="320294"/>
-                    <a:pt x="6893306" y="715391"/>
-                  </a:cubicBezTo>
-                  <a:lnTo>
-                    <a:pt x="6893306" y="1271778"/>
-                  </a:lnTo>
-                  <a:cubicBezTo>
-                    <a:pt x="6893306" y="1666875"/>
-                    <a:pt x="6573012" y="1987169"/>
-                    <a:pt x="6177915" y="1987169"/>
-                  </a:cubicBezTo>
-                  <a:lnTo>
-                    <a:pt x="715391" y="1987169"/>
-                  </a:lnTo>
-                  <a:cubicBezTo>
-                    <a:pt x="320294" y="1987296"/>
-                    <a:pt x="0" y="1667002"/>
-                    <a:pt x="0" y="1271905"/>
-                  </a:cubicBezTo>
-                  <a:close/>
-                </a:path>
-              </a:pathLst>
-            </a:custGeom>
-            <a:solidFill>
-              <a:srgbClr val="F6EDEA"/>
-            </a:solidFill>
-          </p:spPr>
-        </p:sp>
-      </p:grpSp>
-      <p:grpSp>
-        <p:nvGrpSpPr>
-          <p:cNvPr name="Group 37" id="37"/>
-          <p:cNvGrpSpPr/>
-          <p:nvPr/>
-        </p:nvGrpSpPr>
-        <p:grpSpPr>
-          <a:xfrm rot="0">
-            <a:off x="1081735" y="6099048"/>
-            <a:ext cx="5170018" cy="475488"/>
-            <a:chOff x="0" y="0"/>
-            <a:chExt cx="6893357" cy="633984"/>
-          </a:xfrm>
-        </p:grpSpPr>
-        <p:sp>
-          <p:nvSpPr>
-            <p:cNvPr name="Freeform 38" id="38"/>
-            <p:cNvSpPr/>
-            <p:nvPr/>
-          </p:nvSpPr>
-          <p:spPr>
-            <a:xfrm flipH="false" flipV="false" rot="0">
-              <a:off x="0" y="0"/>
-              <a:ext cx="6893306" cy="633984"/>
-            </a:xfrm>
-            <a:custGeom>
-              <a:avLst/>
-              <a:gdLst/>
-              <a:ahLst/>
-              <a:cxnLst/>
-              <a:rect r="r" b="b" t="t" l="l"/>
-              <a:pathLst>
-                <a:path h="633984" w="6893306">
-                  <a:moveTo>
-                    <a:pt x="0" y="0"/>
-                  </a:moveTo>
-                  <a:lnTo>
-                    <a:pt x="6893306" y="0"/>
-                  </a:lnTo>
-                  <a:lnTo>
-                    <a:pt x="6893306" y="633984"/>
-                  </a:lnTo>
-                  <a:lnTo>
-                    <a:pt x="0" y="633984"/>
-                  </a:lnTo>
-                  <a:close/>
-                </a:path>
-              </a:pathLst>
-            </a:custGeom>
-            <a:solidFill>
-              <a:srgbClr val="F6EDEA"/>
-            </a:solidFill>
-          </p:spPr>
-        </p:sp>
-      </p:grpSp>
-      <p:sp>
-        <p:nvSpPr>
-          <p:cNvPr name="AutoShape 39" id="39"/>
-          <p:cNvSpPr/>
-          <p:nvPr/>
-        </p:nvSpPr>
-        <p:spPr>
-          <a:xfrm rot="6780">
-            <a:off x="1092194" y="6569774"/>
-            <a:ext cx="5149101" cy="0"/>
-          </a:xfrm>
-          <a:prstGeom prst="line">
-            <a:avLst/>
-          </a:prstGeom>
-          <a:ln cap="rnd" w="9525">
-            <a:solidFill>
-              <a:srgbClr val="DFE8E8"/>
-            </a:solidFill>
-            <a:prstDash val="solid"/>
-            <a:headEnd type="none" len="sm" w="sm"/>
-            <a:tailEnd type="none" len="sm" w="sm"/>
-          </a:ln>
-        </p:spPr>
-      </p:sp>
-      <p:grpSp>
-        <p:nvGrpSpPr>
-          <p:cNvPr name="Group 40" id="40"/>
-          <p:cNvGrpSpPr/>
-          <p:nvPr/>
-        </p:nvGrpSpPr>
-        <p:grpSpPr>
-          <a:xfrm rot="0">
-            <a:off x="1399032" y="5330952"/>
-            <a:ext cx="1051560" cy="1051560"/>
-            <a:chOff x="0" y="0"/>
-            <a:chExt cx="1402080" cy="1402080"/>
-          </a:xfrm>
-        </p:grpSpPr>
-        <p:sp>
-          <p:nvSpPr>
-            <p:cNvPr name="Freeform 41" id="41"/>
-            <p:cNvSpPr/>
-            <p:nvPr/>
-          </p:nvSpPr>
-          <p:spPr>
-            <a:xfrm flipH="false" flipV="false" rot="0">
-              <a:off x="0" y="0"/>
-              <a:ext cx="1402080" cy="1402080"/>
-            </a:xfrm>
-            <a:custGeom>
-              <a:avLst/>
-              <a:gdLst/>
-              <a:ahLst/>
-              <a:cxnLst/>
-              <a:rect r="r" b="b" t="t" l="l"/>
-              <a:pathLst>
-                <a:path h="1402080" w="1402080">
-                  <a:moveTo>
-                    <a:pt x="0" y="701040"/>
-                  </a:moveTo>
-                  <a:cubicBezTo>
-                    <a:pt x="0" y="313817"/>
-                    <a:pt x="313817" y="0"/>
-                    <a:pt x="701040" y="0"/>
-                  </a:cubicBezTo>
-                  <a:cubicBezTo>
-                    <a:pt x="1088263" y="0"/>
-                    <a:pt x="1402080" y="313817"/>
-                    <a:pt x="1402080" y="701040"/>
-                  </a:cubicBezTo>
-                  <a:cubicBezTo>
-                    <a:pt x="1402080" y="1088263"/>
-                    <a:pt x="1088263" y="1402080"/>
-                    <a:pt x="701040" y="1402080"/>
-                  </a:cubicBezTo>
-                  <a:cubicBezTo>
-                    <a:pt x="313817" y="1402080"/>
-                    <a:pt x="0" y="1088263"/>
-                    <a:pt x="0" y="701040"/>
-                  </a:cubicBezTo>
-                  <a:close/>
-                </a:path>
-              </a:pathLst>
-            </a:custGeom>
-            <a:solidFill>
-              <a:srgbClr val="A95E53"/>
-            </a:solidFill>
-          </p:spPr>
-        </p:sp>
-      </p:grpSp>
-      <p:grpSp>
-        <p:nvGrpSpPr>
-          <p:cNvPr name="Group 42" id="42"/>
-          <p:cNvGrpSpPr/>
-          <p:nvPr/>
-        </p:nvGrpSpPr>
-        <p:grpSpPr>
-          <a:xfrm rot="0">
-            <a:off x="1596647" y="5473703"/>
-            <a:ext cx="601475" cy="702059"/>
-            <a:chOff x="0" y="0"/>
-            <a:chExt cx="801967" cy="936079"/>
-          </a:xfrm>
-        </p:grpSpPr>
-        <p:sp>
-          <p:nvSpPr>
-            <p:cNvPr name="Freeform 43" id="43"/>
-            <p:cNvSpPr/>
-            <p:nvPr/>
-          </p:nvSpPr>
-          <p:spPr>
-            <a:xfrm flipH="false" flipV="false" rot="0">
-              <a:off x="0" y="0"/>
-              <a:ext cx="801878" cy="935990"/>
-            </a:xfrm>
-            <a:custGeom>
-              <a:avLst/>
-              <a:gdLst/>
-              <a:ahLst/>
-              <a:cxnLst/>
-              <a:rect r="r" b="b" t="t" l="l"/>
-              <a:pathLst>
-                <a:path h="935990" w="801878">
-                  <a:moveTo>
-                    <a:pt x="0" y="120269"/>
-                  </a:moveTo>
-                  <a:cubicBezTo>
-                    <a:pt x="0" y="53848"/>
-                    <a:pt x="53848" y="0"/>
-                    <a:pt x="120269" y="0"/>
-                  </a:cubicBezTo>
-                  <a:lnTo>
-                    <a:pt x="681609" y="0"/>
-                  </a:lnTo>
-                  <a:cubicBezTo>
-                    <a:pt x="748030" y="0"/>
-                    <a:pt x="801878" y="53848"/>
-                    <a:pt x="801878" y="120269"/>
-                  </a:cubicBezTo>
-                  <a:lnTo>
-                    <a:pt x="801878" y="815721"/>
-                  </a:lnTo>
-                  <a:cubicBezTo>
-                    <a:pt x="801878" y="882142"/>
-                    <a:pt x="748030" y="935990"/>
-                    <a:pt x="681609" y="935990"/>
-                  </a:cubicBezTo>
-                  <a:lnTo>
-                    <a:pt x="120269" y="935990"/>
-                  </a:lnTo>
-                  <a:cubicBezTo>
-                    <a:pt x="53848" y="936117"/>
-                    <a:pt x="0" y="882269"/>
-                    <a:pt x="0" y="815721"/>
-                  </a:cubicBezTo>
-                  <a:close/>
-                </a:path>
-              </a:pathLst>
-            </a:custGeom>
-            <a:solidFill>
-              <a:srgbClr val="A95E53"/>
-            </a:solidFill>
-            <a:ln w="25400" cap="sq">
-              <a:solidFill>
-                <a:srgbClr val="FFFFFF"/>
-              </a:solidFill>
-              <a:prstDash val="solid"/>
-              <a:miter/>
-            </a:ln>
-          </p:spPr>
-        </p:sp>
-      </p:grpSp>
-      <p:grpSp>
-        <p:nvGrpSpPr>
-          <p:cNvPr name="Group 44" id="44"/>
-          <p:cNvGrpSpPr/>
-          <p:nvPr/>
-        </p:nvGrpSpPr>
-        <p:grpSpPr>
-          <a:xfrm rot="0">
-            <a:off x="1683067" y="5669852"/>
-            <a:ext cx="67437" cy="67437"/>
-            <a:chOff x="0" y="0"/>
-            <a:chExt cx="89916" cy="89916"/>
-          </a:xfrm>
-        </p:grpSpPr>
-        <p:sp>
-          <p:nvSpPr>
-            <p:cNvPr name="Freeform 45" id="45"/>
-            <p:cNvSpPr/>
-            <p:nvPr/>
-          </p:nvSpPr>
-          <p:spPr>
-            <a:xfrm flipH="false" flipV="false" rot="0">
-              <a:off x="0" y="0"/>
-              <a:ext cx="89916" cy="89916"/>
-            </a:xfrm>
-            <a:custGeom>
-              <a:avLst/>
-              <a:gdLst/>
-              <a:ahLst/>
-              <a:cxnLst/>
-              <a:rect r="r" b="b" t="t" l="l"/>
-              <a:pathLst>
-                <a:path h="89916" w="89916">
-                  <a:moveTo>
-                    <a:pt x="0" y="44958"/>
-                  </a:moveTo>
-                  <a:cubicBezTo>
-                    <a:pt x="0" y="20066"/>
-                    <a:pt x="20066" y="0"/>
-                    <a:pt x="44958" y="0"/>
-                  </a:cubicBezTo>
-                  <a:cubicBezTo>
-                    <a:pt x="69850" y="0"/>
-                    <a:pt x="89916" y="20066"/>
-                    <a:pt x="89916" y="44958"/>
-                  </a:cubicBezTo>
-                  <a:cubicBezTo>
-                    <a:pt x="89916" y="69850"/>
-                    <a:pt x="69850" y="89916"/>
-                    <a:pt x="44958" y="89916"/>
-                  </a:cubicBezTo>
-                  <a:cubicBezTo>
-                    <a:pt x="20066" y="89916"/>
-                    <a:pt x="0" y="69850"/>
-                    <a:pt x="0" y="44958"/>
-                  </a:cubicBezTo>
-                  <a:close/>
-                </a:path>
-              </a:pathLst>
-            </a:custGeom>
-            <a:blipFill>
-              <a:blip r:embed="rId10">
-                <a:alphaModFix amt="0"/>
-              </a:blip>
-              <a:stretch>
-                <a:fillRect l="-78303" t="0" r="-78303" b="0"/>
-              </a:stretch>
-            </a:blipFill>
-            <a:ln w="17145" cap="sq">
-              <a:solidFill>
-                <a:srgbClr val="FFFFFF"/>
-              </a:solidFill>
-              <a:prstDash val="solid"/>
-              <a:miter/>
-            </a:ln>
-          </p:spPr>
-        </p:sp>
-      </p:grpSp>
-      <p:sp>
-        <p:nvSpPr>
-          <p:cNvPr name="AutoShape 46" id="46"/>
-          <p:cNvSpPr/>
-          <p:nvPr/>
-        </p:nvSpPr>
-        <p:spPr>
-          <a:xfrm rot="222900">
-            <a:off x="1801330" y="5698350"/>
-            <a:ext cx="274387" cy="0"/>
-          </a:xfrm>
-          <a:prstGeom prst="line">
-            <a:avLst/>
-          </a:prstGeom>
-          <a:ln cap="rnd" w="9525">
-            <a:solidFill>
-              <a:srgbClr val="FFFFFF"/>
-            </a:solidFill>
-            <a:prstDash val="solid"/>
-            <a:headEnd type="none" len="sm" w="sm"/>
-            <a:tailEnd type="none" len="sm" w="sm"/>
-          </a:ln>
-        </p:spPr>
-      </p:sp>
-      <p:grpSp>
-        <p:nvGrpSpPr>
-          <p:cNvPr name="Group 47" id="47"/>
-          <p:cNvGrpSpPr/>
-          <p:nvPr/>
-        </p:nvGrpSpPr>
-        <p:grpSpPr>
-          <a:xfrm rot="0">
-            <a:off x="1683067" y="5816156"/>
-            <a:ext cx="67437" cy="67437"/>
-            <a:chOff x="0" y="0"/>
-            <a:chExt cx="89916" cy="89916"/>
-          </a:xfrm>
-        </p:grpSpPr>
-        <p:sp>
-          <p:nvSpPr>
-            <p:cNvPr name="Freeform 48" id="48"/>
-            <p:cNvSpPr/>
-            <p:nvPr/>
-          </p:nvSpPr>
-          <p:spPr>
-            <a:xfrm flipH="false" flipV="false" rot="0">
-              <a:off x="0" y="0"/>
-              <a:ext cx="89916" cy="89916"/>
-            </a:xfrm>
-            <a:custGeom>
-              <a:avLst/>
-              <a:gdLst/>
-              <a:ahLst/>
-              <a:cxnLst/>
-              <a:rect r="r" b="b" t="t" l="l"/>
-              <a:pathLst>
-                <a:path h="89916" w="89916">
-                  <a:moveTo>
-                    <a:pt x="0" y="44958"/>
-                  </a:moveTo>
-                  <a:cubicBezTo>
-                    <a:pt x="0" y="20066"/>
-                    <a:pt x="20066" y="0"/>
-                    <a:pt x="44958" y="0"/>
-                  </a:cubicBezTo>
-                  <a:cubicBezTo>
-                    <a:pt x="69850" y="0"/>
-                    <a:pt x="89916" y="20066"/>
-                    <a:pt x="89916" y="44958"/>
-                  </a:cubicBezTo>
-                  <a:cubicBezTo>
-                    <a:pt x="89916" y="69850"/>
-                    <a:pt x="69850" y="89916"/>
-                    <a:pt x="44958" y="89916"/>
-                  </a:cubicBezTo>
-                  <a:cubicBezTo>
-                    <a:pt x="20066" y="89916"/>
-                    <a:pt x="0" y="69850"/>
-                    <a:pt x="0" y="44958"/>
-                  </a:cubicBezTo>
-                  <a:close/>
-                </a:path>
-              </a:pathLst>
-            </a:custGeom>
-            <a:blipFill>
-              <a:blip r:embed="rId10">
-                <a:alphaModFix amt="0"/>
-              </a:blip>
-              <a:stretch>
-                <a:fillRect l="-78303" t="0" r="-78303" b="0"/>
-              </a:stretch>
-            </a:blipFill>
-            <a:ln w="17145" cap="sq">
-              <a:solidFill>
-                <a:srgbClr val="FFFFFF"/>
-              </a:solidFill>
-              <a:prstDash val="solid"/>
-              <a:miter/>
-            </a:ln>
-          </p:spPr>
-        </p:sp>
-      </p:grpSp>
-      <p:sp>
-        <p:nvSpPr>
-          <p:cNvPr name="AutoShape 49" id="49"/>
-          <p:cNvSpPr/>
-          <p:nvPr/>
-        </p:nvSpPr>
-        <p:spPr>
-          <a:xfrm rot="222900">
-            <a:off x="1801330" y="5844654"/>
-            <a:ext cx="274387" cy="0"/>
-          </a:xfrm>
-          <a:prstGeom prst="line">
-            <a:avLst/>
-          </a:prstGeom>
-          <a:ln cap="rnd" w="9525">
-            <a:solidFill>
-              <a:srgbClr val="FFFFFF"/>
-            </a:solidFill>
-            <a:prstDash val="solid"/>
-            <a:headEnd type="none" len="sm" w="sm"/>
-            <a:tailEnd type="none" len="sm" w="sm"/>
-          </a:ln>
-        </p:spPr>
-      </p:sp>
-      <p:grpSp>
-        <p:nvGrpSpPr>
-          <p:cNvPr name="Group 50" id="50"/>
-          <p:cNvGrpSpPr/>
-          <p:nvPr/>
-        </p:nvGrpSpPr>
-        <p:grpSpPr>
-          <a:xfrm rot="0">
-            <a:off x="1683067" y="5962460"/>
-            <a:ext cx="67437" cy="67437"/>
-            <a:chOff x="0" y="0"/>
-            <a:chExt cx="89916" cy="89916"/>
-          </a:xfrm>
-        </p:grpSpPr>
-        <p:sp>
-          <p:nvSpPr>
-            <p:cNvPr name="Freeform 51" id="51"/>
-            <p:cNvSpPr/>
-            <p:nvPr/>
-          </p:nvSpPr>
-          <p:spPr>
-            <a:xfrm flipH="false" flipV="false" rot="0">
-              <a:off x="0" y="0"/>
-              <a:ext cx="89916" cy="89916"/>
-            </a:xfrm>
-            <a:custGeom>
-              <a:avLst/>
-              <a:gdLst/>
-              <a:ahLst/>
-              <a:cxnLst/>
-              <a:rect r="r" b="b" t="t" l="l"/>
-              <a:pathLst>
-                <a:path h="89916" w="89916">
-                  <a:moveTo>
-                    <a:pt x="0" y="44958"/>
-                  </a:moveTo>
-                  <a:cubicBezTo>
-                    <a:pt x="0" y="20066"/>
-                    <a:pt x="20066" y="0"/>
-                    <a:pt x="44958" y="0"/>
-                  </a:cubicBezTo>
-                  <a:cubicBezTo>
-                    <a:pt x="69850" y="0"/>
-                    <a:pt x="89916" y="20066"/>
-                    <a:pt x="89916" y="44958"/>
-                  </a:cubicBezTo>
-                  <a:cubicBezTo>
-                    <a:pt x="89916" y="69850"/>
-                    <a:pt x="69850" y="89916"/>
-                    <a:pt x="44958" y="89916"/>
-                  </a:cubicBezTo>
-                  <a:cubicBezTo>
-                    <a:pt x="20066" y="89916"/>
-                    <a:pt x="0" y="69850"/>
-                    <a:pt x="0" y="44958"/>
-                  </a:cubicBezTo>
-                  <a:close/>
-                </a:path>
-              </a:pathLst>
-            </a:custGeom>
-            <a:blipFill>
-              <a:blip r:embed="rId10">
-                <a:alphaModFix amt="0"/>
-              </a:blip>
-              <a:stretch>
-                <a:fillRect l="-78303" t="0" r="-78303" b="0"/>
-              </a:stretch>
-            </a:blipFill>
-            <a:ln w="17145" cap="sq">
-              <a:solidFill>
-                <a:srgbClr val="FFFFFF"/>
-              </a:solidFill>
-              <a:prstDash val="solid"/>
-              <a:miter/>
-            </a:ln>
-          </p:spPr>
-        </p:sp>
-      </p:grpSp>
-      <p:sp>
-        <p:nvSpPr>
-          <p:cNvPr name="AutoShape 52" id="52"/>
-          <p:cNvSpPr/>
-          <p:nvPr/>
-        </p:nvSpPr>
-        <p:spPr>
-          <a:xfrm rot="222900">
-            <a:off x="1801330" y="5990958"/>
-            <a:ext cx="274387" cy="0"/>
-          </a:xfrm>
-          <a:prstGeom prst="line">
-            <a:avLst/>
-          </a:prstGeom>
-          <a:ln cap="rnd" w="9525">
-            <a:solidFill>
-              <a:srgbClr val="FFFFFF"/>
-            </a:solidFill>
-            <a:prstDash val="solid"/>
-            <a:headEnd type="none" len="sm" w="sm"/>
-            <a:tailEnd type="none" len="sm" w="sm"/>
-          </a:ln>
-        </p:spPr>
-      </p:sp>
-      <p:grpSp>
-        <p:nvGrpSpPr>
-          <p:cNvPr name="Group 53" id="53"/>
-          <p:cNvGrpSpPr/>
-          <p:nvPr/>
-        </p:nvGrpSpPr>
-        <p:grpSpPr>
-          <a:xfrm rot="0">
-            <a:off x="4581144" y="5413248"/>
-            <a:ext cx="1280160" cy="329184"/>
-            <a:chOff x="0" y="0"/>
-            <a:chExt cx="1706880" cy="438912"/>
-          </a:xfrm>
-        </p:grpSpPr>
-        <p:sp>
-          <p:nvSpPr>
-            <p:cNvPr name="Freeform 54" id="54"/>
-            <p:cNvSpPr/>
-            <p:nvPr/>
-          </p:nvSpPr>
-          <p:spPr>
-            <a:xfrm flipH="false" flipV="false" rot="0">
-              <a:off x="0" y="0"/>
-              <a:ext cx="1706880" cy="438912"/>
-            </a:xfrm>
-            <a:custGeom>
-              <a:avLst/>
-              <a:gdLst/>
-              <a:ahLst/>
-              <a:cxnLst/>
-              <a:rect r="r" b="b" t="t" l="l"/>
-              <a:pathLst>
-                <a:path h="438912" w="1706880">
-                  <a:moveTo>
-                    <a:pt x="0" y="0"/>
-                  </a:moveTo>
-                  <a:lnTo>
-                    <a:pt x="1706880" y="0"/>
-                  </a:lnTo>
-                  <a:lnTo>
-                    <a:pt x="1706880" y="438912"/>
-                  </a:lnTo>
-                  <a:lnTo>
-                    <a:pt x="0" y="438912"/>
-                  </a:lnTo>
-                  <a:close/>
-                </a:path>
-              </a:pathLst>
-            </a:custGeom>
-            <a:blipFill>
-              <a:blip r:embed="rId10">
-                <a:alphaModFix amt="0"/>
-              </a:blip>
-              <a:stretch>
-                <a:fillRect l="0" t="-25775" r="0" b="-25775"/>
-              </a:stretch>
-            </a:blipFill>
-          </p:spPr>
-        </p:sp>
-        <p:sp>
-          <p:nvSpPr>
-            <p:cNvPr name="TextBox 55" id="55"/>
-            <p:cNvSpPr txBox="true"/>
-            <p:nvPr/>
-          </p:nvSpPr>
-          <p:spPr>
-            <a:xfrm>
-              <a:off x="0" y="-9525"/>
-              <a:ext cx="1706880" cy="448437"/>
-            </a:xfrm>
-            <a:prstGeom prst="rect">
-              <a:avLst/>
-            </a:prstGeom>
-          </p:spPr>
-          <p:txBody>
-            <a:bodyPr anchor="ctr" rtlCol="false" tIns="0" lIns="0" bIns="0" rIns="0"/>
-            <a:lstStyle/>
-            <a:p>
-              <a:pPr algn="r">
-                <a:lnSpc>
-                  <a:spcPts val="1584"/>
-                </a:lnSpc>
-              </a:pPr>
-              <a:r>
-                <a:rPr lang="en-US" sz="1320" b="true">
-                  <a:solidFill>
-                    <a:srgbClr val="A95E53"/>
-                  </a:solidFill>
-                  <a:latin typeface="Poppins Bold"/>
-                  <a:ea typeface="Poppins Bold"/>
-                  <a:cs typeface="Poppins Bold"/>
-                  <a:sym typeface="Poppins Bold"/>
-                </a:rPr>
-                <a:t>PAIN 01</a:t>
-              </a:r>
-            </a:p>
-          </p:txBody>
-        </p:sp>
-      </p:grpSp>
-      <p:grpSp>
-        <p:nvGrpSpPr>
-          <p:cNvPr name="Group 56" id="56"/>
-          <p:cNvGrpSpPr/>
-          <p:nvPr/>
-        </p:nvGrpSpPr>
-        <p:grpSpPr>
-          <a:xfrm rot="0">
-            <a:off x="1426464" y="7022592"/>
-            <a:ext cx="4480560" cy="557784"/>
-            <a:chOff x="0" y="0"/>
-            <a:chExt cx="5974080" cy="743712"/>
-          </a:xfrm>
-        </p:grpSpPr>
-        <p:sp>
-          <p:nvSpPr>
-            <p:cNvPr name="Freeform 57" id="57"/>
-            <p:cNvSpPr/>
-            <p:nvPr/>
-          </p:nvSpPr>
-          <p:spPr>
-            <a:xfrm flipH="false" flipV="false" rot="0">
-              <a:off x="0" y="0"/>
-              <a:ext cx="5974079" cy="743712"/>
-            </a:xfrm>
-            <a:custGeom>
-              <a:avLst/>
-              <a:gdLst/>
-              <a:ahLst/>
-              <a:cxnLst/>
-              <a:rect r="r" b="b" t="t" l="l"/>
-              <a:pathLst>
-                <a:path h="743712" w="5974079">
-                  <a:moveTo>
-                    <a:pt x="0" y="0"/>
-                  </a:moveTo>
-                  <a:lnTo>
-                    <a:pt x="5974079" y="0"/>
-                  </a:lnTo>
-                  <a:lnTo>
-                    <a:pt x="5974079" y="743712"/>
-                  </a:lnTo>
-                  <a:lnTo>
-                    <a:pt x="0" y="743712"/>
-                  </a:lnTo>
-                  <a:close/>
-                </a:path>
-              </a:pathLst>
-            </a:custGeom>
-            <a:blipFill>
-              <a:blip r:embed="rId10">
-                <a:alphaModFix amt="0"/>
-              </a:blip>
-              <a:stretch>
-                <a:fillRect l="0" t="-106519" r="0" b="-106519"/>
-              </a:stretch>
-            </a:blipFill>
-          </p:spPr>
-        </p:sp>
-        <p:sp>
-          <p:nvSpPr>
-            <p:cNvPr name="TextBox 58" id="58"/>
-            <p:cNvSpPr txBox="true"/>
-            <p:nvPr/>
-          </p:nvSpPr>
-          <p:spPr>
-            <a:xfrm>
-              <a:off x="0" y="-28575"/>
-              <a:ext cx="5974080" cy="772287"/>
-            </a:xfrm>
-            <a:prstGeom prst="rect">
-              <a:avLst/>
-            </a:prstGeom>
-          </p:spPr>
-          <p:txBody>
-            <a:bodyPr anchor="ctr" rtlCol="false" tIns="0" lIns="0" bIns="0" rIns="0"/>
-            <a:lstStyle/>
-            <a:p>
-              <a:pPr algn="l">
-                <a:lnSpc>
-                  <a:spcPts val="3287"/>
-                </a:lnSpc>
-              </a:pPr>
-              <a:r>
-                <a:rPr lang="en-US" sz="2739" b="true">
-                  <a:solidFill>
-                    <a:srgbClr val="171717"/>
-                  </a:solidFill>
-                  <a:latin typeface="Poppins Bold"/>
-                  <a:ea typeface="Poppins Bold"/>
-                  <a:cs typeface="Poppins Bold"/>
-                  <a:sym typeface="Poppins Bold"/>
-                </a:rPr>
-                <a:t>QUESTIONNAIRES</a:t>
-              </a:r>
-            </a:p>
-          </p:txBody>
-        </p:sp>
-      </p:grpSp>
-      <p:grpSp>
-        <p:nvGrpSpPr>
-          <p:cNvPr name="Group 59" id="59"/>
-          <p:cNvGrpSpPr/>
-          <p:nvPr/>
-        </p:nvGrpSpPr>
-        <p:grpSpPr>
-          <a:xfrm rot="0">
-            <a:off x="1435608" y="7754112"/>
-            <a:ext cx="4462272" cy="448056"/>
-            <a:chOff x="0" y="0"/>
-            <a:chExt cx="5949696" cy="597408"/>
-          </a:xfrm>
-        </p:grpSpPr>
-        <p:sp>
-          <p:nvSpPr>
-            <p:cNvPr name="Freeform 60" id="60"/>
-            <p:cNvSpPr/>
-            <p:nvPr/>
-          </p:nvSpPr>
-          <p:spPr>
-            <a:xfrm flipH="false" flipV="false" rot="0">
-              <a:off x="0" y="0"/>
-              <a:ext cx="5949696" cy="597408"/>
-            </a:xfrm>
-            <a:custGeom>
-              <a:avLst/>
-              <a:gdLst/>
-              <a:ahLst/>
-              <a:cxnLst/>
-              <a:rect r="r" b="b" t="t" l="l"/>
-              <a:pathLst>
-                <a:path h="597408" w="5949696">
-                  <a:moveTo>
-                    <a:pt x="0" y="0"/>
-                  </a:moveTo>
-                  <a:lnTo>
-                    <a:pt x="5949696" y="0"/>
-                  </a:lnTo>
-                  <a:lnTo>
-                    <a:pt x="5949696" y="597408"/>
-                  </a:lnTo>
-                  <a:lnTo>
-                    <a:pt x="0" y="597408"/>
-                  </a:lnTo>
-                  <a:close/>
-                </a:path>
-              </a:pathLst>
-            </a:custGeom>
-            <a:blipFill>
-              <a:blip r:embed="rId10">
-                <a:alphaModFix amt="0"/>
-              </a:blip>
-              <a:stretch>
-                <a:fillRect l="0" t="-144055" r="0" b="-144055"/>
-              </a:stretch>
-            </a:blipFill>
-          </p:spPr>
-        </p:sp>
-        <p:sp>
-          <p:nvSpPr>
-            <p:cNvPr name="TextBox 61" id="61"/>
-            <p:cNvSpPr txBox="true"/>
-            <p:nvPr/>
-          </p:nvSpPr>
-          <p:spPr>
-            <a:xfrm>
-              <a:off x="0" y="-19050"/>
-              <a:ext cx="5949696" cy="616458"/>
-            </a:xfrm>
-            <a:prstGeom prst="rect">
-              <a:avLst/>
-            </a:prstGeom>
-          </p:spPr>
-          <p:txBody>
-            <a:bodyPr anchor="ctr" rtlCol="false" tIns="0" lIns="0" bIns="0" rIns="0"/>
-            <a:lstStyle/>
-            <a:p>
-              <a:pPr algn="l">
-                <a:lnSpc>
-                  <a:spcPts val="2459"/>
-                </a:lnSpc>
-              </a:pPr>
-              <a:r>
-                <a:rPr lang="en-US" sz="2049">
-                  <a:solidFill>
-                    <a:srgbClr val="56636A"/>
-                  </a:solidFill>
-                  <a:latin typeface="Poppins"/>
-                  <a:ea typeface="Poppins"/>
-                  <a:cs typeface="Poppins"/>
-                  <a:sym typeface="Poppins"/>
-                </a:rPr>
-                <a:t>Answers from memory</a:t>
-              </a:r>
-            </a:p>
-          </p:txBody>
-        </p:sp>
-      </p:grpSp>
-      <p:grpSp>
-        <p:nvGrpSpPr>
-          <p:cNvPr name="Group 62" id="62"/>
-          <p:cNvGrpSpPr/>
-          <p:nvPr/>
-        </p:nvGrpSpPr>
-        <p:grpSpPr>
-          <a:xfrm rot="0">
-            <a:off x="6604444" y="5049964"/>
-            <a:ext cx="5207127" cy="3579495"/>
-            <a:chOff x="0" y="0"/>
-            <a:chExt cx="6942836" cy="4772660"/>
-          </a:xfrm>
-        </p:grpSpPr>
-        <p:sp>
-          <p:nvSpPr>
-            <p:cNvPr name="Freeform 63" id="63"/>
-            <p:cNvSpPr/>
-            <p:nvPr/>
-          </p:nvSpPr>
-          <p:spPr>
-            <a:xfrm flipH="false" flipV="false" rot="0">
-              <a:off x="0" y="0"/>
-              <a:ext cx="6942836" cy="4772660"/>
-            </a:xfrm>
-            <a:custGeom>
-              <a:avLst/>
-              <a:gdLst/>
-              <a:ahLst/>
-              <a:cxnLst/>
-              <a:rect r="r" b="b" t="t" l="l"/>
-              <a:pathLst>
-                <a:path h="4772660" w="6942836">
-                  <a:moveTo>
-                    <a:pt x="0" y="715899"/>
-                  </a:moveTo>
-                  <a:cubicBezTo>
-                    <a:pt x="0" y="320548"/>
-                    <a:pt x="320548" y="0"/>
-                    <a:pt x="715899" y="0"/>
-                  </a:cubicBezTo>
-                  <a:lnTo>
-                    <a:pt x="6226937" y="0"/>
-                  </a:lnTo>
-                  <a:cubicBezTo>
-                    <a:pt x="6622288" y="0"/>
-                    <a:pt x="6942836" y="320548"/>
-                    <a:pt x="6942836" y="715899"/>
-                  </a:cubicBezTo>
-                  <a:lnTo>
-                    <a:pt x="6942836" y="4056761"/>
-                  </a:lnTo>
-                  <a:cubicBezTo>
-                    <a:pt x="6942836" y="4452112"/>
-                    <a:pt x="6622288" y="4772660"/>
-                    <a:pt x="6226937" y="4772660"/>
-                  </a:cubicBezTo>
-                  <a:lnTo>
-                    <a:pt x="715899" y="4772660"/>
-                  </a:lnTo>
-                  <a:cubicBezTo>
-                    <a:pt x="320548" y="4772660"/>
-                    <a:pt x="0" y="4452112"/>
-                    <a:pt x="0" y="4056761"/>
-                  </a:cubicBezTo>
-                  <a:close/>
-                </a:path>
-              </a:pathLst>
-            </a:custGeom>
-            <a:solidFill>
-              <a:srgbClr val="FFFFFF"/>
-            </a:solidFill>
-            <a:ln w="13335" cap="sq">
-              <a:solidFill>
-                <a:srgbClr val="DDE6E7"/>
-              </a:solidFill>
-              <a:prstDash val="solid"/>
-              <a:miter/>
-            </a:ln>
-          </p:spPr>
-        </p:sp>
-      </p:grpSp>
-      <p:grpSp>
-        <p:nvGrpSpPr>
-          <p:cNvPr name="Group 64" id="64"/>
-          <p:cNvGrpSpPr/>
-          <p:nvPr/>
-        </p:nvGrpSpPr>
-        <p:grpSpPr>
-          <a:xfrm rot="0">
-            <a:off x="6622999" y="5068519"/>
-            <a:ext cx="5170018" cy="1490472"/>
-            <a:chOff x="0" y="0"/>
-            <a:chExt cx="6893357" cy="1987296"/>
-          </a:xfrm>
-        </p:grpSpPr>
-        <p:sp>
-          <p:nvSpPr>
-            <p:cNvPr name="Freeform 65" id="65"/>
-            <p:cNvSpPr/>
-            <p:nvPr/>
-          </p:nvSpPr>
-          <p:spPr>
-            <a:xfrm flipH="false" flipV="false" rot="0">
-              <a:off x="0" y="0"/>
-              <a:ext cx="6893306" cy="1987169"/>
-            </a:xfrm>
-            <a:custGeom>
-              <a:avLst/>
-              <a:gdLst/>
-              <a:ahLst/>
-              <a:cxnLst/>
-              <a:rect r="r" b="b" t="t" l="l"/>
-              <a:pathLst>
-                <a:path h="1987169" w="6893306">
-                  <a:moveTo>
-                    <a:pt x="0" y="715391"/>
-                  </a:moveTo>
-                  <a:cubicBezTo>
-                    <a:pt x="0" y="320294"/>
-                    <a:pt x="320294" y="0"/>
-                    <a:pt x="715391" y="0"/>
-                  </a:cubicBezTo>
-                  <a:lnTo>
-                    <a:pt x="6177915" y="0"/>
-                  </a:lnTo>
-                  <a:cubicBezTo>
-                    <a:pt x="6573012" y="0"/>
-                    <a:pt x="6893306" y="320294"/>
-                    <a:pt x="6893306" y="715391"/>
-                  </a:cubicBezTo>
-                  <a:lnTo>
-                    <a:pt x="6893306" y="1271778"/>
-                  </a:lnTo>
-                  <a:cubicBezTo>
-                    <a:pt x="6893306" y="1666875"/>
-                    <a:pt x="6573012" y="1987169"/>
-                    <a:pt x="6177915" y="1987169"/>
-                  </a:cubicBezTo>
-                  <a:lnTo>
-                    <a:pt x="715391" y="1987169"/>
-                  </a:lnTo>
-                  <a:cubicBezTo>
-                    <a:pt x="320294" y="1987296"/>
-                    <a:pt x="0" y="1667002"/>
-                    <a:pt x="0" y="1271905"/>
-                  </a:cubicBezTo>
-                  <a:close/>
-                </a:path>
-              </a:pathLst>
-            </a:custGeom>
-            <a:solidFill>
-              <a:srgbClr val="F6EDEA"/>
-            </a:solidFill>
-          </p:spPr>
-        </p:sp>
-      </p:grpSp>
-      <p:grpSp>
-        <p:nvGrpSpPr>
-          <p:cNvPr name="Group 66" id="66"/>
-          <p:cNvGrpSpPr/>
-          <p:nvPr/>
-        </p:nvGrpSpPr>
-        <p:grpSpPr>
-          <a:xfrm rot="0">
-            <a:off x="6622999" y="6099048"/>
-            <a:ext cx="5170018" cy="475488"/>
-            <a:chOff x="0" y="0"/>
-            <a:chExt cx="6893357" cy="633984"/>
-          </a:xfrm>
-        </p:grpSpPr>
-        <p:sp>
-          <p:nvSpPr>
-            <p:cNvPr name="Freeform 67" id="67"/>
-            <p:cNvSpPr/>
-            <p:nvPr/>
-          </p:nvSpPr>
-          <p:spPr>
-            <a:xfrm flipH="false" flipV="false" rot="0">
-              <a:off x="0" y="0"/>
-              <a:ext cx="6893306" cy="633984"/>
-            </a:xfrm>
-            <a:custGeom>
-              <a:avLst/>
-              <a:gdLst/>
-              <a:ahLst/>
-              <a:cxnLst/>
-              <a:rect r="r" b="b" t="t" l="l"/>
-              <a:pathLst>
-                <a:path h="633984" w="6893306">
-                  <a:moveTo>
-                    <a:pt x="0" y="0"/>
-                  </a:moveTo>
-                  <a:lnTo>
-                    <a:pt x="6893306" y="0"/>
-                  </a:lnTo>
-                  <a:lnTo>
-                    <a:pt x="6893306" y="633984"/>
-                  </a:lnTo>
-                  <a:lnTo>
-                    <a:pt x="0" y="633984"/>
-                  </a:lnTo>
-                  <a:close/>
-                </a:path>
-              </a:pathLst>
-            </a:custGeom>
-            <a:solidFill>
-              <a:srgbClr val="F6EDEA"/>
-            </a:solidFill>
-          </p:spPr>
-        </p:sp>
-      </p:grpSp>
-      <p:sp>
-        <p:nvSpPr>
-          <p:cNvPr name="AutoShape 68" id="68"/>
-          <p:cNvSpPr/>
-          <p:nvPr/>
-        </p:nvSpPr>
-        <p:spPr>
-          <a:xfrm rot="6780">
-            <a:off x="6633458" y="6569774"/>
-            <a:ext cx="5149101" cy="0"/>
-          </a:xfrm>
-          <a:prstGeom prst="line">
-            <a:avLst/>
-          </a:prstGeom>
-          <a:ln cap="rnd" w="9525">
-            <a:solidFill>
-              <a:srgbClr val="DFE8E8"/>
-            </a:solidFill>
-            <a:prstDash val="solid"/>
-            <a:headEnd type="none" len="sm" w="sm"/>
-            <a:tailEnd type="none" len="sm" w="sm"/>
-          </a:ln>
-        </p:spPr>
-      </p:sp>
-      <p:grpSp>
-        <p:nvGrpSpPr>
-          <p:cNvPr name="Group 69" id="69"/>
-          <p:cNvGrpSpPr/>
-          <p:nvPr/>
-        </p:nvGrpSpPr>
-        <p:grpSpPr>
-          <a:xfrm rot="0">
-            <a:off x="6940296" y="5330952"/>
-            <a:ext cx="1051560" cy="1051560"/>
-            <a:chOff x="0" y="0"/>
-            <a:chExt cx="1402080" cy="1402080"/>
-          </a:xfrm>
-        </p:grpSpPr>
-        <p:sp>
-          <p:nvSpPr>
-            <p:cNvPr name="Freeform 70" id="70"/>
-            <p:cNvSpPr/>
-            <p:nvPr/>
-          </p:nvSpPr>
-          <p:spPr>
-            <a:xfrm flipH="false" flipV="false" rot="0">
-              <a:off x="0" y="0"/>
-              <a:ext cx="1402080" cy="1402080"/>
-            </a:xfrm>
-            <a:custGeom>
-              <a:avLst/>
-              <a:gdLst/>
-              <a:ahLst/>
-              <a:cxnLst/>
-              <a:rect r="r" b="b" t="t" l="l"/>
-              <a:pathLst>
-                <a:path h="1402080" w="1402080">
-                  <a:moveTo>
-                    <a:pt x="0" y="701040"/>
-                  </a:moveTo>
-                  <a:cubicBezTo>
-                    <a:pt x="0" y="313817"/>
-                    <a:pt x="313817" y="0"/>
-                    <a:pt x="701040" y="0"/>
-                  </a:cubicBezTo>
-                  <a:cubicBezTo>
-                    <a:pt x="1088263" y="0"/>
-                    <a:pt x="1402080" y="313817"/>
-                    <a:pt x="1402080" y="701040"/>
-                  </a:cubicBezTo>
-                  <a:cubicBezTo>
-                    <a:pt x="1402080" y="1088263"/>
-                    <a:pt x="1088263" y="1402080"/>
-                    <a:pt x="701040" y="1402080"/>
-                  </a:cubicBezTo>
-                  <a:cubicBezTo>
-                    <a:pt x="313817" y="1402080"/>
-                    <a:pt x="0" y="1088263"/>
-                    <a:pt x="0" y="701040"/>
-                  </a:cubicBezTo>
-                  <a:close/>
-                </a:path>
-              </a:pathLst>
-            </a:custGeom>
-            <a:solidFill>
-              <a:srgbClr val="A95E53"/>
-            </a:solidFill>
-          </p:spPr>
-        </p:sp>
-      </p:grpSp>
-      <p:grpSp>
-        <p:nvGrpSpPr>
-          <p:cNvPr name="Group 71" id="71"/>
-          <p:cNvGrpSpPr/>
-          <p:nvPr/>
-        </p:nvGrpSpPr>
-        <p:grpSpPr>
-          <a:xfrm rot="0">
-            <a:off x="7128767" y="5473703"/>
-            <a:ext cx="574043" cy="674627"/>
-            <a:chOff x="0" y="0"/>
-            <a:chExt cx="765391" cy="899503"/>
-          </a:xfrm>
-        </p:grpSpPr>
-        <p:sp>
-          <p:nvSpPr>
-            <p:cNvPr name="Freeform 72" id="72"/>
-            <p:cNvSpPr/>
-            <p:nvPr/>
-          </p:nvSpPr>
-          <p:spPr>
-            <a:xfrm flipH="false" flipV="false" rot="0">
-              <a:off x="0" y="0"/>
-              <a:ext cx="765429" cy="899541"/>
-            </a:xfrm>
-            <a:custGeom>
-              <a:avLst/>
-              <a:gdLst/>
-              <a:ahLst/>
-              <a:cxnLst/>
-              <a:rect r="r" b="b" t="t" l="l"/>
-              <a:pathLst>
-                <a:path h="899541" w="765429">
-                  <a:moveTo>
-                    <a:pt x="0" y="114808"/>
-                  </a:moveTo>
-                  <a:cubicBezTo>
-                    <a:pt x="0" y="51435"/>
-                    <a:pt x="51435" y="0"/>
-                    <a:pt x="114808" y="0"/>
-                  </a:cubicBezTo>
-                  <a:lnTo>
-                    <a:pt x="650621" y="0"/>
-                  </a:lnTo>
-                  <a:cubicBezTo>
-                    <a:pt x="713994" y="0"/>
-                    <a:pt x="765429" y="51435"/>
-                    <a:pt x="765429" y="114808"/>
-                  </a:cubicBezTo>
-                  <a:lnTo>
-                    <a:pt x="765429" y="784733"/>
-                  </a:lnTo>
-                  <a:cubicBezTo>
-                    <a:pt x="765429" y="848106"/>
-                    <a:pt x="713994" y="899541"/>
-                    <a:pt x="650621" y="899541"/>
-                  </a:cubicBezTo>
-                  <a:lnTo>
-                    <a:pt x="114808" y="899541"/>
-                  </a:lnTo>
-                  <a:cubicBezTo>
-                    <a:pt x="51435" y="899541"/>
-                    <a:pt x="0" y="848106"/>
-                    <a:pt x="0" y="784733"/>
-                  </a:cubicBezTo>
-                  <a:close/>
-                </a:path>
-              </a:pathLst>
-            </a:custGeom>
-            <a:solidFill>
-              <a:srgbClr val="A95E53"/>
-            </a:solidFill>
-            <a:ln w="25400" cap="sq">
-              <a:solidFill>
-                <a:srgbClr val="FFFFFF"/>
-              </a:solidFill>
-              <a:prstDash val="solid"/>
-              <a:miter/>
-            </a:ln>
-          </p:spPr>
-        </p:sp>
-      </p:grpSp>
-      <p:sp>
-        <p:nvSpPr>
-          <p:cNvPr name="AutoShape 73" id="73"/>
-          <p:cNvSpPr/>
-          <p:nvPr/>
-        </p:nvSpPr>
-        <p:spPr>
-          <a:xfrm rot="196680">
-            <a:off x="7223760" y="5664518"/>
-            <a:ext cx="310896" cy="0"/>
-          </a:xfrm>
-          <a:prstGeom prst="line">
-            <a:avLst/>
-          </a:prstGeom>
-          <a:ln cap="rnd" w="9525">
-            <a:solidFill>
-              <a:srgbClr val="FFFFFF"/>
-            </a:solidFill>
-            <a:prstDash val="solid"/>
-            <a:headEnd type="none" len="sm" w="sm"/>
-            <a:tailEnd type="none" len="sm" w="sm"/>
-          </a:ln>
-        </p:spPr>
-      </p:sp>
-      <p:sp>
-        <p:nvSpPr>
-          <p:cNvPr name="AutoShape 74" id="74"/>
-          <p:cNvSpPr/>
-          <p:nvPr/>
-        </p:nvSpPr>
-        <p:spPr>
-          <a:xfrm rot="247680">
-            <a:off x="7223693" y="5765102"/>
-            <a:ext cx="247021" cy="0"/>
-          </a:xfrm>
-          <a:prstGeom prst="line">
-            <a:avLst/>
-          </a:prstGeom>
-          <a:ln cap="rnd" w="9525">
-            <a:solidFill>
-              <a:srgbClr val="FFFFFF"/>
-            </a:solidFill>
-            <a:prstDash val="solid"/>
-            <a:headEnd type="none" len="sm" w="sm"/>
-            <a:tailEnd type="none" len="sm" w="sm"/>
-          </a:ln>
-        </p:spPr>
-      </p:sp>
-      <p:grpSp>
-        <p:nvGrpSpPr>
-          <p:cNvPr name="Group 75" id="75"/>
-          <p:cNvGrpSpPr/>
-          <p:nvPr/>
-        </p:nvGrpSpPr>
-        <p:grpSpPr>
-          <a:xfrm rot="0">
-            <a:off x="7356729" y="5802249"/>
-            <a:ext cx="410718" cy="410718"/>
-            <a:chOff x="0" y="0"/>
-            <a:chExt cx="547624" cy="547624"/>
-          </a:xfrm>
-        </p:grpSpPr>
-        <p:sp>
-          <p:nvSpPr>
-            <p:cNvPr name="Freeform 76" id="76"/>
-            <p:cNvSpPr/>
-            <p:nvPr/>
-          </p:nvSpPr>
-          <p:spPr>
-            <a:xfrm flipH="false" flipV="false" rot="0">
-              <a:off x="0" y="0"/>
-              <a:ext cx="547624" cy="547624"/>
-            </a:xfrm>
-            <a:custGeom>
-              <a:avLst/>
-              <a:gdLst/>
-              <a:ahLst/>
-              <a:cxnLst/>
-              <a:rect r="r" b="b" t="t" l="l"/>
-              <a:pathLst>
-                <a:path h="547624" w="547624">
-                  <a:moveTo>
-                    <a:pt x="0" y="273812"/>
-                  </a:moveTo>
-                  <a:cubicBezTo>
-                    <a:pt x="0" y="122555"/>
-                    <a:pt x="122555" y="0"/>
-                    <a:pt x="273812" y="0"/>
-                  </a:cubicBezTo>
-                  <a:cubicBezTo>
-                    <a:pt x="425069" y="0"/>
-                    <a:pt x="547624" y="122555"/>
-                    <a:pt x="547624" y="273812"/>
-                  </a:cubicBezTo>
-                  <a:cubicBezTo>
-                    <a:pt x="547624" y="425069"/>
-                    <a:pt x="425069" y="547624"/>
-                    <a:pt x="273812" y="547624"/>
-                  </a:cubicBezTo>
-                  <a:cubicBezTo>
-                    <a:pt x="122555" y="547624"/>
-                    <a:pt x="0" y="425069"/>
-                    <a:pt x="0" y="273812"/>
-                  </a:cubicBezTo>
-                  <a:close/>
-                </a:path>
-              </a:pathLst>
-            </a:custGeom>
-            <a:solidFill>
-              <a:srgbClr val="A95E53"/>
-            </a:solidFill>
-            <a:ln w="26670" cap="sq">
-              <a:solidFill>
-                <a:srgbClr val="FFFFFF"/>
-              </a:solidFill>
-              <a:prstDash val="solid"/>
-              <a:miter/>
-            </a:ln>
-          </p:spPr>
-        </p:sp>
-      </p:grpSp>
-      <p:sp>
-        <p:nvSpPr>
-          <p:cNvPr name="AutoShape 77" id="77"/>
-          <p:cNvSpPr/>
-          <p:nvPr/>
-        </p:nvSpPr>
-        <p:spPr>
-          <a:xfrm rot="4850280">
-            <a:off x="7490308" y="5947791"/>
-            <a:ext cx="143561" cy="0"/>
-          </a:xfrm>
-          <a:prstGeom prst="line">
-            <a:avLst/>
-          </a:prstGeom>
-          <a:ln cap="rnd" w="19050">
-            <a:solidFill>
-              <a:srgbClr val="FFFFFF"/>
-            </a:solidFill>
-            <a:prstDash val="solid"/>
-            <a:headEnd type="none" len="sm" w="sm"/>
-            <a:tailEnd type="none" len="sm" w="sm"/>
-          </a:ln>
-        </p:spPr>
-      </p:sp>
-      <p:sp>
-        <p:nvSpPr>
-          <p:cNvPr name="AutoShape 78" id="78"/>
-          <p:cNvSpPr/>
-          <p:nvPr/>
-        </p:nvSpPr>
-        <p:spPr>
-          <a:xfrm rot="1857840">
-            <a:off x="7541162" y="6030087"/>
-            <a:ext cx="133293" cy="0"/>
-          </a:xfrm>
-          <a:prstGeom prst="line">
-            <a:avLst/>
-          </a:prstGeom>
-          <a:ln cap="rnd" w="19050">
-            <a:solidFill>
-              <a:srgbClr val="FFFFFF"/>
-            </a:solidFill>
-            <a:prstDash val="solid"/>
-            <a:headEnd type="none" len="sm" w="sm"/>
-            <a:tailEnd type="none" len="sm" w="sm"/>
-          </a:ln>
-        </p:spPr>
-      </p:sp>
-      <p:grpSp>
-        <p:nvGrpSpPr>
-          <p:cNvPr name="Group 79" id="79"/>
-          <p:cNvGrpSpPr/>
-          <p:nvPr/>
-        </p:nvGrpSpPr>
-        <p:grpSpPr>
-          <a:xfrm rot="0">
-            <a:off x="10122408" y="5413248"/>
-            <a:ext cx="1280160" cy="329184"/>
-            <a:chOff x="0" y="0"/>
-            <a:chExt cx="1706880" cy="438912"/>
-          </a:xfrm>
-        </p:grpSpPr>
-        <p:sp>
-          <p:nvSpPr>
-            <p:cNvPr name="Freeform 80" id="80"/>
-            <p:cNvSpPr/>
-            <p:nvPr/>
-          </p:nvSpPr>
-          <p:spPr>
-            <a:xfrm flipH="false" flipV="false" rot="0">
-              <a:off x="0" y="0"/>
-              <a:ext cx="1706880" cy="438912"/>
-            </a:xfrm>
-            <a:custGeom>
-              <a:avLst/>
-              <a:gdLst/>
-              <a:ahLst/>
-              <a:cxnLst/>
-              <a:rect r="r" b="b" t="t" l="l"/>
-              <a:pathLst>
-                <a:path h="438912" w="1706880">
-                  <a:moveTo>
-                    <a:pt x="0" y="0"/>
-                  </a:moveTo>
-                  <a:lnTo>
-                    <a:pt x="1706880" y="0"/>
-                  </a:lnTo>
-                  <a:lnTo>
-                    <a:pt x="1706880" y="438912"/>
-                  </a:lnTo>
-                  <a:lnTo>
-                    <a:pt x="0" y="438912"/>
-                  </a:lnTo>
-                  <a:close/>
-                </a:path>
-              </a:pathLst>
-            </a:custGeom>
-            <a:blipFill>
-              <a:blip r:embed="rId10">
-                <a:alphaModFix amt="0"/>
-              </a:blip>
-              <a:stretch>
-                <a:fillRect l="0" t="-25775" r="0" b="-25775"/>
-              </a:stretch>
-            </a:blipFill>
-          </p:spPr>
-        </p:sp>
-        <p:sp>
-          <p:nvSpPr>
-            <p:cNvPr name="TextBox 81" id="81"/>
-            <p:cNvSpPr txBox="true"/>
-            <p:nvPr/>
-          </p:nvSpPr>
-          <p:spPr>
-            <a:xfrm>
-              <a:off x="0" y="-9525"/>
-              <a:ext cx="1706880" cy="448437"/>
-            </a:xfrm>
-            <a:prstGeom prst="rect">
-              <a:avLst/>
-            </a:prstGeom>
-          </p:spPr>
-          <p:txBody>
-            <a:bodyPr anchor="ctr" rtlCol="false" tIns="0" lIns="0" bIns="0" rIns="0"/>
-            <a:lstStyle/>
-            <a:p>
-              <a:pPr algn="r">
-                <a:lnSpc>
-                  <a:spcPts val="1584"/>
-                </a:lnSpc>
-              </a:pPr>
-              <a:r>
-                <a:rPr lang="en-US" sz="1320" b="true">
-                  <a:solidFill>
-                    <a:srgbClr val="A95E53"/>
-                  </a:solidFill>
-                  <a:latin typeface="Poppins Bold"/>
-                  <a:ea typeface="Poppins Bold"/>
-                  <a:cs typeface="Poppins Bold"/>
-                  <a:sym typeface="Poppins Bold"/>
-                </a:rPr>
-                <a:t>PAIN 02</a:t>
-              </a:r>
-            </a:p>
-          </p:txBody>
-        </p:sp>
-      </p:grpSp>
-      <p:grpSp>
-        <p:nvGrpSpPr>
-          <p:cNvPr name="Group 82" id="82"/>
-          <p:cNvGrpSpPr/>
-          <p:nvPr/>
-        </p:nvGrpSpPr>
-        <p:grpSpPr>
-          <a:xfrm rot="0">
-            <a:off x="6967728" y="7022592"/>
-            <a:ext cx="4480560" cy="557784"/>
-            <a:chOff x="0" y="0"/>
-            <a:chExt cx="5974080" cy="743712"/>
-          </a:xfrm>
-        </p:grpSpPr>
-        <p:sp>
-          <p:nvSpPr>
-            <p:cNvPr name="Freeform 83" id="83"/>
-            <p:cNvSpPr/>
-            <p:nvPr/>
-          </p:nvSpPr>
-          <p:spPr>
-            <a:xfrm flipH="false" flipV="false" rot="0">
-              <a:off x="0" y="0"/>
-              <a:ext cx="5974079" cy="743712"/>
-            </a:xfrm>
-            <a:custGeom>
-              <a:avLst/>
-              <a:gdLst/>
-              <a:ahLst/>
-              <a:cxnLst/>
-              <a:rect r="r" b="b" t="t" l="l"/>
-              <a:pathLst>
-                <a:path h="743712" w="5974079">
-                  <a:moveTo>
-                    <a:pt x="0" y="0"/>
-                  </a:moveTo>
-                  <a:lnTo>
-                    <a:pt x="5974079" y="0"/>
-                  </a:lnTo>
-                  <a:lnTo>
-                    <a:pt x="5974079" y="743712"/>
-                  </a:lnTo>
-                  <a:lnTo>
-                    <a:pt x="0" y="743712"/>
-                  </a:lnTo>
-                  <a:close/>
-                </a:path>
-              </a:pathLst>
-            </a:custGeom>
-            <a:blipFill>
-              <a:blip r:embed="rId10">
-                <a:alphaModFix amt="0"/>
-              </a:blip>
-              <a:stretch>
-                <a:fillRect l="0" t="-106519" r="0" b="-106519"/>
-              </a:stretch>
-            </a:blipFill>
-          </p:spPr>
-        </p:sp>
-        <p:sp>
-          <p:nvSpPr>
-            <p:cNvPr name="TextBox 84" id="84"/>
-            <p:cNvSpPr txBox="true"/>
-            <p:nvPr/>
-          </p:nvSpPr>
-          <p:spPr>
-            <a:xfrm>
-              <a:off x="0" y="-28575"/>
-              <a:ext cx="5974080" cy="772287"/>
-            </a:xfrm>
-            <a:prstGeom prst="rect">
-              <a:avLst/>
-            </a:prstGeom>
-          </p:spPr>
-          <p:txBody>
-            <a:bodyPr anchor="ctr" rtlCol="false" tIns="0" lIns="0" bIns="0" rIns="0"/>
-            <a:lstStyle/>
-            <a:p>
-              <a:pPr algn="l">
-                <a:lnSpc>
-                  <a:spcPts val="3287"/>
-                </a:lnSpc>
-              </a:pPr>
-              <a:r>
-                <a:rPr lang="en-US" sz="2739" b="true">
-                  <a:solidFill>
-                    <a:srgbClr val="171717"/>
-                  </a:solidFill>
-                  <a:latin typeface="Poppins Bold"/>
-                  <a:ea typeface="Poppins Bold"/>
-                  <a:cs typeface="Poppins Bold"/>
-                  <a:sym typeface="Poppins Bold"/>
-                </a:rPr>
-                <a:t>STALE EVIDENCE</a:t>
-              </a:r>
-            </a:p>
-          </p:txBody>
-        </p:sp>
-      </p:grpSp>
-      <p:grpSp>
-        <p:nvGrpSpPr>
-          <p:cNvPr name="Group 85" id="85"/>
-          <p:cNvGrpSpPr/>
-          <p:nvPr/>
-        </p:nvGrpSpPr>
-        <p:grpSpPr>
-          <a:xfrm rot="0">
-            <a:off x="6976872" y="7754112"/>
-            <a:ext cx="4462272" cy="448056"/>
-            <a:chOff x="0" y="0"/>
-            <a:chExt cx="5949696" cy="597408"/>
-          </a:xfrm>
-        </p:grpSpPr>
-        <p:sp>
-          <p:nvSpPr>
-            <p:cNvPr name="Freeform 86" id="86"/>
-            <p:cNvSpPr/>
-            <p:nvPr/>
-          </p:nvSpPr>
-          <p:spPr>
-            <a:xfrm flipH="false" flipV="false" rot="0">
-              <a:off x="0" y="0"/>
-              <a:ext cx="5949696" cy="597408"/>
-            </a:xfrm>
-            <a:custGeom>
-              <a:avLst/>
-              <a:gdLst/>
-              <a:ahLst/>
-              <a:cxnLst/>
-              <a:rect r="r" b="b" t="t" l="l"/>
-              <a:pathLst>
-                <a:path h="597408" w="5949696">
-                  <a:moveTo>
-                    <a:pt x="0" y="0"/>
-                  </a:moveTo>
-                  <a:lnTo>
-                    <a:pt x="5949696" y="0"/>
-                  </a:lnTo>
-                  <a:lnTo>
-                    <a:pt x="5949696" y="597408"/>
-                  </a:lnTo>
-                  <a:lnTo>
-                    <a:pt x="0" y="597408"/>
-                  </a:lnTo>
-                  <a:close/>
-                </a:path>
-              </a:pathLst>
-            </a:custGeom>
-            <a:blipFill>
-              <a:blip r:embed="rId10">
-                <a:alphaModFix amt="0"/>
-              </a:blip>
-              <a:stretch>
-                <a:fillRect l="0" t="-144055" r="0" b="-144055"/>
-              </a:stretch>
-            </a:blipFill>
-          </p:spPr>
-        </p:sp>
-        <p:sp>
-          <p:nvSpPr>
-            <p:cNvPr name="TextBox 87" id="87"/>
-            <p:cNvSpPr txBox="true"/>
-            <p:nvPr/>
-          </p:nvSpPr>
-          <p:spPr>
-            <a:xfrm>
-              <a:off x="0" y="-19050"/>
-              <a:ext cx="5949696" cy="616458"/>
-            </a:xfrm>
-            <a:prstGeom prst="rect">
-              <a:avLst/>
-            </a:prstGeom>
-          </p:spPr>
-          <p:txBody>
-            <a:bodyPr anchor="ctr" rtlCol="false" tIns="0" lIns="0" bIns="0" rIns="0"/>
-            <a:lstStyle/>
-            <a:p>
-              <a:pPr algn="l">
-                <a:lnSpc>
-                  <a:spcPts val="2459"/>
-                </a:lnSpc>
-              </a:pPr>
-              <a:r>
-                <a:rPr lang="en-US" sz="2049">
-                  <a:solidFill>
-                    <a:srgbClr val="56636A"/>
-                  </a:solidFill>
-                  <a:latin typeface="Poppins"/>
-                  <a:ea typeface="Poppins"/>
-                  <a:cs typeface="Poppins"/>
-                  <a:sym typeface="Poppins"/>
-                </a:rPr>
-                <a:t>Gaps go unseen</a:t>
-              </a:r>
-            </a:p>
-          </p:txBody>
-        </p:sp>
-      </p:grpSp>
-      <p:grpSp>
-        <p:nvGrpSpPr>
-          <p:cNvPr name="Group 88" id="88"/>
-          <p:cNvGrpSpPr/>
-          <p:nvPr/>
-        </p:nvGrpSpPr>
-        <p:grpSpPr>
-          <a:xfrm rot="0">
-            <a:off x="12145708" y="5049964"/>
-            <a:ext cx="5207127" cy="3579495"/>
-            <a:chOff x="0" y="0"/>
-            <a:chExt cx="6942836" cy="4772660"/>
-          </a:xfrm>
-        </p:grpSpPr>
-        <p:sp>
-          <p:nvSpPr>
-            <p:cNvPr name="Freeform 89" id="89"/>
-            <p:cNvSpPr/>
-            <p:nvPr/>
-          </p:nvSpPr>
-          <p:spPr>
-            <a:xfrm flipH="false" flipV="false" rot="0">
-              <a:off x="0" y="0"/>
-              <a:ext cx="6942836" cy="4772660"/>
-            </a:xfrm>
-            <a:custGeom>
-              <a:avLst/>
-              <a:gdLst/>
-              <a:ahLst/>
-              <a:cxnLst/>
-              <a:rect r="r" b="b" t="t" l="l"/>
-              <a:pathLst>
-                <a:path h="4772660" w="6942836">
-                  <a:moveTo>
-                    <a:pt x="0" y="715899"/>
-                  </a:moveTo>
-                  <a:cubicBezTo>
-                    <a:pt x="0" y="320548"/>
-                    <a:pt x="320548" y="0"/>
-                    <a:pt x="715899" y="0"/>
-                  </a:cubicBezTo>
-                  <a:lnTo>
-                    <a:pt x="6226937" y="0"/>
-                  </a:lnTo>
-                  <a:cubicBezTo>
-                    <a:pt x="6622288" y="0"/>
-                    <a:pt x="6942836" y="320548"/>
-                    <a:pt x="6942836" y="715899"/>
-                  </a:cubicBezTo>
-                  <a:lnTo>
-                    <a:pt x="6942836" y="4056761"/>
-                  </a:lnTo>
-                  <a:cubicBezTo>
-                    <a:pt x="6942836" y="4452112"/>
-                    <a:pt x="6622288" y="4772660"/>
-                    <a:pt x="6226937" y="4772660"/>
-                  </a:cubicBezTo>
-                  <a:lnTo>
-                    <a:pt x="715899" y="4772660"/>
-                  </a:lnTo>
-                  <a:cubicBezTo>
-                    <a:pt x="320548" y="4772660"/>
-                    <a:pt x="0" y="4452112"/>
-                    <a:pt x="0" y="4056761"/>
-                  </a:cubicBezTo>
-                  <a:close/>
-                </a:path>
-              </a:pathLst>
-            </a:custGeom>
-            <a:solidFill>
-              <a:srgbClr val="FFFFFF"/>
-            </a:solidFill>
-            <a:ln w="13335" cap="sq">
-              <a:solidFill>
-                <a:srgbClr val="DDE6E7"/>
-              </a:solidFill>
-              <a:prstDash val="solid"/>
-              <a:miter/>
-            </a:ln>
-          </p:spPr>
-        </p:sp>
-      </p:grpSp>
-      <p:grpSp>
-        <p:nvGrpSpPr>
-          <p:cNvPr name="Group 90" id="90"/>
-          <p:cNvGrpSpPr/>
-          <p:nvPr/>
-        </p:nvGrpSpPr>
-        <p:grpSpPr>
-          <a:xfrm rot="0">
-            <a:off x="12164263" y="5068519"/>
-            <a:ext cx="5170018" cy="1490472"/>
-            <a:chOff x="0" y="0"/>
-            <a:chExt cx="6893357" cy="1987296"/>
-          </a:xfrm>
-        </p:grpSpPr>
-        <p:sp>
-          <p:nvSpPr>
-            <p:cNvPr name="Freeform 91" id="91"/>
-            <p:cNvSpPr/>
-            <p:nvPr/>
-          </p:nvSpPr>
-          <p:spPr>
-            <a:xfrm flipH="false" flipV="false" rot="0">
-              <a:off x="0" y="0"/>
-              <a:ext cx="6893306" cy="1987169"/>
-            </a:xfrm>
-            <a:custGeom>
-              <a:avLst/>
-              <a:gdLst/>
-              <a:ahLst/>
-              <a:cxnLst/>
-              <a:rect r="r" b="b" t="t" l="l"/>
-              <a:pathLst>
-                <a:path h="1987169" w="6893306">
-                  <a:moveTo>
-                    <a:pt x="0" y="715391"/>
-                  </a:moveTo>
-                  <a:cubicBezTo>
-                    <a:pt x="0" y="320294"/>
-                    <a:pt x="320294" y="0"/>
-                    <a:pt x="715391" y="0"/>
-                  </a:cubicBezTo>
-                  <a:lnTo>
-                    <a:pt x="6177915" y="0"/>
-                  </a:lnTo>
-                  <a:cubicBezTo>
-                    <a:pt x="6573012" y="0"/>
-                    <a:pt x="6893306" y="320294"/>
-                    <a:pt x="6893306" y="715391"/>
-                  </a:cubicBezTo>
-                  <a:lnTo>
-                    <a:pt x="6893306" y="1271778"/>
-                  </a:lnTo>
-                  <a:cubicBezTo>
-                    <a:pt x="6893306" y="1666875"/>
-                    <a:pt x="6573012" y="1987169"/>
-                    <a:pt x="6177915" y="1987169"/>
-                  </a:cubicBezTo>
-                  <a:lnTo>
-                    <a:pt x="715391" y="1987169"/>
-                  </a:lnTo>
-                  <a:cubicBezTo>
-                    <a:pt x="320294" y="1987296"/>
-                    <a:pt x="0" y="1667002"/>
-                    <a:pt x="0" y="1271905"/>
-                  </a:cubicBezTo>
-                  <a:close/>
-                </a:path>
-              </a:pathLst>
-            </a:custGeom>
-            <a:solidFill>
-              <a:srgbClr val="F6EDEA"/>
-            </a:solidFill>
-          </p:spPr>
-        </p:sp>
-      </p:grpSp>
-      <p:grpSp>
-        <p:nvGrpSpPr>
-          <p:cNvPr name="Group 92" id="92"/>
-          <p:cNvGrpSpPr/>
-          <p:nvPr/>
-        </p:nvGrpSpPr>
-        <p:grpSpPr>
-          <a:xfrm rot="0">
-            <a:off x="12164263" y="6099048"/>
-            <a:ext cx="5170018" cy="475488"/>
-            <a:chOff x="0" y="0"/>
-            <a:chExt cx="6893357" cy="633984"/>
-          </a:xfrm>
-        </p:grpSpPr>
-        <p:sp>
-          <p:nvSpPr>
-            <p:cNvPr name="Freeform 93" id="93"/>
-            <p:cNvSpPr/>
-            <p:nvPr/>
-          </p:nvSpPr>
-          <p:spPr>
-            <a:xfrm flipH="false" flipV="false" rot="0">
-              <a:off x="0" y="0"/>
-              <a:ext cx="6893306" cy="633984"/>
-            </a:xfrm>
-            <a:custGeom>
-              <a:avLst/>
-              <a:gdLst/>
-              <a:ahLst/>
-              <a:cxnLst/>
-              <a:rect r="r" b="b" t="t" l="l"/>
-              <a:pathLst>
-                <a:path h="633984" w="6893306">
-                  <a:moveTo>
-                    <a:pt x="0" y="0"/>
-                  </a:moveTo>
-                  <a:lnTo>
-                    <a:pt x="6893306" y="0"/>
-                  </a:lnTo>
-                  <a:lnTo>
-                    <a:pt x="6893306" y="633984"/>
-                  </a:lnTo>
-                  <a:lnTo>
-                    <a:pt x="0" y="633984"/>
-                  </a:lnTo>
-                  <a:close/>
-                </a:path>
-              </a:pathLst>
-            </a:custGeom>
-            <a:solidFill>
-              <a:srgbClr val="F6EDEA"/>
-            </a:solidFill>
-          </p:spPr>
-        </p:sp>
-      </p:grpSp>
-      <p:sp>
-        <p:nvSpPr>
-          <p:cNvPr name="AutoShape 94" id="94"/>
-          <p:cNvSpPr/>
-          <p:nvPr/>
-        </p:nvSpPr>
-        <p:spPr>
-          <a:xfrm rot="6780">
-            <a:off x="12174722" y="6569774"/>
-            <a:ext cx="5149101" cy="0"/>
-          </a:xfrm>
-          <a:prstGeom prst="line">
-            <a:avLst/>
-          </a:prstGeom>
-          <a:ln cap="rnd" w="9525">
-            <a:solidFill>
-              <a:srgbClr val="DFE8E8"/>
-            </a:solidFill>
-            <a:prstDash val="solid"/>
-            <a:headEnd type="none" len="sm" w="sm"/>
-            <a:tailEnd type="none" len="sm" w="sm"/>
-          </a:ln>
-        </p:spPr>
-      </p:sp>
-      <p:grpSp>
-        <p:nvGrpSpPr>
-          <p:cNvPr name="Group 95" id="95"/>
-          <p:cNvGrpSpPr/>
-          <p:nvPr/>
-        </p:nvGrpSpPr>
-        <p:grpSpPr>
-          <a:xfrm rot="0">
-            <a:off x="12481560" y="5330952"/>
-            <a:ext cx="1051560" cy="1051560"/>
-            <a:chOff x="0" y="0"/>
-            <a:chExt cx="1402080" cy="1402080"/>
-          </a:xfrm>
-        </p:grpSpPr>
-        <p:sp>
-          <p:nvSpPr>
-            <p:cNvPr name="Freeform 96" id="96"/>
-            <p:cNvSpPr/>
-            <p:nvPr/>
-          </p:nvSpPr>
-          <p:spPr>
-            <a:xfrm flipH="false" flipV="false" rot="0">
-              <a:off x="0" y="0"/>
-              <a:ext cx="1402080" cy="1402080"/>
-            </a:xfrm>
-            <a:custGeom>
-              <a:avLst/>
-              <a:gdLst/>
-              <a:ahLst/>
-              <a:cxnLst/>
-              <a:rect r="r" b="b" t="t" l="l"/>
-              <a:pathLst>
-                <a:path h="1402080" w="1402080">
-                  <a:moveTo>
-                    <a:pt x="0" y="701040"/>
-                  </a:moveTo>
-                  <a:cubicBezTo>
-                    <a:pt x="0" y="313817"/>
-                    <a:pt x="313817" y="0"/>
-                    <a:pt x="701040" y="0"/>
-                  </a:cubicBezTo>
-                  <a:cubicBezTo>
-                    <a:pt x="1088263" y="0"/>
-                    <a:pt x="1402080" y="313817"/>
-                    <a:pt x="1402080" y="701040"/>
-                  </a:cubicBezTo>
-                  <a:cubicBezTo>
-                    <a:pt x="1402080" y="1088263"/>
-                    <a:pt x="1088263" y="1402080"/>
-                    <a:pt x="701040" y="1402080"/>
-                  </a:cubicBezTo>
-                  <a:cubicBezTo>
-                    <a:pt x="313817" y="1402080"/>
-                    <a:pt x="0" y="1088263"/>
-                    <a:pt x="0" y="701040"/>
-                  </a:cubicBezTo>
-                  <a:close/>
-                </a:path>
-              </a:pathLst>
-            </a:custGeom>
-            <a:solidFill>
-              <a:srgbClr val="A95E53"/>
-            </a:solidFill>
-          </p:spPr>
-        </p:sp>
-      </p:grpSp>
-      <p:grpSp>
-        <p:nvGrpSpPr>
-          <p:cNvPr name="Group 97" id="97"/>
-          <p:cNvGrpSpPr/>
-          <p:nvPr/>
-        </p:nvGrpSpPr>
-        <p:grpSpPr>
-          <a:xfrm rot="0">
-            <a:off x="12679804" y="5510908"/>
-            <a:ext cx="499615" cy="591055"/>
-            <a:chOff x="0" y="0"/>
-            <a:chExt cx="666153" cy="788073"/>
-          </a:xfrm>
-        </p:grpSpPr>
-        <p:sp>
-          <p:nvSpPr>
-            <p:cNvPr name="Freeform 98" id="98"/>
-            <p:cNvSpPr/>
-            <p:nvPr/>
-          </p:nvSpPr>
-          <p:spPr>
-            <a:xfrm flipH="false" flipV="false" rot="0">
-              <a:off x="0" y="0"/>
-              <a:ext cx="666242" cy="788162"/>
-            </a:xfrm>
-            <a:custGeom>
-              <a:avLst/>
-              <a:gdLst/>
-              <a:ahLst/>
-              <a:cxnLst/>
-              <a:rect r="r" b="b" t="t" l="l"/>
-              <a:pathLst>
-                <a:path h="788162" w="666242">
-                  <a:moveTo>
-                    <a:pt x="0" y="99949"/>
-                  </a:moveTo>
-                  <a:cubicBezTo>
-                    <a:pt x="0" y="44704"/>
-                    <a:pt x="44704" y="0"/>
-                    <a:pt x="99949" y="0"/>
-                  </a:cubicBezTo>
-                  <a:lnTo>
-                    <a:pt x="566293" y="0"/>
-                  </a:lnTo>
-                  <a:cubicBezTo>
-                    <a:pt x="621538" y="0"/>
-                    <a:pt x="666242" y="44704"/>
-                    <a:pt x="666242" y="99949"/>
-                  </a:cubicBezTo>
-                  <a:lnTo>
-                    <a:pt x="666242" y="688213"/>
-                  </a:lnTo>
-                  <a:cubicBezTo>
-                    <a:pt x="666242" y="743458"/>
-                    <a:pt x="621538" y="788162"/>
-                    <a:pt x="566293" y="788162"/>
-                  </a:cubicBezTo>
-                  <a:lnTo>
-                    <a:pt x="99949" y="788162"/>
-                  </a:lnTo>
-                  <a:cubicBezTo>
-                    <a:pt x="44704" y="788035"/>
-                    <a:pt x="0" y="743331"/>
-                    <a:pt x="0" y="688213"/>
-                  </a:cubicBezTo>
-                  <a:close/>
-                </a:path>
-              </a:pathLst>
-            </a:custGeom>
-            <a:solidFill>
-              <a:srgbClr val="A95E53"/>
-            </a:solidFill>
-            <a:ln w="24130" cap="sq">
-              <a:solidFill>
-                <a:srgbClr val="FFFFFF"/>
-              </a:solidFill>
-              <a:prstDash val="solid"/>
-              <a:miter/>
-            </a:ln>
-          </p:spPr>
-        </p:sp>
-      </p:grpSp>
-      <p:grpSp>
-        <p:nvGrpSpPr>
-          <p:cNvPr name="Group 99" id="99"/>
-          <p:cNvGrpSpPr/>
-          <p:nvPr/>
-        </p:nvGrpSpPr>
-        <p:grpSpPr>
-          <a:xfrm rot="0">
-            <a:off x="12835252" y="5620636"/>
-            <a:ext cx="472183" cy="581911"/>
-            <a:chOff x="0" y="0"/>
-            <a:chExt cx="629577" cy="775881"/>
-          </a:xfrm>
-        </p:grpSpPr>
-        <p:sp>
-          <p:nvSpPr>
-            <p:cNvPr name="Freeform 100" id="100"/>
-            <p:cNvSpPr/>
-            <p:nvPr/>
-          </p:nvSpPr>
-          <p:spPr>
-            <a:xfrm flipH="false" flipV="false" rot="0">
-              <a:off x="0" y="0"/>
-              <a:ext cx="629666" cy="775970"/>
-            </a:xfrm>
-            <a:custGeom>
-              <a:avLst/>
-              <a:gdLst/>
-              <a:ahLst/>
-              <a:cxnLst/>
-              <a:rect r="r" b="b" t="t" l="l"/>
-              <a:pathLst>
-                <a:path h="775970" w="629666">
-                  <a:moveTo>
-                    <a:pt x="0" y="94488"/>
-                  </a:moveTo>
-                  <a:cubicBezTo>
-                    <a:pt x="0" y="42291"/>
-                    <a:pt x="42291" y="0"/>
-                    <a:pt x="94488" y="0"/>
-                  </a:cubicBezTo>
-                  <a:lnTo>
-                    <a:pt x="535178" y="0"/>
-                  </a:lnTo>
-                  <a:cubicBezTo>
-                    <a:pt x="587375" y="0"/>
-                    <a:pt x="629666" y="42291"/>
-                    <a:pt x="629666" y="94488"/>
-                  </a:cubicBezTo>
-                  <a:lnTo>
-                    <a:pt x="629666" y="681482"/>
-                  </a:lnTo>
-                  <a:cubicBezTo>
-                    <a:pt x="629666" y="733679"/>
-                    <a:pt x="587375" y="775970"/>
-                    <a:pt x="535178" y="775970"/>
-                  </a:cubicBezTo>
-                  <a:lnTo>
-                    <a:pt x="94488" y="775970"/>
-                  </a:lnTo>
-                  <a:cubicBezTo>
-                    <a:pt x="42291" y="775843"/>
-                    <a:pt x="0" y="733552"/>
-                    <a:pt x="0" y="681482"/>
-                  </a:cubicBezTo>
-                  <a:close/>
-                </a:path>
-              </a:pathLst>
-            </a:custGeom>
-            <a:solidFill>
-              <a:srgbClr val="A95E53"/>
-            </a:solidFill>
-            <a:ln w="24130" cap="sq">
-              <a:solidFill>
-                <a:srgbClr val="FFFFFF"/>
-              </a:solidFill>
-              <a:prstDash val="solid"/>
-              <a:miter/>
-            </a:ln>
-          </p:spPr>
-        </p:sp>
-      </p:grpSp>
-      <p:sp>
-        <p:nvSpPr>
-          <p:cNvPr name="AutoShape 101" id="101"/>
-          <p:cNvSpPr/>
-          <p:nvPr/>
-        </p:nvSpPr>
-        <p:spPr>
-          <a:xfrm rot="215760">
-            <a:off x="12920443" y="5810821"/>
-            <a:ext cx="283512" cy="0"/>
-          </a:xfrm>
-          <a:prstGeom prst="line">
-            <a:avLst/>
-          </a:prstGeom>
-          <a:ln cap="rnd" w="9525">
-            <a:solidFill>
-              <a:srgbClr val="FFFFFF"/>
-            </a:solidFill>
-            <a:prstDash val="solid"/>
-            <a:headEnd type="none" len="sm" w="sm"/>
-            <a:tailEnd type="none" len="sm" w="sm"/>
-          </a:ln>
-        </p:spPr>
-      </p:sp>
-      <p:sp>
-        <p:nvSpPr>
-          <p:cNvPr name="AutoShape 102" id="102"/>
-          <p:cNvSpPr/>
-          <p:nvPr/>
-        </p:nvSpPr>
-        <p:spPr>
-          <a:xfrm rot="215760">
-            <a:off x="12920443" y="5902262"/>
-            <a:ext cx="283512" cy="0"/>
-          </a:xfrm>
-          <a:prstGeom prst="line">
-            <a:avLst/>
-          </a:prstGeom>
-          <a:ln cap="rnd" w="9525">
-            <a:solidFill>
-              <a:srgbClr val="FFFFFF"/>
-            </a:solidFill>
-            <a:prstDash val="solid"/>
-            <a:headEnd type="none" len="sm" w="sm"/>
-            <a:tailEnd type="none" len="sm" w="sm"/>
-          </a:ln>
-        </p:spPr>
-      </p:sp>
-      <p:sp>
-        <p:nvSpPr>
-          <p:cNvPr name="AutoShape 103" id="103"/>
-          <p:cNvSpPr/>
-          <p:nvPr/>
-        </p:nvSpPr>
-        <p:spPr>
-          <a:xfrm rot="215760">
-            <a:off x="12920443" y="5993702"/>
-            <a:ext cx="283512" cy="0"/>
-          </a:xfrm>
-          <a:prstGeom prst="line">
-            <a:avLst/>
-          </a:prstGeom>
-          <a:ln cap="rnd" w="9525">
-            <a:solidFill>
-              <a:srgbClr val="FFFFFF"/>
-            </a:solidFill>
-            <a:prstDash val="solid"/>
-            <a:headEnd type="none" len="sm" w="sm"/>
-            <a:tailEnd type="none" len="sm" w="sm"/>
-          </a:ln>
-        </p:spPr>
-      </p:sp>
-      <p:sp>
-        <p:nvSpPr>
-          <p:cNvPr name="AutoShape 104" id="104"/>
-          <p:cNvSpPr/>
-          <p:nvPr/>
-        </p:nvSpPr>
-        <p:spPr>
-          <a:xfrm rot="10170540">
-            <a:off x="12624530" y="6171819"/>
-            <a:ext cx="125540" cy="0"/>
-          </a:xfrm>
-          <a:prstGeom prst="line">
-            <a:avLst/>
-          </a:prstGeom>
-          <a:ln cap="rnd" w="19050">
-            <a:solidFill>
-              <a:srgbClr val="FFFFFF"/>
-            </a:solidFill>
-            <a:prstDash val="solid"/>
-            <a:headEnd type="none" len="sm" w="sm"/>
-            <a:tailEnd type="none" len="sm" w="sm"/>
-          </a:ln>
-        </p:spPr>
-      </p:sp>
-      <p:sp>
-        <p:nvSpPr>
-          <p:cNvPr name="AutoShape 105" id="105"/>
-          <p:cNvSpPr/>
-          <p:nvPr/>
-        </p:nvSpPr>
-        <p:spPr>
-          <a:xfrm rot="-4813080">
-            <a:off x="12569733" y="6116955"/>
-            <a:ext cx="134541" cy="0"/>
-          </a:xfrm>
-          <a:prstGeom prst="line">
-            <a:avLst/>
-          </a:prstGeom>
-          <a:ln cap="rnd" w="19050">
-            <a:solidFill>
-              <a:srgbClr val="FFFFFF"/>
-            </a:solidFill>
-            <a:prstDash val="solid"/>
-            <a:headEnd type="none" len="sm" w="sm"/>
-            <a:tailEnd type="none" len="sm" w="sm"/>
-          </a:ln>
-        </p:spPr>
-      </p:sp>
-      <p:sp>
-        <p:nvSpPr>
-          <p:cNvPr name="AutoShape 106" id="106"/>
-          <p:cNvSpPr/>
-          <p:nvPr/>
-        </p:nvSpPr>
-        <p:spPr>
-          <a:xfrm rot="8100000">
-            <a:off x="12565656" y="6084951"/>
-            <a:ext cx="96984" cy="0"/>
-          </a:xfrm>
-          <a:prstGeom prst="line">
-            <a:avLst/>
-          </a:prstGeom>
-          <a:ln cap="rnd" w="19050">
-            <a:solidFill>
-              <a:srgbClr val="FFFFFF"/>
-            </a:solidFill>
-            <a:prstDash val="solid"/>
-            <a:headEnd type="none" len="sm" w="sm"/>
-            <a:tailEnd type="none" len="sm" w="sm"/>
-          </a:ln>
-        </p:spPr>
-      </p:sp>
-      <p:sp>
-        <p:nvSpPr>
-          <p:cNvPr name="AutoShape 107" id="107"/>
-          <p:cNvSpPr/>
-          <p:nvPr/>
-        </p:nvSpPr>
-        <p:spPr>
-          <a:xfrm rot="2485440">
-            <a:off x="12612614" y="6084951"/>
-            <a:ext cx="103651" cy="0"/>
-          </a:xfrm>
-          <a:prstGeom prst="line">
-            <a:avLst/>
-          </a:prstGeom>
-          <a:ln cap="rnd" w="19050">
-            <a:solidFill>
-              <a:srgbClr val="FFFFFF"/>
-            </a:solidFill>
-            <a:prstDash val="solid"/>
-            <a:headEnd type="none" len="sm" w="sm"/>
-            <a:tailEnd type="none" len="sm" w="sm"/>
-          </a:ln>
-        </p:spPr>
-      </p:sp>
-      <p:grpSp>
-        <p:nvGrpSpPr>
-          <p:cNvPr name="Group 108" id="108"/>
-          <p:cNvGrpSpPr/>
-          <p:nvPr/>
-        </p:nvGrpSpPr>
-        <p:grpSpPr>
-          <a:xfrm rot="0">
-            <a:off x="15663672" y="5413248"/>
-            <a:ext cx="1280160" cy="329184"/>
-            <a:chOff x="0" y="0"/>
-            <a:chExt cx="1706880" cy="438912"/>
-          </a:xfrm>
-        </p:grpSpPr>
-        <p:sp>
-          <p:nvSpPr>
-            <p:cNvPr name="Freeform 109" id="109"/>
-            <p:cNvSpPr/>
-            <p:nvPr/>
-          </p:nvSpPr>
-          <p:spPr>
-            <a:xfrm flipH="false" flipV="false" rot="0">
-              <a:off x="0" y="0"/>
-              <a:ext cx="1706880" cy="438912"/>
-            </a:xfrm>
-            <a:custGeom>
-              <a:avLst/>
-              <a:gdLst/>
-              <a:ahLst/>
-              <a:cxnLst/>
-              <a:rect r="r" b="b" t="t" l="l"/>
-              <a:pathLst>
-                <a:path h="438912" w="1706880">
-                  <a:moveTo>
-                    <a:pt x="0" y="0"/>
-                  </a:moveTo>
-                  <a:lnTo>
-                    <a:pt x="1706880" y="0"/>
-                  </a:lnTo>
-                  <a:lnTo>
-                    <a:pt x="1706880" y="438912"/>
-                  </a:lnTo>
-                  <a:lnTo>
-                    <a:pt x="0" y="438912"/>
-                  </a:lnTo>
-                  <a:close/>
-                </a:path>
-              </a:pathLst>
-            </a:custGeom>
-            <a:blipFill>
-              <a:blip r:embed="rId10">
-                <a:alphaModFix amt="0"/>
-              </a:blip>
-              <a:stretch>
-                <a:fillRect l="0" t="-25775" r="0" b="-25775"/>
-              </a:stretch>
-            </a:blipFill>
-          </p:spPr>
-        </p:sp>
-        <p:sp>
-          <p:nvSpPr>
-            <p:cNvPr name="TextBox 110" id="110"/>
-            <p:cNvSpPr txBox="true"/>
-            <p:nvPr/>
-          </p:nvSpPr>
-          <p:spPr>
-            <a:xfrm>
-              <a:off x="0" y="-9525"/>
-              <a:ext cx="1706880" cy="448437"/>
-            </a:xfrm>
-            <a:prstGeom prst="rect">
-              <a:avLst/>
-            </a:prstGeom>
-          </p:spPr>
-          <p:txBody>
-            <a:bodyPr anchor="ctr" rtlCol="false" tIns="0" lIns="0" bIns="0" rIns="0"/>
-            <a:lstStyle/>
-            <a:p>
-              <a:pPr algn="r">
-                <a:lnSpc>
-                  <a:spcPts val="1584"/>
-                </a:lnSpc>
-              </a:pPr>
-              <a:r>
-                <a:rPr lang="en-US" sz="1320" b="true">
-                  <a:solidFill>
-                    <a:srgbClr val="A95E53"/>
-                  </a:solidFill>
-                  <a:latin typeface="Poppins Bold"/>
-                  <a:ea typeface="Poppins Bold"/>
-                  <a:cs typeface="Poppins Bold"/>
-                  <a:sym typeface="Poppins Bold"/>
-                </a:rPr>
-                <a:t>PAIN 03</a:t>
-              </a:r>
-            </a:p>
-          </p:txBody>
-        </p:sp>
-      </p:grpSp>
-      <p:grpSp>
-        <p:nvGrpSpPr>
-          <p:cNvPr name="Group 111" id="111"/>
-          <p:cNvGrpSpPr/>
-          <p:nvPr/>
-        </p:nvGrpSpPr>
-        <p:grpSpPr>
-          <a:xfrm rot="0">
-            <a:off x="12508992" y="7022592"/>
-            <a:ext cx="4480560" cy="557784"/>
-            <a:chOff x="0" y="0"/>
-            <a:chExt cx="5974080" cy="743712"/>
-          </a:xfrm>
-        </p:grpSpPr>
-        <p:sp>
-          <p:nvSpPr>
-            <p:cNvPr name="Freeform 112" id="112"/>
-            <p:cNvSpPr/>
-            <p:nvPr/>
-          </p:nvSpPr>
-          <p:spPr>
-            <a:xfrm flipH="false" flipV="false" rot="0">
-              <a:off x="0" y="0"/>
-              <a:ext cx="5974079" cy="743712"/>
-            </a:xfrm>
-            <a:custGeom>
-              <a:avLst/>
-              <a:gdLst/>
-              <a:ahLst/>
-              <a:cxnLst/>
-              <a:rect r="r" b="b" t="t" l="l"/>
-              <a:pathLst>
-                <a:path h="743712" w="5974079">
-                  <a:moveTo>
-                    <a:pt x="0" y="0"/>
-                  </a:moveTo>
-                  <a:lnTo>
-                    <a:pt x="5974079" y="0"/>
-                  </a:lnTo>
-                  <a:lnTo>
-                    <a:pt x="5974079" y="743712"/>
-                  </a:lnTo>
-                  <a:lnTo>
-                    <a:pt x="0" y="743712"/>
-                  </a:lnTo>
-                  <a:close/>
-                </a:path>
-              </a:pathLst>
-            </a:custGeom>
-            <a:blipFill>
-              <a:blip r:embed="rId10">
-                <a:alphaModFix amt="0"/>
-              </a:blip>
-              <a:stretch>
-                <a:fillRect l="0" t="-106519" r="0" b="-106519"/>
-              </a:stretch>
-            </a:blipFill>
-          </p:spPr>
-        </p:sp>
-        <p:sp>
-          <p:nvSpPr>
-            <p:cNvPr name="TextBox 113" id="113"/>
-            <p:cNvSpPr txBox="true"/>
-            <p:nvPr/>
-          </p:nvSpPr>
-          <p:spPr>
-            <a:xfrm>
-              <a:off x="0" y="-28575"/>
-              <a:ext cx="5974080" cy="772287"/>
-            </a:xfrm>
-            <a:prstGeom prst="rect">
-              <a:avLst/>
-            </a:prstGeom>
-          </p:spPr>
-          <p:txBody>
-            <a:bodyPr anchor="ctr" rtlCol="false" tIns="0" lIns="0" bIns="0" rIns="0"/>
-            <a:lstStyle/>
-            <a:p>
-              <a:pPr algn="l">
-                <a:lnSpc>
-                  <a:spcPts val="3287"/>
-                </a:lnSpc>
-              </a:pPr>
-              <a:r>
-                <a:rPr lang="en-US" sz="2739" b="true">
-                  <a:solidFill>
-                    <a:srgbClr val="171717"/>
-                  </a:solidFill>
-                  <a:latin typeface="Poppins Bold"/>
-                  <a:ea typeface="Poppins Bold"/>
-                  <a:cs typeface="Poppins Bold"/>
-                  <a:sym typeface="Poppins Bold"/>
-                </a:rPr>
-                <a:t>LEGAL OVERHEAD</a:t>
-              </a:r>
-            </a:p>
-          </p:txBody>
-        </p:sp>
-      </p:grpSp>
-      <p:grpSp>
-        <p:nvGrpSpPr>
-          <p:cNvPr name="Group 114" id="114"/>
-          <p:cNvGrpSpPr/>
-          <p:nvPr/>
-        </p:nvGrpSpPr>
-        <p:grpSpPr>
-          <a:xfrm rot="0">
-            <a:off x="12518136" y="7754112"/>
-            <a:ext cx="4462272" cy="448056"/>
-            <a:chOff x="0" y="0"/>
-            <a:chExt cx="5949696" cy="597408"/>
-          </a:xfrm>
-        </p:grpSpPr>
-        <p:sp>
-          <p:nvSpPr>
-            <p:cNvPr name="Freeform 115" id="115"/>
-            <p:cNvSpPr/>
-            <p:nvPr/>
-          </p:nvSpPr>
-          <p:spPr>
-            <a:xfrm flipH="false" flipV="false" rot="0">
-              <a:off x="0" y="0"/>
-              <a:ext cx="5949696" cy="597408"/>
-            </a:xfrm>
-            <a:custGeom>
-              <a:avLst/>
-              <a:gdLst/>
-              <a:ahLst/>
-              <a:cxnLst/>
-              <a:rect r="r" b="b" t="t" l="l"/>
-              <a:pathLst>
-                <a:path h="597408" w="5949696">
-                  <a:moveTo>
-                    <a:pt x="0" y="0"/>
-                  </a:moveTo>
-                  <a:lnTo>
-                    <a:pt x="5949696" y="0"/>
-                  </a:lnTo>
-                  <a:lnTo>
-                    <a:pt x="5949696" y="597408"/>
-                  </a:lnTo>
-                  <a:lnTo>
-                    <a:pt x="0" y="597408"/>
-                  </a:lnTo>
-                  <a:close/>
-                </a:path>
-              </a:pathLst>
-            </a:custGeom>
-            <a:blipFill>
-              <a:blip r:embed="rId10">
-                <a:alphaModFix amt="0"/>
-              </a:blip>
-              <a:stretch>
-                <a:fillRect l="0" t="-144055" r="0" b="-144055"/>
-              </a:stretch>
-            </a:blipFill>
-          </p:spPr>
-        </p:sp>
-        <p:sp>
-          <p:nvSpPr>
-            <p:cNvPr name="TextBox 116" id="116"/>
-            <p:cNvSpPr txBox="true"/>
-            <p:nvPr/>
-          </p:nvSpPr>
-          <p:spPr>
-            <a:xfrm>
-              <a:off x="0" y="-19050"/>
-              <a:ext cx="5949696" cy="616458"/>
-            </a:xfrm>
-            <a:prstGeom prst="rect">
-              <a:avLst/>
-            </a:prstGeom>
-          </p:spPr>
-          <p:txBody>
-            <a:bodyPr anchor="ctr" rtlCol="false" tIns="0" lIns="0" bIns="0" rIns="0"/>
-            <a:lstStyle/>
-            <a:p>
-              <a:pPr algn="l">
-                <a:lnSpc>
-                  <a:spcPts val="2459"/>
-                </a:lnSpc>
-              </a:pPr>
-              <a:r>
-                <a:rPr lang="en-US" sz="2049">
-                  <a:solidFill>
-                    <a:srgbClr val="56636A"/>
-                  </a:solidFill>
-                  <a:latin typeface="Poppins"/>
-                  <a:ea typeface="Poppins"/>
-                  <a:cs typeface="Poppins"/>
-                  <a:sym typeface="Poppins"/>
-                </a:rPr>
-                <a:t>Fact-finding repeats</a:t>
-              </a:r>
-            </a:p>
-          </p:txBody>
-        </p:sp>
-      </p:grpSp>
-      <p:grpSp>
-        <p:nvGrpSpPr>
-          <p:cNvPr name="Group 117" id="117"/>
-          <p:cNvGrpSpPr/>
-          <p:nvPr/>
-        </p:nvGrpSpPr>
-        <p:grpSpPr>
-          <a:xfrm rot="0">
-            <a:off x="4158586" y="1272016"/>
-            <a:ext cx="269215" cy="222028"/>
-            <a:chOff x="0" y="0"/>
-            <a:chExt cx="358953" cy="296037"/>
-          </a:xfrm>
-        </p:grpSpPr>
-        <p:sp>
-          <p:nvSpPr>
-            <p:cNvPr name="Freeform 118" id="118" descr="image.png"/>
-            <p:cNvSpPr/>
-            <p:nvPr/>
-          </p:nvSpPr>
-          <p:spPr>
-            <a:xfrm flipH="false" flipV="false" rot="0">
-              <a:off x="0" y="0"/>
-              <a:ext cx="358902" cy="296037"/>
-            </a:xfrm>
-            <a:custGeom>
-              <a:avLst/>
-              <a:gdLst/>
-              <a:ahLst/>
-              <a:cxnLst/>
-              <a:rect r="r" b="b" t="t" l="l"/>
-              <a:pathLst>
-                <a:path h="296037" w="358902">
-                  <a:moveTo>
-                    <a:pt x="0" y="0"/>
-                  </a:moveTo>
-                  <a:lnTo>
-                    <a:pt x="358902" y="0"/>
-                  </a:lnTo>
-                  <a:lnTo>
-                    <a:pt x="358902" y="296037"/>
-                  </a:lnTo>
-                  <a:lnTo>
-                    <a:pt x="0" y="296037"/>
-                  </a:lnTo>
-                  <a:lnTo>
-                    <a:pt x="0" y="0"/>
-                  </a:lnTo>
-                  <a:close/>
-                </a:path>
-              </a:pathLst>
-            </a:custGeom>
-            <a:blipFill>
-              <a:blip r:embed="rId11"/>
-              <a:stretch>
-                <a:fillRect l="0" t="0" r="-14" b="0"/>
-              </a:stretch>
-            </a:blipFill>
-          </p:spPr>
-        </p:sp>
-      </p:grpSp>
     </p:spTree>
   </p:cSld>
   <p:clrMapOvr>
     <a:masterClrMapping/>
   </p:clrMapOvr>
-  <p:transition spd="fast">
-    <p:fade/>
-  </p:transition>
 </p:sld>
 </file>
 
